--- a/Docs/BToken-Sync-Flow.pptx
+++ b/Docs/BToken-Sync-Flow.pptx
@@ -129,6 +129,9 @@
           </p14:sldIdLst>
         </p14:section>
       </p14:sectionLst>
+    </p:ext>
+    <p:ext uri="{EFAFB233-063F-42B5-8137-9DF3F51BA10A}">
+      <p15:sldGuideLst xmlns:p15="http://schemas.microsoft.com/office/powerpoint/2012/main"/>
     </p:ext>
   </p:extLst>
 </p:presentation>
@@ -7599,7 +7602,7 @@
                 </a:solidFill>
                 <a:latin typeface="Consolas" panose="020B0609020204030204" pitchFamily="49" charset="0"/>
               </a:rPr>
-              <a:t>HeaderTipReceivedLast</a:t>
+              <a:t>HeaderTipReceivedLast*</a:t>
             </a:r>
           </a:p>
         </p:txBody>
@@ -7669,7 +7672,7 @@
           </a:xfrm>
           <a:prstGeom prst="bentConnector3">
             <a:avLst>
-              <a:gd name="adj1" fmla="val 81329"/>
+              <a:gd name="adj1" fmla="val 40348"/>
             </a:avLst>
           </a:prstGeom>
           <a:ln w="19050">
@@ -7804,6 +7807,106 @@
           <a:p>
             <a:pPr algn="ctr"/>
             <a:endParaRPr lang="de-CH"/>
+          </a:p>
+        </p:txBody>
+      </p:sp>
+      <p:sp>
+        <p:nvSpPr>
+          <p:cNvPr id="4" name="footnote HeaderTipReceivedLast">
+            <a:extLst>
+              <a:ext uri="{FF2B5EF4-FFF2-40B4-BE49-F238E27FC236}">
+                <a16:creationId xmlns:a16="http://schemas.microsoft.com/office/drawing/2014/main" id="{18B49A5D-49CE-2BD8-E6E4-E4F741A23106}"/>
+              </a:ext>
+            </a:extLst>
+          </p:cNvPr>
+          <p:cNvSpPr txBox="1"/>
+          <p:nvPr/>
+        </p:nvSpPr>
+        <p:spPr>
+          <a:xfrm>
+            <a:off x="508000" y="5918200"/>
+            <a:ext cx="11176000" cy="230832"/>
+          </a:xfrm>
+          <a:prstGeom prst="rect">
+            <a:avLst/>
+          </a:prstGeom>
+          <a:noFill/>
+        </p:spPr>
+        <p:txBody>
+          <a:bodyPr vert="horz" wrap="square" lIns="0" rtlCol="0">
+            <a:spAutoFit/>
+          </a:bodyPr>
+          <a:lstStyle/>
+          <a:p>
+            <a:r>
+              <a:rPr lang="en-US" sz="850" b="1" dirty="0">
+                <a:solidFill>
+                  <a:srgbClr val="134E4A"/>
+                </a:solidFill>
+                <a:latin typeface="Consolas" panose="020B0609020204030204" pitchFamily="49" charset="0"/>
+              </a:rPr>
+              <a:t>* </a:t>
+            </a:r>
+            <a:r>
+              <a:rPr lang="en-US" sz="850" b="1" dirty="0" err="1">
+                <a:solidFill>
+                  <a:srgbClr val="134E4A"/>
+                </a:solidFill>
+                <a:latin typeface="Consolas" panose="020B0609020204030204" pitchFamily="49" charset="0"/>
+              </a:rPr>
+              <a:t>HeaderTipReceivedLast</a:t>
+            </a:r>
+            <a:r>
+              <a:rPr lang="en-US" sz="900" i="1" dirty="0">
+                <a:solidFill>
+                  <a:srgbClr val="64748B"/>
+                </a:solidFill>
+                <a:latin typeface="Segoe UI" panose="020B0502040204020203" pitchFamily="34" charset="0"/>
+              </a:rPr>
+              <a:t> – this peer's latest header, as linked in the chain; </a:t>
+            </a:r>
+            <a:r>
+              <a:rPr lang="en-US" sz="850" b="1" dirty="0" err="1">
+                <a:solidFill>
+                  <a:srgbClr val="134E4A"/>
+                </a:solidFill>
+                <a:latin typeface="Consolas" panose="020B0609020204030204" pitchFamily="49" charset="0"/>
+              </a:rPr>
+              <a:t>StartBlockDownloadDispatcher</a:t>
+            </a:r>
+            <a:r>
+              <a:rPr lang="en-US" sz="900" i="1" dirty="0">
+                <a:solidFill>
+                  <a:srgbClr val="64748B"/>
+                </a:solidFill>
+                <a:latin typeface="Segoe UI" panose="020B0502040204020203" pitchFamily="34" charset="0"/>
+              </a:rPr>
+              <a:t> uses it to assign the peer's next block download. </a:t>
+            </a:r>
+            <a:r>
+              <a:rPr lang="en-US" sz="850" b="1" dirty="0" err="1">
+                <a:solidFill>
+                  <a:srgbClr val="134E4A"/>
+                </a:solidFill>
+                <a:latin typeface="Consolas" panose="020B0609020204030204" pitchFamily="49" charset="0"/>
+              </a:rPr>
+              <a:t>SendGetHeaders</a:t>
+            </a:r>
+            <a:r>
+              <a:rPr lang="en-US" sz="900" i="1" dirty="0">
+                <a:solidFill>
+                  <a:srgbClr val="64748B"/>
+                </a:solidFill>
+                <a:latin typeface="Segoe UI" panose="020B0502040204020203" pitchFamily="34" charset="0"/>
+              </a:rPr>
+              <a:t> uses it to request further headers.</a:t>
+            </a:r>
+            <a:endParaRPr lang="de-CH" sz="900" i="1" dirty="0">
+              <a:solidFill>
+                <a:srgbClr val="64748B"/>
+              </a:solidFill>
+              <a:latin typeface="Segoe UI" panose="020B0502040204020203" pitchFamily="34" charset="0"/>
+            </a:endParaRPr>
           </a:p>
         </p:txBody>
       </p:sp>

--- a/Docs/BToken-Sync-Flow.pptx
+++ b/Docs/BToken-Sync-Flow.pptx
@@ -7825,7 +7825,7 @@
         <p:spPr>
           <a:xfrm>
             <a:off x="508000" y="5918200"/>
-            <a:ext cx="11176000" cy="230832"/>
+            <a:ext cx="11176000" cy="369332"/>
           </a:xfrm>
           <a:prstGeom prst="rect">
             <a:avLst/>
@@ -7881,7 +7881,16 @@
                 </a:solidFill>
                 <a:latin typeface="Segoe UI" panose="020B0502040204020203" pitchFamily="34" charset="0"/>
               </a:rPr>
-              <a:t> uses it to assign the peer's next block download. </a:t>
+              <a:t> uses it to assign the peer's next </a:t>
+            </a:r>
+            <a:r>
+              <a:rPr lang="en-US" sz="900" i="1">
+                <a:solidFill>
+                  <a:srgbClr val="64748B"/>
+                </a:solidFill>
+                <a:latin typeface="Segoe UI" panose="020B0502040204020203" pitchFamily="34" charset="0"/>
+              </a:rPr>
+              <a:t>block download on its branch, up to its height. </a:t>
             </a:r>
             <a:r>
               <a:rPr lang="en-US" sz="850" b="1" dirty="0" err="1">

--- a/Docs/BToken-Sync-Flow.pptx
+++ b/Docs/BToken-Sync-Flow.pptx
@@ -3380,7 +3380,7 @@
         <p:spPr>
           <a:xfrm>
             <a:off x="508000" y="4241800"/>
-            <a:ext cx="11176000" cy="2438400"/>
+            <a:ext cx="11176000" cy="2235200"/>
           </a:xfrm>
           <a:prstGeom prst="roundRect">
             <a:avLst>
@@ -3436,7 +3436,7 @@
         <p:spPr>
           <a:xfrm>
             <a:off x="2057400" y="5359400"/>
-            <a:ext cx="3810000" cy="990600"/>
+            <a:ext cx="4191000" cy="990600"/>
           </a:xfrm>
           <a:prstGeom prst="roundRect">
             <a:avLst>
@@ -3500,7 +3500,7 @@
         <p:spPr>
           <a:xfrm>
             <a:off x="1981200" y="5308600"/>
-            <a:ext cx="3810000" cy="990600"/>
+            <a:ext cx="4191000" cy="990600"/>
           </a:xfrm>
           <a:prstGeom prst="roundRect">
             <a:avLst>
@@ -4832,99 +4832,8 @@
         </p:nvSpPr>
         <p:spPr>
           <a:xfrm>
-            <a:off x="5969000" y="4673600"/>
-            <a:ext cx="2286000" cy="1905000"/>
-          </a:xfrm>
-          <a:prstGeom prst="roundRect">
-            <a:avLst>
-              <a:gd name="adj" fmla="val 5000"/>
-            </a:avLst>
-          </a:prstGeom>
-          <a:solidFill>
-            <a:srgbClr val="FFFFFF"/>
-          </a:solidFill>
-          <a:ln w="9525" cap="flat" cmpd="sng" algn="ctr">
-            <a:solidFill>
-              <a:srgbClr val="6D28D9"/>
-            </a:solidFill>
-            <a:prstDash val="solid"/>
-            <a:miter lim="800000"/>
-          </a:ln>
-          <a:effectLst/>
-        </p:spPr>
-        <p:style>
-          <a:lnRef idx="2">
-            <a:schemeClr val="accent1">
-              <a:shade val="15000"/>
-            </a:schemeClr>
-          </a:lnRef>
-          <a:fillRef idx="1">
-            <a:schemeClr val="accent1"/>
-          </a:fillRef>
-          <a:effectRef idx="0">
-            <a:schemeClr val="accent1"/>
-          </a:effectRef>
-          <a:fontRef idx="minor">
-            <a:schemeClr val="lt1"/>
-          </a:fontRef>
-        </p:style>
-        <p:txBody>
-          <a:bodyPr wrap="none" lIns="38100" tIns="50800" rIns="38100" bIns="0" rtlCol="0" anchor="t"/>
-          <a:lstStyle/>
-          <a:p>
-            <a:pPr algn="ctr"/>
-            <a:r>
-              <a:rPr lang="en-US" sz="1100" b="1">
-                <a:solidFill>
-                  <a:srgbClr val="3B1E7A"/>
-                </a:solidFill>
-                <a:latin typeface="Consolas" panose="020B0609020204030204" pitchFamily="49" charset="0"/>
-              </a:rPr>
-              <a:t>InsertBlockReturnNextBlock</a:t>
-            </a:r>
-            <a:endParaRPr lang="en-US" sz="850">
-              <a:solidFill>
-                <a:srgbClr val="64748B"/>
-              </a:solidFill>
-              <a:latin typeface="Consolas" panose="020B0609020204030204" pitchFamily="49" charset="0"/>
-            </a:endParaRPr>
-          </a:p>
-          <a:p>
-            <a:pPr algn="ctr"/>
-            <a:r>
-              <a:rPr lang="en-US" sz="850">
-                <a:solidFill>
-                  <a:srgbClr val="64748B"/>
-                </a:solidFill>
-                <a:latin typeface="Consolas" panose="020B0609020204030204" pitchFamily="49" charset="0"/>
-              </a:rPr>
-              <a:t>insert block, pick next</a:t>
-            </a:r>
-            <a:endParaRPr lang="en-US" sz="850" dirty="0">
-              <a:solidFill>
-                <a:srgbClr val="64748B"/>
-              </a:solidFill>
-              <a:latin typeface="Consolas" panose="020B0609020204030204" pitchFamily="49" charset="0"/>
-            </a:endParaRPr>
-          </a:p>
-        </p:txBody>
-      </p:sp>
-      <p:sp>
-        <p:nvSpPr>
-          <p:cNvPr id="49" name="Blockchain.InsertBlock">
-            <a:extLst>
-              <a:ext uri="{FF2B5EF4-FFF2-40B4-BE49-F238E27FC236}">
-                <a16:creationId xmlns:a16="http://schemas.microsoft.com/office/drawing/2014/main" id="{CE4300EB-5654-2A9C-BA0B-253C8A6CC4C0}"/>
-              </a:ext>
-            </a:extLst>
-          </p:cNvPr>
-          <p:cNvSpPr/>
-          <p:nvPr/>
-        </p:nvSpPr>
-        <p:spPr>
-          <a:xfrm>
-            <a:off x="9398000" y="5372100"/>
-            <a:ext cx="1524000" cy="457200"/>
+            <a:off x="5842000" y="4673600"/>
+            <a:ext cx="2540000" cy="457200"/>
           </a:xfrm>
           <a:prstGeom prst="roundRect">
             <a:avLst>
@@ -4965,31 +4874,13 @@
           <a:p>
             <a:pPr algn="ctr"/>
             <a:r>
-              <a:rPr lang="en-US" sz="1100" b="1">
+              <a:rPr lang="en-US" sz="1100" b="1" dirty="0" err="1">
                 <a:solidFill>
                   <a:srgbClr val="3B1E7A"/>
                 </a:solidFill>
                 <a:latin typeface="Consolas" panose="020B0609020204030204" pitchFamily="49" charset="0"/>
               </a:rPr>
-              <a:t>InsertBlock</a:t>
-            </a:r>
-            <a:endParaRPr lang="en-US" sz="850">
-              <a:solidFill>
-                <a:srgbClr val="64748B"/>
-              </a:solidFill>
-              <a:latin typeface="Consolas" panose="020B0609020204030204" pitchFamily="49" charset="0"/>
-            </a:endParaRPr>
-          </a:p>
-          <a:p>
-            <a:pPr algn="ctr"/>
-            <a:r>
-              <a:rPr lang="en-US" sz="850">
-                <a:solidFill>
-                  <a:srgbClr val="64748B"/>
-                </a:solidFill>
-                <a:latin typeface="Consolas" panose="020B0609020204030204" pitchFamily="49" charset="0"/>
-              </a:rPr>
-              <a:t>apply and store</a:t>
+              <a:t>InsertBlockReturnNextBlock</a:t>
             </a:r>
             <a:endParaRPr lang="en-US" sz="850" dirty="0">
               <a:solidFill>
@@ -4998,14 +4889,26 @@
               <a:latin typeface="Consolas" panose="020B0609020204030204" pitchFamily="49" charset="0"/>
             </a:endParaRPr>
           </a:p>
-        </p:txBody>
-      </p:sp>
-      <p:sp>
-        <p:nvSpPr>
-          <p:cNvPr id="50" name="Branch">
-            <a:extLst>
-              <a:ext uri="{FF2B5EF4-FFF2-40B4-BE49-F238E27FC236}">
-                <a16:creationId xmlns:a16="http://schemas.microsoft.com/office/drawing/2014/main" id="{8A185DF5-E793-4F03-62B5-C7B624B90074}"/>
+          <a:p>
+            <a:pPr algn="ctr"/>
+            <a:r>
+              <a:rPr lang="en-US" sz="850" dirty="0">
+                <a:solidFill>
+                  <a:srgbClr val="64748B"/>
+                </a:solidFill>
+                <a:latin typeface="Consolas" panose="020B0609020204030204" pitchFamily="49" charset="0"/>
+              </a:rPr>
+              <a:t>insert block, pick next</a:t>
+            </a:r>
+          </a:p>
+        </p:txBody>
+      </p:sp>
+      <p:sp>
+        <p:nvSpPr>
+          <p:cNvPr id="49" name="Blockchain.InsertBlock">
+            <a:extLst>
+              <a:ext uri="{FF2B5EF4-FFF2-40B4-BE49-F238E27FC236}">
+                <a16:creationId xmlns:a16="http://schemas.microsoft.com/office/drawing/2014/main" id="{CE4300EB-5654-2A9C-BA0B-253C8A6CC4C0}"/>
               </a:ext>
             </a:extLst>
           </p:cNvPr>
@@ -5014,129 +4917,8 @@
         </p:nvSpPr>
         <p:spPr>
           <a:xfrm>
-            <a:off x="1905000" y="5257800"/>
-            <a:ext cx="3810000" cy="990600"/>
-          </a:xfrm>
-          <a:prstGeom prst="roundRect">
-            <a:avLst>
-              <a:gd name="adj" fmla="val 12000"/>
-            </a:avLst>
-          </a:prstGeom>
-          <a:solidFill>
-            <a:srgbClr val="D2C5F4"/>
-          </a:solidFill>
-          <a:ln w="15875">
-            <a:solidFill>
-              <a:srgbClr val="6D28D9"/>
-            </a:solidFill>
-          </a:ln>
-        </p:spPr>
-        <p:style>
-          <a:lnRef idx="2">
-            <a:schemeClr val="accent1">
-              <a:shade val="15000"/>
-            </a:schemeClr>
-          </a:lnRef>
-          <a:fillRef idx="1">
-            <a:schemeClr val="accent1"/>
-          </a:fillRef>
-          <a:effectRef idx="0">
-            <a:schemeClr val="accent1"/>
-          </a:effectRef>
-          <a:fontRef idx="minor">
-            <a:schemeClr val="lt1"/>
-          </a:fontRef>
-        </p:style>
-        <p:txBody>
-          <a:bodyPr rtlCol="0" anchor="ctr"/>
-          <a:lstStyle/>
-          <a:p>
-            <a:pPr algn="ctr"/>
-            <a:endParaRPr lang="de-CH"/>
-          </a:p>
-        </p:txBody>
-      </p:sp>
-      <p:sp>
-        <p:nvSpPr>
-          <p:cNvPr id="51" name="label Branch">
-            <a:extLst>
-              <a:ext uri="{FF2B5EF4-FFF2-40B4-BE49-F238E27FC236}">
-                <a16:creationId xmlns:a16="http://schemas.microsoft.com/office/drawing/2014/main" id="{30AC199F-2A83-1FE7-CB14-E4BB1C978436}"/>
-              </a:ext>
-            </a:extLst>
-          </p:cNvPr>
-          <p:cNvSpPr txBox="1"/>
-          <p:nvPr/>
-        </p:nvSpPr>
-        <p:spPr>
-          <a:xfrm>
-            <a:off x="2088966" y="5295900"/>
-            <a:ext cx="2172069" cy="292388"/>
-          </a:xfrm>
-          <a:prstGeom prst="rect">
-            <a:avLst/>
-          </a:prstGeom>
-          <a:noFill/>
-        </p:spPr>
-        <p:txBody>
-          <a:bodyPr vert="horz" wrap="none" lIns="0" tIns="0" rIns="0" bIns="0" rtlCol="0">
-            <a:spAutoFit/>
-          </a:bodyPr>
-          <a:lstStyle/>
-          <a:p>
-            <a:pPr algn="ctr"/>
-            <a:r>
-              <a:rPr lang="en-US" sz="1000">
-                <a:solidFill>
-                  <a:srgbClr val="3B1E7A"/>
-                </a:solidFill>
-                <a:latin typeface="Segoe UI Semibold" panose="020B0702040204020203" pitchFamily="34" charset="0"/>
-              </a:rPr>
-              <a:t>Branch</a:t>
-            </a:r>
-            <a:endParaRPr lang="en-US" sz="1000" dirty="0">
-              <a:solidFill>
-                <a:srgbClr val="3B1E7A"/>
-              </a:solidFill>
-              <a:latin typeface="Segoe UI Semibold" panose="020B0702040204020203" pitchFamily="34" charset="0"/>
-            </a:endParaRPr>
-          </a:p>
-          <a:p>
-            <a:pPr algn="ctr"/>
-            <a:r>
-              <a:rPr lang="en-US" sz="900" i="1">
-                <a:solidFill>
-                  <a:srgbClr val="64748B"/>
-                </a:solidFill>
-                <a:latin typeface="Segoe UI" panose="020B0502040204020203" pitchFamily="34" charset="0"/>
-              </a:rPr>
-              <a:t>header tree segment, top one = BranchRoot</a:t>
-            </a:r>
-            <a:endParaRPr lang="en-US" sz="900" i="1" dirty="0">
-              <a:solidFill>
-                <a:srgbClr val="64748B"/>
-              </a:solidFill>
-              <a:latin typeface="Segoe UI" panose="020B0502040204020203" pitchFamily="34" charset="0"/>
-            </a:endParaRPr>
-          </a:p>
-        </p:txBody>
-      </p:sp>
-      <p:sp>
-        <p:nvSpPr>
-          <p:cNvPr id="52" name="Branch.TryExtendHeaderchain">
-            <a:extLst>
-              <a:ext uri="{FF2B5EF4-FFF2-40B4-BE49-F238E27FC236}">
-                <a16:creationId xmlns:a16="http://schemas.microsoft.com/office/drawing/2014/main" id="{2AEA1E30-272F-8D1B-8993-7869AFDAA9CA}"/>
-              </a:ext>
-            </a:extLst>
-          </p:cNvPr>
-          <p:cNvSpPr/>
-          <p:nvPr/>
-        </p:nvSpPr>
-        <p:spPr>
-          <a:xfrm>
-            <a:off x="3302000" y="5689600"/>
-            <a:ext cx="2286000" cy="457200"/>
+            <a:off x="6350000" y="5689600"/>
+            <a:ext cx="1524000" cy="457200"/>
           </a:xfrm>
           <a:prstGeom prst="roundRect">
             <a:avLst>
@@ -5183,6 +4965,218 @@
                 </a:solidFill>
                 <a:latin typeface="Consolas" panose="020B0609020204030204" pitchFamily="49" charset="0"/>
               </a:rPr>
+              <a:t>InsertBlock</a:t>
+            </a:r>
+            <a:endParaRPr lang="en-US" sz="850">
+              <a:solidFill>
+                <a:srgbClr val="64748B"/>
+              </a:solidFill>
+              <a:latin typeface="Consolas" panose="020B0609020204030204" pitchFamily="49" charset="0"/>
+            </a:endParaRPr>
+          </a:p>
+          <a:p>
+            <a:pPr algn="ctr"/>
+            <a:r>
+              <a:rPr lang="en-US" sz="850">
+                <a:solidFill>
+                  <a:srgbClr val="64748B"/>
+                </a:solidFill>
+                <a:latin typeface="Consolas" panose="020B0609020204030204" pitchFamily="49" charset="0"/>
+              </a:rPr>
+              <a:t>apply and store</a:t>
+            </a:r>
+            <a:endParaRPr lang="en-US" sz="850" dirty="0">
+              <a:solidFill>
+                <a:srgbClr val="64748B"/>
+              </a:solidFill>
+              <a:latin typeface="Consolas" panose="020B0609020204030204" pitchFamily="49" charset="0"/>
+            </a:endParaRPr>
+          </a:p>
+        </p:txBody>
+      </p:sp>
+      <p:sp>
+        <p:nvSpPr>
+          <p:cNvPr id="50" name="Branch">
+            <a:extLst>
+              <a:ext uri="{FF2B5EF4-FFF2-40B4-BE49-F238E27FC236}">
+                <a16:creationId xmlns:a16="http://schemas.microsoft.com/office/drawing/2014/main" id="{8A185DF5-E793-4F03-62B5-C7B624B90074}"/>
+              </a:ext>
+            </a:extLst>
+          </p:cNvPr>
+          <p:cNvSpPr/>
+          <p:nvPr/>
+        </p:nvSpPr>
+        <p:spPr>
+          <a:xfrm>
+            <a:off x="1905000" y="5257800"/>
+            <a:ext cx="4191000" cy="990600"/>
+          </a:xfrm>
+          <a:prstGeom prst="roundRect">
+            <a:avLst>
+              <a:gd name="adj" fmla="val 12000"/>
+            </a:avLst>
+          </a:prstGeom>
+          <a:solidFill>
+            <a:srgbClr val="D2C5F4"/>
+          </a:solidFill>
+          <a:ln w="15875">
+            <a:solidFill>
+              <a:srgbClr val="6D28D9"/>
+            </a:solidFill>
+          </a:ln>
+        </p:spPr>
+        <p:style>
+          <a:lnRef idx="2">
+            <a:schemeClr val="accent1">
+              <a:shade val="15000"/>
+            </a:schemeClr>
+          </a:lnRef>
+          <a:fillRef idx="1">
+            <a:schemeClr val="accent1"/>
+          </a:fillRef>
+          <a:effectRef idx="0">
+            <a:schemeClr val="accent1"/>
+          </a:effectRef>
+          <a:fontRef idx="minor">
+            <a:schemeClr val="lt1"/>
+          </a:fontRef>
+        </p:style>
+        <p:txBody>
+          <a:bodyPr rtlCol="0" anchor="ctr"/>
+          <a:lstStyle/>
+          <a:p>
+            <a:pPr algn="ctr"/>
+            <a:endParaRPr lang="de-CH"/>
+          </a:p>
+        </p:txBody>
+      </p:sp>
+      <p:sp>
+        <p:nvSpPr>
+          <p:cNvPr id="51" name="label Branch">
+            <a:extLst>
+              <a:ext uri="{FF2B5EF4-FFF2-40B4-BE49-F238E27FC236}">
+                <a16:creationId xmlns:a16="http://schemas.microsoft.com/office/drawing/2014/main" id="{30AC199F-2A83-1FE7-CB14-E4BB1C978436}"/>
+              </a:ext>
+            </a:extLst>
+          </p:cNvPr>
+          <p:cNvSpPr txBox="1"/>
+          <p:nvPr/>
+        </p:nvSpPr>
+        <p:spPr>
+          <a:xfrm>
+            <a:off x="2088966" y="5295900"/>
+            <a:ext cx="2172069" cy="292388"/>
+          </a:xfrm>
+          <a:prstGeom prst="rect">
+            <a:avLst/>
+          </a:prstGeom>
+          <a:noFill/>
+        </p:spPr>
+        <p:txBody>
+          <a:bodyPr vert="horz" wrap="none" lIns="0" tIns="0" rIns="0" bIns="0" rtlCol="0">
+            <a:spAutoFit/>
+          </a:bodyPr>
+          <a:lstStyle/>
+          <a:p>
+            <a:pPr algn="ctr"/>
+            <a:r>
+              <a:rPr lang="en-US" sz="1000">
+                <a:solidFill>
+                  <a:srgbClr val="3B1E7A"/>
+                </a:solidFill>
+                <a:latin typeface="Segoe UI Semibold" panose="020B0702040204020203" pitchFamily="34" charset="0"/>
+              </a:rPr>
+              <a:t>Branch</a:t>
+            </a:r>
+            <a:endParaRPr lang="en-US" sz="1000" dirty="0">
+              <a:solidFill>
+                <a:srgbClr val="3B1E7A"/>
+              </a:solidFill>
+              <a:latin typeface="Segoe UI Semibold" panose="020B0702040204020203" pitchFamily="34" charset="0"/>
+            </a:endParaRPr>
+          </a:p>
+          <a:p>
+            <a:pPr algn="ctr"/>
+            <a:r>
+              <a:rPr lang="en-US" sz="900" i="1">
+                <a:solidFill>
+                  <a:srgbClr val="64748B"/>
+                </a:solidFill>
+                <a:latin typeface="Segoe UI" panose="020B0502040204020203" pitchFamily="34" charset="0"/>
+              </a:rPr>
+              <a:t>header tree segment, top one = BranchRoot</a:t>
+            </a:r>
+            <a:endParaRPr lang="en-US" sz="900" i="1" dirty="0">
+              <a:solidFill>
+                <a:srgbClr val="64748B"/>
+              </a:solidFill>
+              <a:latin typeface="Segoe UI" panose="020B0502040204020203" pitchFamily="34" charset="0"/>
+            </a:endParaRPr>
+          </a:p>
+        </p:txBody>
+      </p:sp>
+      <p:sp>
+        <p:nvSpPr>
+          <p:cNvPr id="52" name="Branch.TryExtendHeaderchain">
+            <a:extLst>
+              <a:ext uri="{FF2B5EF4-FFF2-40B4-BE49-F238E27FC236}">
+                <a16:creationId xmlns:a16="http://schemas.microsoft.com/office/drawing/2014/main" id="{2AEA1E30-272F-8D1B-8993-7869AFDAA9CA}"/>
+              </a:ext>
+            </a:extLst>
+          </p:cNvPr>
+          <p:cNvSpPr/>
+          <p:nvPr/>
+        </p:nvSpPr>
+        <p:spPr>
+          <a:xfrm>
+            <a:off x="3302000" y="5689600"/>
+            <a:ext cx="2286000" cy="457200"/>
+          </a:xfrm>
+          <a:prstGeom prst="roundRect">
+            <a:avLst>
+              <a:gd name="adj" fmla="val 25000"/>
+            </a:avLst>
+          </a:prstGeom>
+          <a:solidFill>
+            <a:srgbClr val="FFFFFF"/>
+          </a:solidFill>
+          <a:ln w="9525" cap="flat" cmpd="sng" algn="ctr">
+            <a:solidFill>
+              <a:srgbClr val="6D28D9"/>
+            </a:solidFill>
+            <a:prstDash val="solid"/>
+            <a:miter lim="800000"/>
+          </a:ln>
+          <a:effectLst/>
+        </p:spPr>
+        <p:style>
+          <a:lnRef idx="2">
+            <a:schemeClr val="accent1">
+              <a:shade val="15000"/>
+            </a:schemeClr>
+          </a:lnRef>
+          <a:fillRef idx="1">
+            <a:schemeClr val="accent1"/>
+          </a:fillRef>
+          <a:effectRef idx="0">
+            <a:schemeClr val="accent1"/>
+          </a:effectRef>
+          <a:fontRef idx="minor">
+            <a:schemeClr val="lt1"/>
+          </a:fontRef>
+        </p:style>
+        <p:txBody>
+          <a:bodyPr wrap="none" lIns="38100" tIns="0" rIns="38100" bIns="0" rtlCol="0" anchor="ctr"/>
+          <a:lstStyle/>
+          <a:p>
+            <a:pPr algn="ctr"/>
+            <a:r>
+              <a:rPr lang="en-US" sz="1100" b="1">
+                <a:solidFill>
+                  <a:srgbClr val="3B1E7A"/>
+                </a:solidFill>
+                <a:latin typeface="Consolas" panose="020B0609020204030204" pitchFamily="49" charset="0"/>
+              </a:rPr>
               <a:t>TryExtendHeaderchain</a:t>
             </a:r>
             <a:endParaRPr lang="en-US" sz="850">
@@ -5398,7 +5392,7 @@
       </p:cxnSp>
       <p:cxnSp>
         <p:nvCxnSpPr>
-          <p:cNvPr id="58" name="call insert in order -&gt; InsertBlock">
+          <p:cNvPr id="58" name="Straight Arrow Connector 57">
             <a:extLst>
               <a:ext uri="{FF2B5EF4-FFF2-40B4-BE49-F238E27FC236}">
                 <a16:creationId xmlns:a16="http://schemas.microsoft.com/office/drawing/2014/main" id="{151A9785-230B-8D03-A55E-126283CCE46D}"/>
@@ -5407,15 +5401,15 @@
           </p:cNvPr>
           <p:cNvCxnSpPr>
             <a:cxnSpLocks/>
-            <a:stCxn id="75" idx="6"/>
-            <a:endCxn id="49" idx="1"/>
+            <a:stCxn id="48" idx="2"/>
+            <a:endCxn id="49" idx="0"/>
           </p:cNvCxnSpPr>
           <p:nvPr/>
         </p:nvCxnSpPr>
         <p:spPr>
           <a:xfrm>
-            <a:off x="8001000" y="5600700"/>
-            <a:ext cx="1397000" cy="0"/>
+            <a:off x="7112000" y="5130800"/>
+            <a:ext cx="0" cy="558800"/>
           </a:xfrm>
           <a:prstGeom prst="straightConnector1">
             <a:avLst/>
@@ -6810,392 +6804,6 @@
           </a:p>
         </p:txBody>
       </p:sp>
-      <p:sp>
-        <p:nvSpPr>
-          <p:cNvPr id="74" name="InsertBlockReturnNextBlock.queue block">
-            <a:extLst>
-              <a:ext uri="{FF2B5EF4-FFF2-40B4-BE49-F238E27FC236}">
-                <a16:creationId xmlns:a16="http://schemas.microsoft.com/office/drawing/2014/main" id="{FE061FFE-30C7-7118-1732-DE5544035889}"/>
-              </a:ext>
-            </a:extLst>
-          </p:cNvPr>
-          <p:cNvSpPr/>
-          <p:nvPr/>
-        </p:nvSpPr>
-        <p:spPr>
-          <a:xfrm>
-            <a:off x="6223000" y="5092700"/>
-            <a:ext cx="1778000" cy="254000"/>
-          </a:xfrm>
-          <a:prstGeom prst="ellipse">
-            <a:avLst/>
-          </a:prstGeom>
-          <a:solidFill>
-            <a:srgbClr val="FFFFFF"/>
-          </a:solidFill>
-          <a:ln w="15875">
-            <a:solidFill>
-              <a:srgbClr val="6D28D9"/>
-            </a:solidFill>
-          </a:ln>
-        </p:spPr>
-        <p:style>
-          <a:lnRef idx="2">
-            <a:schemeClr val="accent1">
-              <a:shade val="15000"/>
-            </a:schemeClr>
-          </a:lnRef>
-          <a:fillRef idx="1">
-            <a:schemeClr val="accent1"/>
-          </a:fillRef>
-          <a:effectRef idx="0">
-            <a:schemeClr val="accent1"/>
-          </a:effectRef>
-          <a:fontRef idx="minor">
-            <a:schemeClr val="lt1"/>
-          </a:fontRef>
-        </p:style>
-        <p:txBody>
-          <a:bodyPr wrap="none" lIns="0" tIns="0" rIns="0" bIns="0" rtlCol="0" anchor="ctr"/>
-          <a:lstStyle/>
-          <a:p>
-            <a:pPr algn="ctr"/>
-            <a:r>
-              <a:rPr lang="de-CH" sz="950">
-                <a:solidFill>
-                  <a:srgbClr val="3B1E7A"/>
-                </a:solidFill>
-                <a:latin typeface="Consolas" panose="020B0609020204030204" pitchFamily="49" charset="0"/>
-              </a:rPr>
-              <a:t>queue block</a:t>
-            </a:r>
-          </a:p>
-        </p:txBody>
-      </p:sp>
-      <p:sp>
-        <p:nvSpPr>
-          <p:cNvPr id="75" name="InsertBlockReturnNextBlock.insert in order">
-            <a:extLst>
-              <a:ext uri="{FF2B5EF4-FFF2-40B4-BE49-F238E27FC236}">
-                <a16:creationId xmlns:a16="http://schemas.microsoft.com/office/drawing/2014/main" id="{CA0C6C7A-0149-66AC-632F-6F933ABCDF0F}"/>
-              </a:ext>
-            </a:extLst>
-          </p:cNvPr>
-          <p:cNvSpPr/>
-          <p:nvPr/>
-        </p:nvSpPr>
-        <p:spPr>
-          <a:xfrm>
-            <a:off x="6223000" y="5473700"/>
-            <a:ext cx="1778000" cy="254000"/>
-          </a:xfrm>
-          <a:prstGeom prst="ellipse">
-            <a:avLst/>
-          </a:prstGeom>
-          <a:solidFill>
-            <a:srgbClr val="FFFFFF"/>
-          </a:solidFill>
-          <a:ln w="15875">
-            <a:solidFill>
-              <a:srgbClr val="6D28D9"/>
-            </a:solidFill>
-          </a:ln>
-        </p:spPr>
-        <p:style>
-          <a:lnRef idx="2">
-            <a:schemeClr val="accent1">
-              <a:shade val="15000"/>
-            </a:schemeClr>
-          </a:lnRef>
-          <a:fillRef idx="1">
-            <a:schemeClr val="accent1"/>
-          </a:fillRef>
-          <a:effectRef idx="0">
-            <a:schemeClr val="accent1"/>
-          </a:effectRef>
-          <a:fontRef idx="minor">
-            <a:schemeClr val="lt1"/>
-          </a:fontRef>
-        </p:style>
-        <p:txBody>
-          <a:bodyPr wrap="none" lIns="0" tIns="0" rIns="0" bIns="0" rtlCol="0" anchor="ctr"/>
-          <a:lstStyle/>
-          <a:p>
-            <a:pPr algn="ctr"/>
-            <a:r>
-              <a:rPr lang="de-CH" sz="950">
-                <a:solidFill>
-                  <a:srgbClr val="3B1E7A"/>
-                </a:solidFill>
-                <a:latin typeface="Consolas" panose="020B0609020204030204" pitchFamily="49" charset="0"/>
-              </a:rPr>
-              <a:t>insert in order</a:t>
-            </a:r>
-          </a:p>
-        </p:txBody>
-      </p:sp>
-      <p:sp>
-        <p:nvSpPr>
-          <p:cNvPr id="76" name="InsertBlockReturnNextBlock.reorg if stronger">
-            <a:extLst>
-              <a:ext uri="{FF2B5EF4-FFF2-40B4-BE49-F238E27FC236}">
-                <a16:creationId xmlns:a16="http://schemas.microsoft.com/office/drawing/2014/main" id="{850F997A-CF4D-E4C1-25D7-B8835EE42003}"/>
-              </a:ext>
-            </a:extLst>
-          </p:cNvPr>
-          <p:cNvSpPr/>
-          <p:nvPr/>
-        </p:nvSpPr>
-        <p:spPr>
-          <a:xfrm>
-            <a:off x="6223000" y="5854700"/>
-            <a:ext cx="1778000" cy="254000"/>
-          </a:xfrm>
-          <a:prstGeom prst="ellipse">
-            <a:avLst/>
-          </a:prstGeom>
-          <a:solidFill>
-            <a:srgbClr val="FFFFFF"/>
-          </a:solidFill>
-          <a:ln w="15875">
-            <a:solidFill>
-              <a:srgbClr val="6D28D9"/>
-            </a:solidFill>
-          </a:ln>
-        </p:spPr>
-        <p:style>
-          <a:lnRef idx="2">
-            <a:schemeClr val="accent1">
-              <a:shade val="15000"/>
-            </a:schemeClr>
-          </a:lnRef>
-          <a:fillRef idx="1">
-            <a:schemeClr val="accent1"/>
-          </a:fillRef>
-          <a:effectRef idx="0">
-            <a:schemeClr val="accent1"/>
-          </a:effectRef>
-          <a:fontRef idx="minor">
-            <a:schemeClr val="lt1"/>
-          </a:fontRef>
-        </p:style>
-        <p:txBody>
-          <a:bodyPr wrap="none" lIns="0" tIns="0" rIns="0" bIns="0" rtlCol="0" anchor="ctr"/>
-          <a:lstStyle/>
-          <a:p>
-            <a:pPr algn="ctr"/>
-            <a:r>
-              <a:rPr lang="de-CH" sz="950">
-                <a:solidFill>
-                  <a:srgbClr val="3B1E7A"/>
-                </a:solidFill>
-                <a:latin typeface="Consolas" panose="020B0609020204030204" pitchFamily="49" charset="0"/>
-              </a:rPr>
-              <a:t>reorg if stronger</a:t>
-            </a:r>
-          </a:p>
-        </p:txBody>
-      </p:sp>
-      <p:sp>
-        <p:nvSpPr>
-          <p:cNvPr id="77" name="InsertBlockReturnNextBlock.pick next block">
-            <a:extLst>
-              <a:ext uri="{FF2B5EF4-FFF2-40B4-BE49-F238E27FC236}">
-                <a16:creationId xmlns:a16="http://schemas.microsoft.com/office/drawing/2014/main" id="{D69E1708-27A3-4453-9EFA-666E84F37D2D}"/>
-              </a:ext>
-            </a:extLst>
-          </p:cNvPr>
-          <p:cNvSpPr/>
-          <p:nvPr/>
-        </p:nvSpPr>
-        <p:spPr>
-          <a:xfrm>
-            <a:off x="6223000" y="6235700"/>
-            <a:ext cx="1778000" cy="254000"/>
-          </a:xfrm>
-          <a:prstGeom prst="ellipse">
-            <a:avLst/>
-          </a:prstGeom>
-          <a:solidFill>
-            <a:srgbClr val="FFFFFF"/>
-          </a:solidFill>
-          <a:ln w="15875">
-            <a:solidFill>
-              <a:srgbClr val="6D28D9"/>
-            </a:solidFill>
-          </a:ln>
-        </p:spPr>
-        <p:style>
-          <a:lnRef idx="2">
-            <a:schemeClr val="accent1">
-              <a:shade val="15000"/>
-            </a:schemeClr>
-          </a:lnRef>
-          <a:fillRef idx="1">
-            <a:schemeClr val="accent1"/>
-          </a:fillRef>
-          <a:effectRef idx="0">
-            <a:schemeClr val="accent1"/>
-          </a:effectRef>
-          <a:fontRef idx="minor">
-            <a:schemeClr val="lt1"/>
-          </a:fontRef>
-        </p:style>
-        <p:txBody>
-          <a:bodyPr wrap="none" lIns="0" tIns="0" rIns="0" bIns="0" rtlCol="0" anchor="ctr"/>
-          <a:lstStyle/>
-          <a:p>
-            <a:pPr algn="ctr"/>
-            <a:r>
-              <a:rPr lang="de-CH" sz="950">
-                <a:solidFill>
-                  <a:srgbClr val="3B1E7A"/>
-                </a:solidFill>
-                <a:latin typeface="Consolas" panose="020B0609020204030204" pitchFamily="49" charset="0"/>
-              </a:rPr>
-              <a:t>pick next block</a:t>
-            </a:r>
-          </a:p>
-        </p:txBody>
-      </p:sp>
-      <p:cxnSp>
-        <p:nvCxnSpPr>
-          <p:cNvPr id="78" name="flow queue block -&gt; insert in order">
-            <a:extLst>
-              <a:ext uri="{FF2B5EF4-FFF2-40B4-BE49-F238E27FC236}">
-                <a16:creationId xmlns:a16="http://schemas.microsoft.com/office/drawing/2014/main" id="{A999E237-2D09-4FA3-EB7E-DC5FF5EA5575}"/>
-              </a:ext>
-            </a:extLst>
-          </p:cNvPr>
-          <p:cNvCxnSpPr>
-            <a:cxnSpLocks/>
-            <a:stCxn id="74" idx="4"/>
-            <a:endCxn id="75" idx="0"/>
-          </p:cNvCxnSpPr>
-          <p:nvPr/>
-        </p:nvCxnSpPr>
-        <p:spPr>
-          <a:xfrm>
-            <a:off x="7112000" y="5346700"/>
-            <a:ext cx="0" cy="127000"/>
-          </a:xfrm>
-          <a:prstGeom prst="straightConnector1">
-            <a:avLst/>
-          </a:prstGeom>
-          <a:ln w="19050">
-            <a:solidFill>
-              <a:srgbClr val="94A3B8"/>
-            </a:solidFill>
-            <a:tailEnd type="triangle"/>
-          </a:ln>
-        </p:spPr>
-        <p:style>
-          <a:lnRef idx="2">
-            <a:schemeClr val="accent1"/>
-          </a:lnRef>
-          <a:fillRef idx="0">
-            <a:schemeClr val="accent1"/>
-          </a:fillRef>
-          <a:effectRef idx="1">
-            <a:schemeClr val="accent1"/>
-          </a:effectRef>
-          <a:fontRef idx="minor">
-            <a:schemeClr val="tx1"/>
-          </a:fontRef>
-        </p:style>
-      </p:cxnSp>
-      <p:cxnSp>
-        <p:nvCxnSpPr>
-          <p:cNvPr id="79" name="flow insert in order -&gt; reorg if stronger">
-            <a:extLst>
-              <a:ext uri="{FF2B5EF4-FFF2-40B4-BE49-F238E27FC236}">
-                <a16:creationId xmlns:a16="http://schemas.microsoft.com/office/drawing/2014/main" id="{015CC6A8-973D-5D8B-D3EF-3A7FB2795B21}"/>
-              </a:ext>
-            </a:extLst>
-          </p:cNvPr>
-          <p:cNvCxnSpPr>
-            <a:cxnSpLocks/>
-            <a:stCxn id="75" idx="4"/>
-            <a:endCxn id="76" idx="0"/>
-          </p:cNvCxnSpPr>
-          <p:nvPr/>
-        </p:nvCxnSpPr>
-        <p:spPr>
-          <a:xfrm>
-            <a:off x="7112000" y="5727700"/>
-            <a:ext cx="0" cy="127000"/>
-          </a:xfrm>
-          <a:prstGeom prst="straightConnector1">
-            <a:avLst/>
-          </a:prstGeom>
-          <a:ln w="19050">
-            <a:solidFill>
-              <a:srgbClr val="94A3B8"/>
-            </a:solidFill>
-            <a:tailEnd type="triangle"/>
-          </a:ln>
-        </p:spPr>
-        <p:style>
-          <a:lnRef idx="2">
-            <a:schemeClr val="accent1"/>
-          </a:lnRef>
-          <a:fillRef idx="0">
-            <a:schemeClr val="accent1"/>
-          </a:fillRef>
-          <a:effectRef idx="1">
-            <a:schemeClr val="accent1"/>
-          </a:effectRef>
-          <a:fontRef idx="minor">
-            <a:schemeClr val="tx1"/>
-          </a:fontRef>
-        </p:style>
-      </p:cxnSp>
-      <p:cxnSp>
-        <p:nvCxnSpPr>
-          <p:cNvPr id="80" name="flow reorg if stronger -&gt; pick next block">
-            <a:extLst>
-              <a:ext uri="{FF2B5EF4-FFF2-40B4-BE49-F238E27FC236}">
-                <a16:creationId xmlns:a16="http://schemas.microsoft.com/office/drawing/2014/main" id="{C0BF4A64-7611-7D97-C68A-82E802795720}"/>
-              </a:ext>
-            </a:extLst>
-          </p:cNvPr>
-          <p:cNvCxnSpPr>
-            <a:cxnSpLocks/>
-            <a:stCxn id="76" idx="4"/>
-            <a:endCxn id="77" idx="0"/>
-          </p:cNvCxnSpPr>
-          <p:nvPr/>
-        </p:nvCxnSpPr>
-        <p:spPr>
-          <a:xfrm>
-            <a:off x="7112000" y="6108700"/>
-            <a:ext cx="0" cy="127000"/>
-          </a:xfrm>
-          <a:prstGeom prst="straightConnector1">
-            <a:avLst/>
-          </a:prstGeom>
-          <a:ln w="19050">
-            <a:solidFill>
-              <a:srgbClr val="94A3B8"/>
-            </a:solidFill>
-            <a:tailEnd type="triangle"/>
-          </a:ln>
-        </p:spPr>
-        <p:style>
-          <a:lnRef idx="2">
-            <a:schemeClr val="accent1"/>
-          </a:lnRef>
-          <a:fillRef idx="0">
-            <a:schemeClr val="accent1"/>
-          </a:fillRef>
-          <a:effectRef idx="1">
-            <a:schemeClr val="accent1"/>
-          </a:effectRef>
-          <a:fontRef idx="minor">
-            <a:schemeClr val="tx1"/>
-          </a:fontRef>
-        </p:style>
-      </p:cxnSp>
     </p:spTree>
     <p:extLst>
       <p:ext uri="{BB962C8B-B14F-4D97-AF65-F5344CB8AC3E}">

--- a/Docs/BToken-Sync-Flow.pptx
+++ b/Docs/BToken-Sync-Flow.pptx
@@ -3423,10 +3423,10 @@
       </p:sp>
       <p:sp>
         <p:nvSpPr>
-          <p:cNvPr id="27" name="Branch stack 2">
-            <a:extLst>
-              <a:ext uri="{FF2B5EF4-FFF2-40B4-BE49-F238E27FC236}">
-                <a16:creationId xmlns:a16="http://schemas.microsoft.com/office/drawing/2014/main" id="{B9A5B999-A70F-5E6F-111D-CC011F6537D2}"/>
+          <p:cNvPr id="50" name="Branch">
+            <a:extLst>
+              <a:ext uri="{FF2B5EF4-FFF2-40B4-BE49-F238E27FC236}">
+                <a16:creationId xmlns:a16="http://schemas.microsoft.com/office/drawing/2014/main" id="{8A185DF5-E793-4F03-62B5-C7B624B90074}"/>
               </a:ext>
             </a:extLst>
           </p:cNvPr>
@@ -3435,93 +3435,21 @@
         </p:nvSpPr>
         <p:spPr>
           <a:xfrm>
-            <a:off x="2057400" y="5359400"/>
-            <a:ext cx="4191000" cy="990600"/>
+            <a:off x="635000" y="4749800"/>
+            <a:ext cx="7747000" cy="1549400"/>
           </a:xfrm>
           <a:prstGeom prst="roundRect">
             <a:avLst>
-              <a:gd name="adj" fmla="val 12000"/>
+              <a:gd name="adj" fmla="val 6557"/>
             </a:avLst>
           </a:prstGeom>
           <a:solidFill>
-            <a:srgbClr val="D2C5F4">
-              <a:alpha val="40000"/>
-            </a:srgbClr>
+            <a:srgbClr val="D2C5F4"/>
           </a:solidFill>
-          <a:ln w="15875" cap="flat" cmpd="sng" algn="ctr">
+          <a:ln w="15875">
             <a:solidFill>
-              <a:srgbClr val="6D28D9">
-                <a:alpha val="30000"/>
-              </a:srgbClr>
+              <a:srgbClr val="6D28D9"/>
             </a:solidFill>
-            <a:prstDash val="solid"/>
-            <a:miter lim="800000"/>
-            <a:headEnd type="none" w="med" len="med"/>
-            <a:tailEnd type="none" w="med" len="med"/>
-          </a:ln>
-        </p:spPr>
-        <p:style>
-          <a:lnRef idx="2">
-            <a:schemeClr val="accent1">
-              <a:shade val="15000"/>
-            </a:schemeClr>
-          </a:lnRef>
-          <a:fillRef idx="1">
-            <a:schemeClr val="accent1"/>
-          </a:fillRef>
-          <a:effectRef idx="0">
-            <a:schemeClr val="accent1"/>
-          </a:effectRef>
-          <a:fontRef idx="minor">
-            <a:schemeClr val="lt1"/>
-          </a:fontRef>
-        </p:style>
-        <p:txBody>
-          <a:bodyPr rtlCol="0" anchor="ctr"/>
-          <a:lstStyle/>
-          <a:p>
-            <a:pPr algn="ctr"/>
-            <a:endParaRPr lang="de-CH"/>
-          </a:p>
-        </p:txBody>
-      </p:sp>
-      <p:sp>
-        <p:nvSpPr>
-          <p:cNvPr id="23" name="Branch stack 1">
-            <a:extLst>
-              <a:ext uri="{FF2B5EF4-FFF2-40B4-BE49-F238E27FC236}">
-                <a16:creationId xmlns:a16="http://schemas.microsoft.com/office/drawing/2014/main" id="{FE257874-1467-BC62-F569-BD6AFF9D1BCF}"/>
-              </a:ext>
-            </a:extLst>
-          </p:cNvPr>
-          <p:cNvSpPr/>
-          <p:nvPr/>
-        </p:nvSpPr>
-        <p:spPr>
-          <a:xfrm>
-            <a:off x="1981200" y="5308600"/>
-            <a:ext cx="4191000" cy="990600"/>
-          </a:xfrm>
-          <a:prstGeom prst="roundRect">
-            <a:avLst>
-              <a:gd name="adj" fmla="val 12000"/>
-            </a:avLst>
-          </a:prstGeom>
-          <a:solidFill>
-            <a:srgbClr val="D2C5F4">
-              <a:alpha val="70000"/>
-            </a:srgbClr>
-          </a:solidFill>
-          <a:ln w="15875" cap="flat" cmpd="sng" algn="ctr">
-            <a:solidFill>
-              <a:srgbClr val="6D28D9">
-                <a:alpha val="65000"/>
-              </a:srgbClr>
-            </a:solidFill>
-            <a:prstDash val="solid"/>
-            <a:miter lim="800000"/>
-            <a:headEnd type="none" w="med" len="med"/>
-            <a:tailEnd type="none" w="med" len="med"/>
           </a:ln>
         </p:spPr>
         <p:style>
@@ -3819,20 +3747,14 @@
           <a:p>
             <a:pPr algn="r"/>
             <a:r>
-              <a:rPr lang="en-US" sz="2600">
+              <a:rPr lang="en-US" sz="2600" dirty="0">
                 <a:solidFill>
                   <a:srgbClr val="1E293B"/>
                 </a:solidFill>
                 <a:latin typeface="Segoe UI Semibold" panose="020B0702040204020203" pitchFamily="34" charset="0"/>
               </a:rPr>
-              <a:t>Overview State Synchronization</a:t>
-            </a:r>
-            <a:endParaRPr lang="en-US" sz="2600" dirty="0">
-              <a:solidFill>
-                <a:srgbClr val="1E293B"/>
-              </a:solidFill>
-              <a:latin typeface="Segoe UI Semibold" panose="020B0702040204020203" pitchFamily="34" charset="0"/>
-            </a:endParaRPr>
+              <a:t>Overview Data Flow</a:t>
+            </a:r>
           </a:p>
         </p:txBody>
       </p:sp>
@@ -4488,97 +4410,6 @@
       </p:cxnSp>
       <p:sp>
         <p:nvSpPr>
-          <p:cNvPr id="43" name="Network.StartBlockDownloadDispatcher">
-            <a:extLst>
-              <a:ext uri="{FF2B5EF4-FFF2-40B4-BE49-F238E27FC236}">
-                <a16:creationId xmlns:a16="http://schemas.microsoft.com/office/drawing/2014/main" id="{18467037-D91B-27F5-BAED-214B82560EBB}"/>
-              </a:ext>
-            </a:extLst>
-          </p:cNvPr>
-          <p:cNvSpPr/>
-          <p:nvPr/>
-        </p:nvSpPr>
-        <p:spPr>
-          <a:xfrm>
-            <a:off x="8890000" y="3238500"/>
-            <a:ext cx="2540000" cy="457200"/>
-          </a:xfrm>
-          <a:prstGeom prst="roundRect">
-            <a:avLst>
-              <a:gd name="adj" fmla="val 25000"/>
-            </a:avLst>
-          </a:prstGeom>
-          <a:solidFill>
-            <a:srgbClr val="FFFFFF"/>
-          </a:solidFill>
-          <a:ln w="9525" cap="flat" cmpd="sng" algn="ctr">
-            <a:solidFill>
-              <a:srgbClr val="0F766E"/>
-            </a:solidFill>
-            <a:prstDash val="solid"/>
-            <a:miter lim="800000"/>
-          </a:ln>
-          <a:effectLst/>
-        </p:spPr>
-        <p:style>
-          <a:lnRef idx="2">
-            <a:schemeClr val="accent1">
-              <a:shade val="15000"/>
-            </a:schemeClr>
-          </a:lnRef>
-          <a:fillRef idx="1">
-            <a:schemeClr val="accent1"/>
-          </a:fillRef>
-          <a:effectRef idx="0">
-            <a:schemeClr val="accent1"/>
-          </a:effectRef>
-          <a:fontRef idx="minor">
-            <a:schemeClr val="lt1"/>
-          </a:fontRef>
-        </p:style>
-        <p:txBody>
-          <a:bodyPr wrap="square" lIns="38100" tIns="0" rIns="38100" bIns="0" rtlCol="0" anchor="ctr"/>
-          <a:lstStyle/>
-          <a:p>
-            <a:pPr algn="ctr"/>
-            <a:r>
-              <a:rPr lang="en-US" sz="1100" b="1">
-                <a:solidFill>
-                  <a:srgbClr val="134E4A"/>
-                </a:solidFill>
-                <a:latin typeface="Consolas" panose="020B0609020204030204" pitchFamily="49" charset="0"/>
-              </a:rPr>
-              <a:t>StartBlockDownloadDispatcher</a:t>
-            </a:r>
-            <a:endParaRPr lang="en-US" sz="850">
-              <a:solidFill>
-                <a:srgbClr val="64748B"/>
-              </a:solidFill>
-              <a:latin typeface="Consolas" panose="020B0609020204030204" pitchFamily="49" charset="0"/>
-            </a:endParaRPr>
-          </a:p>
-          <a:p>
-            <a:pPr algn="ctr"/>
-            <a:r>
-              <a:rPr lang="en-US" sz="850">
-                <a:solidFill>
-                  <a:srgbClr val="64748B"/>
-                </a:solidFill>
-                <a:latin typeface="Consolas" panose="020B0609020204030204" pitchFamily="49" charset="0"/>
-              </a:rPr>
-              <a:t>assign block downloads peers</a:t>
-            </a:r>
-            <a:endParaRPr lang="en-US" sz="850" dirty="0">
-              <a:solidFill>
-                <a:srgbClr val="64748B"/>
-              </a:solidFill>
-              <a:latin typeface="Consolas" panose="020B0609020204030204" pitchFamily="49" charset="0"/>
-            </a:endParaRPr>
-          </a:p>
-        </p:txBody>
-      </p:sp>
-      <p:sp>
-        <p:nvSpPr>
           <p:cNvPr id="45" name="label Blockchain">
             <a:extLst>
               <a:ext uri="{FF2B5EF4-FFF2-40B4-BE49-F238E27FC236}">
@@ -4591,8 +4422,8 @@
         </p:nvSpPr>
         <p:spPr>
           <a:xfrm>
-            <a:off x="7924266" y="4279900"/>
-            <a:ext cx="1423467" cy="307777"/>
+            <a:off x="634999" y="4318000"/>
+            <a:ext cx="2540000" cy="307777"/>
           </a:xfrm>
           <a:prstGeom prst="rect">
             <a:avLst/>
@@ -4638,420 +4469,6 @@
       </p:sp>
       <p:sp>
         <p:nvSpPr>
-          <p:cNvPr id="46" name="Blockchain.TryExtendHeaderchain">
-            <a:extLst>
-              <a:ext uri="{FF2B5EF4-FFF2-40B4-BE49-F238E27FC236}">
-                <a16:creationId xmlns:a16="http://schemas.microsoft.com/office/drawing/2014/main" id="{F58B07B6-4DA8-B3D5-8BCE-C60815B1D8CE}"/>
-              </a:ext>
-            </a:extLst>
-          </p:cNvPr>
-          <p:cNvSpPr/>
-          <p:nvPr/>
-        </p:nvSpPr>
-        <p:spPr>
-          <a:xfrm>
-            <a:off x="3302000" y="4673600"/>
-            <a:ext cx="2286000" cy="457200"/>
-          </a:xfrm>
-          <a:prstGeom prst="roundRect">
-            <a:avLst>
-              <a:gd name="adj" fmla="val 25000"/>
-            </a:avLst>
-          </a:prstGeom>
-          <a:solidFill>
-            <a:srgbClr val="FFFFFF"/>
-          </a:solidFill>
-          <a:ln w="9525" cap="flat" cmpd="sng" algn="ctr">
-            <a:solidFill>
-              <a:srgbClr val="6D28D9"/>
-            </a:solidFill>
-            <a:prstDash val="solid"/>
-            <a:miter lim="800000"/>
-          </a:ln>
-          <a:effectLst/>
-        </p:spPr>
-        <p:style>
-          <a:lnRef idx="2">
-            <a:schemeClr val="accent1">
-              <a:shade val="15000"/>
-            </a:schemeClr>
-          </a:lnRef>
-          <a:fillRef idx="1">
-            <a:schemeClr val="accent1"/>
-          </a:fillRef>
-          <a:effectRef idx="0">
-            <a:schemeClr val="accent1"/>
-          </a:effectRef>
-          <a:fontRef idx="minor">
-            <a:schemeClr val="lt1"/>
-          </a:fontRef>
-        </p:style>
-        <p:txBody>
-          <a:bodyPr wrap="none" lIns="38100" tIns="0" rIns="38100" bIns="0" rtlCol="0" anchor="ctr"/>
-          <a:lstStyle/>
-          <a:p>
-            <a:pPr algn="ctr"/>
-            <a:r>
-              <a:rPr lang="en-US" sz="1100" b="1">
-                <a:solidFill>
-                  <a:srgbClr val="3B1E7A"/>
-                </a:solidFill>
-                <a:latin typeface="Consolas" panose="020B0609020204030204" pitchFamily="49" charset="0"/>
-              </a:rPr>
-              <a:t>TryExtendHeaderchain</a:t>
-            </a:r>
-            <a:endParaRPr lang="en-US" sz="850">
-              <a:solidFill>
-                <a:srgbClr val="64748B"/>
-              </a:solidFill>
-              <a:latin typeface="Consolas" panose="020B0609020204030204" pitchFamily="49" charset="0"/>
-            </a:endParaRPr>
-          </a:p>
-          <a:p>
-            <a:pPr algn="ctr"/>
-            <a:r>
-              <a:rPr lang="en-US" sz="850">
-                <a:solidFill>
-                  <a:srgbClr val="64748B"/>
-                </a:solidFill>
-                <a:latin typeface="Consolas" panose="020B0609020204030204" pitchFamily="49" charset="0"/>
-              </a:rPr>
-              <a:t>lock</a:t>
-            </a:r>
-            <a:endParaRPr lang="en-US" sz="850" dirty="0">
-              <a:solidFill>
-                <a:srgbClr val="64748B"/>
-              </a:solidFill>
-              <a:latin typeface="Consolas" panose="020B0609020204030204" pitchFamily="49" charset="0"/>
-            </a:endParaRPr>
-          </a:p>
-        </p:txBody>
-      </p:sp>
-      <p:sp>
-        <p:nvSpPr>
-          <p:cNvPr id="47" name="Blockchain.GetHeaderDownload">
-            <a:extLst>
-              <a:ext uri="{FF2B5EF4-FFF2-40B4-BE49-F238E27FC236}">
-                <a16:creationId xmlns:a16="http://schemas.microsoft.com/office/drawing/2014/main" id="{14B938D7-7B15-588E-CB46-4437F4EA3919}"/>
-              </a:ext>
-            </a:extLst>
-          </p:cNvPr>
-          <p:cNvSpPr/>
-          <p:nvPr/>
-        </p:nvSpPr>
-        <p:spPr>
-          <a:xfrm>
-            <a:off x="9080500" y="4673600"/>
-            <a:ext cx="2159000" cy="457200"/>
-          </a:xfrm>
-          <a:prstGeom prst="roundRect">
-            <a:avLst>
-              <a:gd name="adj" fmla="val 25000"/>
-            </a:avLst>
-          </a:prstGeom>
-          <a:solidFill>
-            <a:srgbClr val="FFFFFF"/>
-          </a:solidFill>
-          <a:ln w="9525" cap="flat" cmpd="sng" algn="ctr">
-            <a:solidFill>
-              <a:srgbClr val="6D28D9"/>
-            </a:solidFill>
-            <a:prstDash val="solid"/>
-            <a:miter lim="800000"/>
-          </a:ln>
-          <a:effectLst/>
-        </p:spPr>
-        <p:style>
-          <a:lnRef idx="2">
-            <a:schemeClr val="accent1">
-              <a:shade val="15000"/>
-            </a:schemeClr>
-          </a:lnRef>
-          <a:fillRef idx="1">
-            <a:schemeClr val="accent1"/>
-          </a:fillRef>
-          <a:effectRef idx="0">
-            <a:schemeClr val="accent1"/>
-          </a:effectRef>
-          <a:fontRef idx="minor">
-            <a:schemeClr val="lt1"/>
-          </a:fontRef>
-        </p:style>
-        <p:txBody>
-          <a:bodyPr wrap="none" lIns="38100" tIns="0" rIns="38100" bIns="0" rtlCol="0" anchor="ctr"/>
-          <a:lstStyle/>
-          <a:p>
-            <a:pPr algn="ctr"/>
-            <a:r>
-              <a:rPr lang="en-US" sz="1100" b="1">
-                <a:solidFill>
-                  <a:srgbClr val="3B1E7A"/>
-                </a:solidFill>
-                <a:latin typeface="Consolas" panose="020B0609020204030204" pitchFamily="49" charset="0"/>
-              </a:rPr>
-              <a:t>GetHeaderDownload</a:t>
-            </a:r>
-            <a:endParaRPr lang="en-US" sz="850">
-              <a:solidFill>
-                <a:srgbClr val="64748B"/>
-              </a:solidFill>
-              <a:latin typeface="Consolas" panose="020B0609020204030204" pitchFamily="49" charset="0"/>
-            </a:endParaRPr>
-          </a:p>
-          <a:p>
-            <a:pPr algn="ctr"/>
-            <a:r>
-              <a:rPr lang="en-US" sz="850">
-                <a:solidFill>
-                  <a:srgbClr val="64748B"/>
-                </a:solidFill>
-                <a:latin typeface="Consolas" panose="020B0609020204030204" pitchFamily="49" charset="0"/>
-              </a:rPr>
-              <a:t>pick next block</a:t>
-            </a:r>
-            <a:endParaRPr lang="en-US" sz="850" dirty="0">
-              <a:solidFill>
-                <a:srgbClr val="64748B"/>
-              </a:solidFill>
-              <a:latin typeface="Consolas" panose="020B0609020204030204" pitchFamily="49" charset="0"/>
-            </a:endParaRPr>
-          </a:p>
-        </p:txBody>
-      </p:sp>
-      <p:sp>
-        <p:nvSpPr>
-          <p:cNvPr id="48" name="Blockchain.InsertBlockReturnNextBlock">
-            <a:extLst>
-              <a:ext uri="{FF2B5EF4-FFF2-40B4-BE49-F238E27FC236}">
-                <a16:creationId xmlns:a16="http://schemas.microsoft.com/office/drawing/2014/main" id="{C5D7D2A4-85AF-6B33-102B-3F54A0A502D2}"/>
-              </a:ext>
-            </a:extLst>
-          </p:cNvPr>
-          <p:cNvSpPr/>
-          <p:nvPr/>
-        </p:nvSpPr>
-        <p:spPr>
-          <a:xfrm>
-            <a:off x="5842000" y="4673600"/>
-            <a:ext cx="2540000" cy="457200"/>
-          </a:xfrm>
-          <a:prstGeom prst="roundRect">
-            <a:avLst>
-              <a:gd name="adj" fmla="val 25000"/>
-            </a:avLst>
-          </a:prstGeom>
-          <a:solidFill>
-            <a:srgbClr val="FFFFFF"/>
-          </a:solidFill>
-          <a:ln w="9525" cap="flat" cmpd="sng" algn="ctr">
-            <a:solidFill>
-              <a:srgbClr val="6D28D9"/>
-            </a:solidFill>
-            <a:prstDash val="solid"/>
-            <a:miter lim="800000"/>
-          </a:ln>
-          <a:effectLst/>
-        </p:spPr>
-        <p:style>
-          <a:lnRef idx="2">
-            <a:schemeClr val="accent1">
-              <a:shade val="15000"/>
-            </a:schemeClr>
-          </a:lnRef>
-          <a:fillRef idx="1">
-            <a:schemeClr val="accent1"/>
-          </a:fillRef>
-          <a:effectRef idx="0">
-            <a:schemeClr val="accent1"/>
-          </a:effectRef>
-          <a:fontRef idx="minor">
-            <a:schemeClr val="lt1"/>
-          </a:fontRef>
-        </p:style>
-        <p:txBody>
-          <a:bodyPr wrap="none" lIns="38100" tIns="0" rIns="38100" bIns="0" rtlCol="0" anchor="ctr"/>
-          <a:lstStyle/>
-          <a:p>
-            <a:pPr algn="ctr"/>
-            <a:r>
-              <a:rPr lang="en-US" sz="1100" b="1" dirty="0" err="1">
-                <a:solidFill>
-                  <a:srgbClr val="3B1E7A"/>
-                </a:solidFill>
-                <a:latin typeface="Consolas" panose="020B0609020204030204" pitchFamily="49" charset="0"/>
-              </a:rPr>
-              <a:t>InsertBlockReturnNextBlock</a:t>
-            </a:r>
-            <a:endParaRPr lang="en-US" sz="850" dirty="0">
-              <a:solidFill>
-                <a:srgbClr val="64748B"/>
-              </a:solidFill>
-              <a:latin typeface="Consolas" panose="020B0609020204030204" pitchFamily="49" charset="0"/>
-            </a:endParaRPr>
-          </a:p>
-          <a:p>
-            <a:pPr algn="ctr"/>
-            <a:r>
-              <a:rPr lang="en-US" sz="850" dirty="0">
-                <a:solidFill>
-                  <a:srgbClr val="64748B"/>
-                </a:solidFill>
-                <a:latin typeface="Consolas" panose="020B0609020204030204" pitchFamily="49" charset="0"/>
-              </a:rPr>
-              <a:t>insert block, pick next</a:t>
-            </a:r>
-          </a:p>
-        </p:txBody>
-      </p:sp>
-      <p:sp>
-        <p:nvSpPr>
-          <p:cNvPr id="49" name="Blockchain.InsertBlock">
-            <a:extLst>
-              <a:ext uri="{FF2B5EF4-FFF2-40B4-BE49-F238E27FC236}">
-                <a16:creationId xmlns:a16="http://schemas.microsoft.com/office/drawing/2014/main" id="{CE4300EB-5654-2A9C-BA0B-253C8A6CC4C0}"/>
-              </a:ext>
-            </a:extLst>
-          </p:cNvPr>
-          <p:cNvSpPr/>
-          <p:nvPr/>
-        </p:nvSpPr>
-        <p:spPr>
-          <a:xfrm>
-            <a:off x="6350000" y="5689600"/>
-            <a:ext cx="1524000" cy="457200"/>
-          </a:xfrm>
-          <a:prstGeom prst="roundRect">
-            <a:avLst>
-              <a:gd name="adj" fmla="val 25000"/>
-            </a:avLst>
-          </a:prstGeom>
-          <a:solidFill>
-            <a:srgbClr val="FFFFFF"/>
-          </a:solidFill>
-          <a:ln w="9525" cap="flat" cmpd="sng" algn="ctr">
-            <a:solidFill>
-              <a:srgbClr val="6D28D9"/>
-            </a:solidFill>
-            <a:prstDash val="solid"/>
-            <a:miter lim="800000"/>
-          </a:ln>
-          <a:effectLst/>
-        </p:spPr>
-        <p:style>
-          <a:lnRef idx="2">
-            <a:schemeClr val="accent1">
-              <a:shade val="15000"/>
-            </a:schemeClr>
-          </a:lnRef>
-          <a:fillRef idx="1">
-            <a:schemeClr val="accent1"/>
-          </a:fillRef>
-          <a:effectRef idx="0">
-            <a:schemeClr val="accent1"/>
-          </a:effectRef>
-          <a:fontRef idx="minor">
-            <a:schemeClr val="lt1"/>
-          </a:fontRef>
-        </p:style>
-        <p:txBody>
-          <a:bodyPr wrap="none" lIns="38100" tIns="0" rIns="38100" bIns="0" rtlCol="0" anchor="ctr"/>
-          <a:lstStyle/>
-          <a:p>
-            <a:pPr algn="ctr"/>
-            <a:r>
-              <a:rPr lang="en-US" sz="1100" b="1">
-                <a:solidFill>
-                  <a:srgbClr val="3B1E7A"/>
-                </a:solidFill>
-                <a:latin typeface="Consolas" panose="020B0609020204030204" pitchFamily="49" charset="0"/>
-              </a:rPr>
-              <a:t>InsertBlock</a:t>
-            </a:r>
-            <a:endParaRPr lang="en-US" sz="850">
-              <a:solidFill>
-                <a:srgbClr val="64748B"/>
-              </a:solidFill>
-              <a:latin typeface="Consolas" panose="020B0609020204030204" pitchFamily="49" charset="0"/>
-            </a:endParaRPr>
-          </a:p>
-          <a:p>
-            <a:pPr algn="ctr"/>
-            <a:r>
-              <a:rPr lang="en-US" sz="850">
-                <a:solidFill>
-                  <a:srgbClr val="64748B"/>
-                </a:solidFill>
-                <a:latin typeface="Consolas" panose="020B0609020204030204" pitchFamily="49" charset="0"/>
-              </a:rPr>
-              <a:t>apply and store</a:t>
-            </a:r>
-            <a:endParaRPr lang="en-US" sz="850" dirty="0">
-              <a:solidFill>
-                <a:srgbClr val="64748B"/>
-              </a:solidFill>
-              <a:latin typeface="Consolas" panose="020B0609020204030204" pitchFamily="49" charset="0"/>
-            </a:endParaRPr>
-          </a:p>
-        </p:txBody>
-      </p:sp>
-      <p:sp>
-        <p:nvSpPr>
-          <p:cNvPr id="50" name="Branch">
-            <a:extLst>
-              <a:ext uri="{FF2B5EF4-FFF2-40B4-BE49-F238E27FC236}">
-                <a16:creationId xmlns:a16="http://schemas.microsoft.com/office/drawing/2014/main" id="{8A185DF5-E793-4F03-62B5-C7B624B90074}"/>
-              </a:ext>
-            </a:extLst>
-          </p:cNvPr>
-          <p:cNvSpPr/>
-          <p:nvPr/>
-        </p:nvSpPr>
-        <p:spPr>
-          <a:xfrm>
-            <a:off x="1905000" y="5257800"/>
-            <a:ext cx="4191000" cy="990600"/>
-          </a:xfrm>
-          <a:prstGeom prst="roundRect">
-            <a:avLst>
-              <a:gd name="adj" fmla="val 12000"/>
-            </a:avLst>
-          </a:prstGeom>
-          <a:solidFill>
-            <a:srgbClr val="D2C5F4"/>
-          </a:solidFill>
-          <a:ln w="15875">
-            <a:solidFill>
-              <a:srgbClr val="6D28D9"/>
-            </a:solidFill>
-          </a:ln>
-        </p:spPr>
-        <p:style>
-          <a:lnRef idx="2">
-            <a:schemeClr val="accent1">
-              <a:shade val="15000"/>
-            </a:schemeClr>
-          </a:lnRef>
-          <a:fillRef idx="1">
-            <a:schemeClr val="accent1"/>
-          </a:fillRef>
-          <a:effectRef idx="0">
-            <a:schemeClr val="accent1"/>
-          </a:effectRef>
-          <a:fontRef idx="minor">
-            <a:schemeClr val="lt1"/>
-          </a:fontRef>
-        </p:style>
-        <p:txBody>
-          <a:bodyPr rtlCol="0" anchor="ctr"/>
-          <a:lstStyle/>
-          <a:p>
-            <a:pPr algn="ctr"/>
-            <a:endParaRPr lang="de-CH"/>
-          </a:p>
-        </p:txBody>
-      </p:sp>
-      <p:sp>
-        <p:nvSpPr>
           <p:cNvPr id="51" name="label Branch">
             <a:extLst>
               <a:ext uri="{FF2B5EF4-FFF2-40B4-BE49-F238E27FC236}">
@@ -5064,8 +4481,8 @@
         </p:nvSpPr>
         <p:spPr>
           <a:xfrm>
-            <a:off x="2088966" y="5295900"/>
-            <a:ext cx="2172069" cy="292388"/>
+            <a:off x="1656642" y="4800600"/>
+            <a:ext cx="801501" cy="292388"/>
           </a:xfrm>
           <a:prstGeom prst="rect">
             <a:avLst/>
@@ -5080,7 +4497,7 @@
           <a:p>
             <a:pPr algn="ctr"/>
             <a:r>
-              <a:rPr lang="en-US" sz="1000">
+              <a:rPr lang="en-US" sz="1000" dirty="0">
                 <a:solidFill>
                   <a:srgbClr val="3B1E7A"/>
                 </a:solidFill>
@@ -5088,354 +4505,21 @@
               </a:rPr>
               <a:t>Branch</a:t>
             </a:r>
-            <a:endParaRPr lang="en-US" sz="1000" dirty="0">
-              <a:solidFill>
-                <a:srgbClr val="3B1E7A"/>
-              </a:solidFill>
-              <a:latin typeface="Segoe UI Semibold" panose="020B0702040204020203" pitchFamily="34" charset="0"/>
-            </a:endParaRPr>
           </a:p>
           <a:p>
             <a:pPr algn="ctr"/>
             <a:r>
-              <a:rPr lang="en-US" sz="900" i="1">
+              <a:rPr lang="en-US" sz="900" i="1" dirty="0">
                 <a:solidFill>
                   <a:srgbClr val="64748B"/>
                 </a:solidFill>
                 <a:latin typeface="Segoe UI" panose="020B0502040204020203" pitchFamily="34" charset="0"/>
               </a:rPr>
-              <a:t>header tree segment, top one = BranchRoot</a:t>
-            </a:r>
-            <a:endParaRPr lang="en-US" sz="900" i="1" dirty="0">
-              <a:solidFill>
-                <a:srgbClr val="64748B"/>
-              </a:solidFill>
-              <a:latin typeface="Segoe UI" panose="020B0502040204020203" pitchFamily="34" charset="0"/>
-            </a:endParaRPr>
-          </a:p>
-        </p:txBody>
-      </p:sp>
-      <p:sp>
-        <p:nvSpPr>
-          <p:cNvPr id="52" name="Branch.TryExtendHeaderchain">
-            <a:extLst>
-              <a:ext uri="{FF2B5EF4-FFF2-40B4-BE49-F238E27FC236}">
-                <a16:creationId xmlns:a16="http://schemas.microsoft.com/office/drawing/2014/main" id="{2AEA1E30-272F-8D1B-8993-7869AFDAA9CA}"/>
-              </a:ext>
-            </a:extLst>
-          </p:cNvPr>
-          <p:cNvSpPr/>
-          <p:nvPr/>
-        </p:nvSpPr>
-        <p:spPr>
-          <a:xfrm>
-            <a:off x="3302000" y="5689600"/>
-            <a:ext cx="2286000" cy="457200"/>
-          </a:xfrm>
-          <a:prstGeom prst="roundRect">
-            <a:avLst>
-              <a:gd name="adj" fmla="val 25000"/>
-            </a:avLst>
-          </a:prstGeom>
-          <a:solidFill>
-            <a:srgbClr val="FFFFFF"/>
-          </a:solidFill>
-          <a:ln w="9525" cap="flat" cmpd="sng" algn="ctr">
-            <a:solidFill>
-              <a:srgbClr val="6D28D9"/>
-            </a:solidFill>
-            <a:prstDash val="solid"/>
-            <a:miter lim="800000"/>
-          </a:ln>
-          <a:effectLst/>
-        </p:spPr>
-        <p:style>
-          <a:lnRef idx="2">
-            <a:schemeClr val="accent1">
-              <a:shade val="15000"/>
-            </a:schemeClr>
-          </a:lnRef>
-          <a:fillRef idx="1">
-            <a:schemeClr val="accent1"/>
-          </a:fillRef>
-          <a:effectRef idx="0">
-            <a:schemeClr val="accent1"/>
-          </a:effectRef>
-          <a:fontRef idx="minor">
-            <a:schemeClr val="lt1"/>
-          </a:fontRef>
-        </p:style>
-        <p:txBody>
-          <a:bodyPr wrap="none" lIns="38100" tIns="0" rIns="38100" bIns="0" rtlCol="0" anchor="ctr"/>
-          <a:lstStyle/>
-          <a:p>
-            <a:pPr algn="ctr"/>
-            <a:r>
-              <a:rPr lang="en-US" sz="1100" b="1">
-                <a:solidFill>
-                  <a:srgbClr val="3B1E7A"/>
-                </a:solidFill>
-                <a:latin typeface="Consolas" panose="020B0609020204030204" pitchFamily="49" charset="0"/>
-              </a:rPr>
-              <a:t>TryExtendHeaderchain</a:t>
-            </a:r>
-            <a:endParaRPr lang="en-US" sz="850">
-              <a:solidFill>
-                <a:srgbClr val="64748B"/>
-              </a:solidFill>
-              <a:latin typeface="Consolas" panose="020B0609020204030204" pitchFamily="49" charset="0"/>
-            </a:endParaRPr>
-          </a:p>
-          <a:p>
-            <a:pPr algn="ctr"/>
-            <a:r>
-              <a:rPr lang="en-US" sz="850">
-                <a:solidFill>
-                  <a:srgbClr val="64748B"/>
-                </a:solidFill>
-                <a:latin typeface="Consolas" panose="020B0609020204030204" pitchFamily="49" charset="0"/>
-              </a:rPr>
-              <a:t>attach headers</a:t>
-            </a:r>
-            <a:endParaRPr lang="en-US" sz="850" dirty="0">
-              <a:solidFill>
-                <a:srgbClr val="64748B"/>
-              </a:solidFill>
-              <a:latin typeface="Consolas" panose="020B0609020204030204" pitchFamily="49" charset="0"/>
-            </a:endParaRPr>
-          </a:p>
-        </p:txBody>
-      </p:sp>
-      <p:cxnSp>
-        <p:nvCxnSpPr>
-          <p:cNvPr id="53" name="Gerade Verbindung mit Pfeil 52">
-            <a:extLst>
-              <a:ext uri="{FF2B5EF4-FFF2-40B4-BE49-F238E27FC236}">
-                <a16:creationId xmlns:a16="http://schemas.microsoft.com/office/drawing/2014/main" id="{C3D98490-5214-03DE-5211-03F9591FE8EE}"/>
-              </a:ext>
-            </a:extLst>
-          </p:cNvPr>
-          <p:cNvCxnSpPr>
-            <a:cxnSpLocks/>
-            <a:stCxn id="10" idx="2"/>
-            <a:endCxn id="46" idx="0"/>
-          </p:cNvCxnSpPr>
-          <p:nvPr/>
-        </p:nvCxnSpPr>
-        <p:spPr>
-          <a:xfrm>
-            <a:off x="4445000" y="3759200"/>
-            <a:ext cx="0" cy="914400"/>
-          </a:xfrm>
-          <a:prstGeom prst="straightConnector1">
-            <a:avLst/>
-          </a:prstGeom>
-          <a:ln w="15875">
-            <a:solidFill>
-              <a:srgbClr val="475569"/>
-            </a:solidFill>
-            <a:tailEnd type="triangle"/>
-          </a:ln>
-        </p:spPr>
-        <p:style>
-          <a:lnRef idx="2">
-            <a:schemeClr val="accent1"/>
-          </a:lnRef>
-          <a:fillRef idx="0">
-            <a:schemeClr val="accent1"/>
-          </a:fillRef>
-          <a:effectRef idx="1">
-            <a:schemeClr val="accent1"/>
-          </a:effectRef>
-          <a:fontRef idx="minor">
-            <a:schemeClr val="tx1"/>
-          </a:fontRef>
-        </p:style>
-      </p:cxnSp>
-      <p:cxnSp>
-        <p:nvCxnSpPr>
-          <p:cNvPr id="54" name="Gerade Verbindung mit Pfeil 53">
-            <a:extLst>
-              <a:ext uri="{FF2B5EF4-FFF2-40B4-BE49-F238E27FC236}">
-                <a16:creationId xmlns:a16="http://schemas.microsoft.com/office/drawing/2014/main" id="{E03E96F5-C079-073E-AE53-A92EE888EF47}"/>
-              </a:ext>
-            </a:extLst>
-          </p:cNvPr>
-          <p:cNvCxnSpPr>
-            <a:cxnSpLocks/>
-            <a:stCxn id="46" idx="2"/>
-            <a:endCxn id="52" idx="0"/>
-          </p:cNvCxnSpPr>
-          <p:nvPr/>
-        </p:nvCxnSpPr>
-        <p:spPr>
-          <a:xfrm>
-            <a:off x="4445000" y="5130800"/>
-            <a:ext cx="0" cy="558800"/>
-          </a:xfrm>
-          <a:prstGeom prst="straightConnector1">
-            <a:avLst/>
-          </a:prstGeom>
-          <a:ln w="15875">
-            <a:solidFill>
-              <a:srgbClr val="475569"/>
-            </a:solidFill>
-            <a:tailEnd type="triangle"/>
-          </a:ln>
-        </p:spPr>
-        <p:style>
-          <a:lnRef idx="2">
-            <a:schemeClr val="accent1"/>
-          </a:lnRef>
-          <a:fillRef idx="0">
-            <a:schemeClr val="accent1"/>
-          </a:fillRef>
-          <a:effectRef idx="1">
-            <a:schemeClr val="accent1"/>
-          </a:effectRef>
-          <a:fontRef idx="minor">
-            <a:schemeClr val="tx1"/>
-          </a:fontRef>
-        </p:style>
-      </p:cxnSp>
-      <p:cxnSp>
-        <p:nvCxnSpPr>
-          <p:cNvPr id="56" name="Gerade Verbindung mit Pfeil 55">
-            <a:extLst>
-              <a:ext uri="{FF2B5EF4-FFF2-40B4-BE49-F238E27FC236}">
-                <a16:creationId xmlns:a16="http://schemas.microsoft.com/office/drawing/2014/main" id="{E2D57256-F9F1-4894-95FE-E6F452DD3384}"/>
-              </a:ext>
-            </a:extLst>
-          </p:cNvPr>
-          <p:cNvCxnSpPr>
-            <a:cxnSpLocks/>
-            <a:stCxn id="43" idx="2"/>
-            <a:endCxn id="47" idx="0"/>
-          </p:cNvCxnSpPr>
-          <p:nvPr/>
-        </p:nvCxnSpPr>
-        <p:spPr>
-          <a:xfrm>
-            <a:off x="10160000" y="3695700"/>
-            <a:ext cx="0" cy="977900"/>
-          </a:xfrm>
-          <a:prstGeom prst="straightConnector1">
-            <a:avLst/>
-          </a:prstGeom>
-          <a:ln w="15875">
-            <a:solidFill>
-              <a:srgbClr val="475569"/>
-            </a:solidFill>
-            <a:tailEnd type="triangle"/>
-          </a:ln>
-        </p:spPr>
-        <p:style>
-          <a:lnRef idx="2">
-            <a:schemeClr val="accent1"/>
-          </a:lnRef>
-          <a:fillRef idx="0">
-            <a:schemeClr val="accent1"/>
-          </a:fillRef>
-          <a:effectRef idx="1">
-            <a:schemeClr val="accent1"/>
-          </a:effectRef>
-          <a:fontRef idx="minor">
-            <a:schemeClr val="tx1"/>
-          </a:fontRef>
-        </p:style>
-      </p:cxnSp>
-      <p:cxnSp>
-        <p:nvCxnSpPr>
-          <p:cNvPr id="57" name="Gerade Verbindung mit Pfeil 56">
-            <a:extLst>
-              <a:ext uri="{FF2B5EF4-FFF2-40B4-BE49-F238E27FC236}">
-                <a16:creationId xmlns:a16="http://schemas.microsoft.com/office/drawing/2014/main" id="{611DD8D7-C40C-CA0F-933A-24F5CE46AF70}"/>
-              </a:ext>
-            </a:extLst>
-          </p:cNvPr>
-          <p:cNvCxnSpPr>
-            <a:cxnSpLocks/>
-            <a:stCxn id="26" idx="2"/>
-            <a:endCxn id="48" idx="0"/>
-          </p:cNvCxnSpPr>
-          <p:nvPr/>
-        </p:nvCxnSpPr>
-        <p:spPr>
-          <a:xfrm>
-            <a:off x="7112000" y="3759200"/>
-            <a:ext cx="0" cy="914400"/>
-          </a:xfrm>
-          <a:prstGeom prst="straightConnector1">
-            <a:avLst/>
-          </a:prstGeom>
-          <a:ln w="15875">
-            <a:solidFill>
-              <a:srgbClr val="475569"/>
-            </a:solidFill>
-            <a:tailEnd type="triangle"/>
-          </a:ln>
-        </p:spPr>
-        <p:style>
-          <a:lnRef idx="2">
-            <a:schemeClr val="accent1"/>
-          </a:lnRef>
-          <a:fillRef idx="0">
-            <a:schemeClr val="accent1"/>
-          </a:fillRef>
-          <a:effectRef idx="1">
-            <a:schemeClr val="accent1"/>
-          </a:effectRef>
-          <a:fontRef idx="minor">
-            <a:schemeClr val="tx1"/>
-          </a:fontRef>
-        </p:style>
-      </p:cxnSp>
-      <p:cxnSp>
-        <p:nvCxnSpPr>
-          <p:cNvPr id="58" name="Straight Arrow Connector 57">
-            <a:extLst>
-              <a:ext uri="{FF2B5EF4-FFF2-40B4-BE49-F238E27FC236}">
-                <a16:creationId xmlns:a16="http://schemas.microsoft.com/office/drawing/2014/main" id="{151A9785-230B-8D03-A55E-126283CCE46D}"/>
-              </a:ext>
-            </a:extLst>
-          </p:cNvPr>
-          <p:cNvCxnSpPr>
-            <a:cxnSpLocks/>
-            <a:stCxn id="48" idx="2"/>
-            <a:endCxn id="49" idx="0"/>
-          </p:cNvCxnSpPr>
-          <p:nvPr/>
-        </p:nvCxnSpPr>
-        <p:spPr>
-          <a:xfrm>
-            <a:off x="7112000" y="5130800"/>
-            <a:ext cx="0" cy="558800"/>
-          </a:xfrm>
-          <a:prstGeom prst="straightConnector1">
-            <a:avLst/>
-          </a:prstGeom>
-          <a:ln w="15875">
-            <a:solidFill>
-              <a:srgbClr val="475569"/>
-            </a:solidFill>
-            <a:tailEnd type="triangle"/>
-          </a:ln>
-        </p:spPr>
-        <p:style>
-          <a:lnRef idx="2">
-            <a:schemeClr val="accent1"/>
-          </a:lnRef>
-          <a:fillRef idx="0">
-            <a:schemeClr val="accent1"/>
-          </a:fillRef>
-          <a:effectRef idx="1">
-            <a:schemeClr val="accent1"/>
-          </a:effectRef>
-          <a:fontRef idx="minor">
-            <a:schemeClr val="tx1"/>
-          </a:fontRef>
-        </p:style>
-      </p:cxnSp>
+              <a:t>header tree root</a:t>
+            </a:r>
+          </a:p>
+        </p:txBody>
+      </p:sp>
       <p:sp>
         <p:nvSpPr>
           <p:cNvPr id="14" name="label Network">
@@ -5450,8 +4534,8 @@
         </p:nvSpPr>
         <p:spPr>
           <a:xfrm>
-            <a:off x="9029883" y="2628900"/>
-            <a:ext cx="2260234" cy="307777"/>
+            <a:off x="9152511" y="2628900"/>
+            <a:ext cx="2014975" cy="307777"/>
           </a:xfrm>
           <a:prstGeom prst="rect">
             <a:avLst/>
@@ -5466,7 +4550,7 @@
           <a:p>
             <a:pPr algn="ctr"/>
             <a:r>
-              <a:rPr lang="en-US" sz="1100">
+              <a:rPr lang="en-US" sz="1100" dirty="0">
                 <a:solidFill>
                   <a:srgbClr val="134E4A"/>
                 </a:solidFill>
@@ -5478,20 +4562,14 @@
           <a:p>
             <a:pPr algn="ctr"/>
             <a:r>
-              <a:rPr lang="en-US" sz="900" i="1">
+              <a:rPr lang="en-US" sz="900" i="1" dirty="0">
                 <a:solidFill>
                   <a:srgbClr val="64748B"/>
                 </a:solidFill>
                 <a:latin typeface="Segoe UI" panose="020B0502040204020203" pitchFamily="34" charset="0"/>
               </a:rPr>
-              <a:t>manages peers, dispatches block downloads</a:t>
-            </a:r>
-            <a:endParaRPr lang="en-US" sz="900" i="1" dirty="0">
-              <a:solidFill>
-                <a:srgbClr val="64748B"/>
-              </a:solidFill>
-              <a:latin typeface="Segoe UI" panose="020B0502040204020203" pitchFamily="34" charset="0"/>
-            </a:endParaRPr>
+              <a:t>manages peers, controls synchronization</a:t>
+            </a:r>
           </a:p>
         </p:txBody>
       </p:sp>
@@ -5828,52 +4906,6 @@
           </a:p>
         </p:txBody>
       </p:sp>
-      <p:cxnSp>
-        <p:nvCxnSpPr>
-          <p:cNvPr id="28" name="call StartBlockDownloadDispatcher -&gt; BlockMessage">
-            <a:extLst>
-              <a:ext uri="{FF2B5EF4-FFF2-40B4-BE49-F238E27FC236}">
-                <a16:creationId xmlns:a16="http://schemas.microsoft.com/office/drawing/2014/main" id="{49B8C8A8-F716-B148-B87D-EA5EB0CAEAF3}"/>
-              </a:ext>
-            </a:extLst>
-          </p:cNvPr>
-          <p:cNvCxnSpPr>
-            <a:cxnSpLocks/>
-            <a:stCxn id="43" idx="1"/>
-            <a:endCxn id="26" idx="3"/>
-          </p:cNvCxnSpPr>
-          <p:nvPr/>
-        </p:nvCxnSpPr>
-        <p:spPr>
-          <a:xfrm flipH="1">
-            <a:off x="8255000" y="3467100"/>
-            <a:ext cx="635000" cy="0"/>
-          </a:xfrm>
-          <a:prstGeom prst="straightConnector1">
-            <a:avLst/>
-          </a:prstGeom>
-          <a:ln w="15875">
-            <a:solidFill>
-              <a:srgbClr val="475569"/>
-            </a:solidFill>
-            <a:tailEnd type="triangle" w="med" len="med"/>
-          </a:ln>
-        </p:spPr>
-        <p:style>
-          <a:lnRef idx="2">
-            <a:schemeClr val="accent1"/>
-          </a:lnRef>
-          <a:fillRef idx="0">
-            <a:schemeClr val="accent1"/>
-          </a:fillRef>
-          <a:effectRef idx="1">
-            <a:schemeClr val="accent1"/>
-          </a:effectRef>
-          <a:fontRef idx="minor">
-            <a:schemeClr val="tx1"/>
-          </a:fontRef>
-        </p:style>
-      </p:cxnSp>
       <p:sp>
         <p:nvSpPr>
           <p:cNvPr id="29" name="VerAckMessage">
@@ -6804,6 +5836,2018 @@
           </a:p>
         </p:txBody>
       </p:sp>
+      <p:sp>
+        <p:nvSpPr>
+          <p:cNvPr id="95" name="Branch.Blocks">
+            <a:extLst>
+              <a:ext uri="{FF2B5EF4-FFF2-40B4-BE49-F238E27FC236}">
+                <a16:creationId xmlns:a16="http://schemas.microsoft.com/office/drawing/2014/main" id="{161A8BBB-61B6-5688-AE8A-B4D2D2927EB2}"/>
+              </a:ext>
+            </a:extLst>
+          </p:cNvPr>
+          <p:cNvSpPr/>
+          <p:nvPr/>
+        </p:nvSpPr>
+        <p:spPr>
+          <a:xfrm>
+            <a:off x="6413500" y="5302250"/>
+            <a:ext cx="1397000" cy="254000"/>
+          </a:xfrm>
+          <a:prstGeom prst="rect">
+            <a:avLst/>
+          </a:prstGeom>
+          <a:solidFill>
+            <a:srgbClr val="F5F2FD"/>
+          </a:solidFill>
+          <a:ln w="12700">
+            <a:solidFill>
+              <a:srgbClr val="6D28D9"/>
+            </a:solidFill>
+          </a:ln>
+        </p:spPr>
+        <p:style>
+          <a:lnRef idx="2">
+            <a:schemeClr val="accent1">
+              <a:shade val="15000"/>
+            </a:schemeClr>
+          </a:lnRef>
+          <a:fillRef idx="1">
+            <a:schemeClr val="accent1"/>
+          </a:fillRef>
+          <a:effectRef idx="0">
+            <a:schemeClr val="accent1"/>
+          </a:effectRef>
+          <a:fontRef idx="minor">
+            <a:schemeClr val="lt1"/>
+          </a:fontRef>
+        </p:style>
+        <p:txBody>
+          <a:bodyPr wrap="none" lIns="25400" tIns="0" rIns="25400" bIns="0" rtlCol="0" anchor="ctr"/>
+          <a:lstStyle/>
+          <a:p>
+            <a:pPr algn="ctr"/>
+            <a:r>
+              <a:rPr lang="de-CH" sz="850" b="1">
+                <a:solidFill>
+                  <a:srgbClr val="3B1E7A"/>
+                </a:solidFill>
+                <a:latin typeface="Consolas" panose="020B0609020204030204" pitchFamily="49" charset="0"/>
+              </a:rPr>
+              <a:t>Blocks</a:t>
+            </a:r>
+          </a:p>
+        </p:txBody>
+      </p:sp>
+      <p:sp>
+        <p:nvSpPr>
+          <p:cNvPr id="96" name="Blockchain.DatabaseHeaderCollection">
+            <a:extLst>
+              <a:ext uri="{FF2B5EF4-FFF2-40B4-BE49-F238E27FC236}">
+                <a16:creationId xmlns:a16="http://schemas.microsoft.com/office/drawing/2014/main" id="{9AE530A6-10A1-8504-AD6E-2698CCA5C971}"/>
+              </a:ext>
+            </a:extLst>
+          </p:cNvPr>
+          <p:cNvSpPr/>
+          <p:nvPr/>
+        </p:nvSpPr>
+        <p:spPr>
+          <a:xfrm>
+            <a:off x="9372600" y="4762500"/>
+            <a:ext cx="1574800" cy="254000"/>
+          </a:xfrm>
+          <a:prstGeom prst="rect">
+            <a:avLst/>
+          </a:prstGeom>
+          <a:solidFill>
+            <a:srgbClr val="F5F2FD"/>
+          </a:solidFill>
+          <a:ln w="12700">
+            <a:solidFill>
+              <a:srgbClr val="6D28D9"/>
+            </a:solidFill>
+          </a:ln>
+        </p:spPr>
+        <p:style>
+          <a:lnRef idx="2">
+            <a:schemeClr val="accent1">
+              <a:shade val="15000"/>
+            </a:schemeClr>
+          </a:lnRef>
+          <a:fillRef idx="1">
+            <a:schemeClr val="accent1"/>
+          </a:fillRef>
+          <a:effectRef idx="0">
+            <a:schemeClr val="accent1"/>
+          </a:effectRef>
+          <a:fontRef idx="minor">
+            <a:schemeClr val="lt1"/>
+          </a:fontRef>
+        </p:style>
+        <p:txBody>
+          <a:bodyPr wrap="none" lIns="25400" tIns="0" rIns="25400" bIns="0" rtlCol="0" anchor="ctr"/>
+          <a:lstStyle/>
+          <a:p>
+            <a:pPr algn="ctr"/>
+            <a:r>
+              <a:rPr lang="de-CH" sz="850" b="1">
+                <a:solidFill>
+                  <a:srgbClr val="3B1E7A"/>
+                </a:solidFill>
+                <a:latin typeface="Consolas" panose="020B0609020204030204" pitchFamily="49" charset="0"/>
+              </a:rPr>
+              <a:t>DatabaseHeaderCollection</a:t>
+            </a:r>
+          </a:p>
+        </p:txBody>
+      </p:sp>
+      <p:sp>
+        <p:nvSpPr>
+          <p:cNvPr id="97" name="Blockchain.DatabaseBlockCollection">
+            <a:extLst>
+              <a:ext uri="{FF2B5EF4-FFF2-40B4-BE49-F238E27FC236}">
+                <a16:creationId xmlns:a16="http://schemas.microsoft.com/office/drawing/2014/main" id="{BCE7A432-3A88-13D9-3935-3473AA2B521F}"/>
+              </a:ext>
+            </a:extLst>
+          </p:cNvPr>
+          <p:cNvSpPr/>
+          <p:nvPr/>
+        </p:nvSpPr>
+        <p:spPr>
+          <a:xfrm>
+            <a:off x="9372600" y="5092700"/>
+            <a:ext cx="1574800" cy="254000"/>
+          </a:xfrm>
+          <a:prstGeom prst="rect">
+            <a:avLst/>
+          </a:prstGeom>
+          <a:solidFill>
+            <a:srgbClr val="F5F2FD"/>
+          </a:solidFill>
+          <a:ln w="12700">
+            <a:solidFill>
+              <a:srgbClr val="6D28D9"/>
+            </a:solidFill>
+          </a:ln>
+        </p:spPr>
+        <p:style>
+          <a:lnRef idx="2">
+            <a:schemeClr val="accent1">
+              <a:shade val="15000"/>
+            </a:schemeClr>
+          </a:lnRef>
+          <a:fillRef idx="1">
+            <a:schemeClr val="accent1"/>
+          </a:fillRef>
+          <a:effectRef idx="0">
+            <a:schemeClr val="accent1"/>
+          </a:effectRef>
+          <a:fontRef idx="minor">
+            <a:schemeClr val="lt1"/>
+          </a:fontRef>
+        </p:style>
+        <p:txBody>
+          <a:bodyPr wrap="none" lIns="25400" tIns="0" rIns="25400" bIns="0" rtlCol="0" anchor="ctr"/>
+          <a:lstStyle/>
+          <a:p>
+            <a:pPr algn="ctr"/>
+            <a:r>
+              <a:rPr lang="de-CH" sz="850" b="1">
+                <a:solidFill>
+                  <a:srgbClr val="3B1E7A"/>
+                </a:solidFill>
+                <a:latin typeface="Consolas" panose="020B0609020204030204" pitchFamily="49" charset="0"/>
+              </a:rPr>
+              <a:t>DatabaseBlockCollection</a:t>
+            </a:r>
+          </a:p>
+        </p:txBody>
+      </p:sp>
+      <p:cxnSp>
+        <p:nvCxnSpPr>
+          <p:cNvPr id="98" name="data BlockMessage -&gt; Blocks">
+            <a:extLst>
+              <a:ext uri="{FF2B5EF4-FFF2-40B4-BE49-F238E27FC236}">
+                <a16:creationId xmlns:a16="http://schemas.microsoft.com/office/drawing/2014/main" id="{8C848707-F585-2C27-C1BC-F8A0E60A7BFA}"/>
+              </a:ext>
+            </a:extLst>
+          </p:cNvPr>
+          <p:cNvCxnSpPr>
+            <a:cxnSpLocks/>
+            <a:stCxn id="26" idx="2"/>
+            <a:endCxn id="95" idx="0"/>
+          </p:cNvCxnSpPr>
+          <p:nvPr/>
+        </p:nvCxnSpPr>
+        <p:spPr>
+          <a:xfrm>
+            <a:off x="7112000" y="3759200"/>
+            <a:ext cx="0" cy="1543050"/>
+          </a:xfrm>
+          <a:prstGeom prst="straightConnector1">
+            <a:avLst/>
+          </a:prstGeom>
+          <a:ln w="19050">
+            <a:solidFill>
+              <a:srgbClr val="000000"/>
+            </a:solidFill>
+            <a:tailEnd type="triangle"/>
+          </a:ln>
+        </p:spPr>
+        <p:style>
+          <a:lnRef idx="2">
+            <a:schemeClr val="accent1"/>
+          </a:lnRef>
+          <a:fillRef idx="0">
+            <a:schemeClr val="accent1"/>
+          </a:fillRef>
+          <a:effectRef idx="1">
+            <a:schemeClr val="accent1"/>
+          </a:effectRef>
+          <a:fontRef idx="minor">
+            <a:schemeClr val="tx1"/>
+          </a:fontRef>
+        </p:style>
+      </p:cxnSp>
+      <p:cxnSp>
+        <p:nvCxnSpPr>
+          <p:cNvPr id="99" name="data Blocks -&gt; DatabaseHeaderCollection">
+            <a:extLst>
+              <a:ext uri="{FF2B5EF4-FFF2-40B4-BE49-F238E27FC236}">
+                <a16:creationId xmlns:a16="http://schemas.microsoft.com/office/drawing/2014/main" id="{FFDC5CD5-55DC-0569-75CF-74289534E80F}"/>
+              </a:ext>
+            </a:extLst>
+          </p:cNvPr>
+          <p:cNvCxnSpPr>
+            <a:cxnSpLocks/>
+            <a:stCxn id="95" idx="3"/>
+            <a:endCxn id="96" idx="1"/>
+          </p:cNvCxnSpPr>
+          <p:nvPr/>
+        </p:nvCxnSpPr>
+        <p:spPr>
+          <a:xfrm flipV="1">
+            <a:off x="7810500" y="4889500"/>
+            <a:ext cx="1562100" cy="539750"/>
+          </a:xfrm>
+          <a:prstGeom prst="bentConnector3">
+            <a:avLst>
+              <a:gd name="adj1" fmla="val 50000"/>
+            </a:avLst>
+          </a:prstGeom>
+          <a:ln w="19050">
+            <a:solidFill>
+              <a:srgbClr val="000000"/>
+            </a:solidFill>
+            <a:tailEnd type="triangle"/>
+          </a:ln>
+        </p:spPr>
+        <p:style>
+          <a:lnRef idx="2">
+            <a:schemeClr val="accent1"/>
+          </a:lnRef>
+          <a:fillRef idx="0">
+            <a:schemeClr val="accent1"/>
+          </a:fillRef>
+          <a:effectRef idx="1">
+            <a:schemeClr val="accent1"/>
+          </a:effectRef>
+          <a:fontRef idx="minor">
+            <a:schemeClr val="tx1"/>
+          </a:fontRef>
+        </p:style>
+      </p:cxnSp>
+      <p:cxnSp>
+        <p:nvCxnSpPr>
+          <p:cNvPr id="100" name="data Blocks -&gt; DatabaseBlockCollection">
+            <a:extLst>
+              <a:ext uri="{FF2B5EF4-FFF2-40B4-BE49-F238E27FC236}">
+                <a16:creationId xmlns:a16="http://schemas.microsoft.com/office/drawing/2014/main" id="{EE452774-39F0-DBB4-BF25-318DC4E4B2EA}"/>
+              </a:ext>
+            </a:extLst>
+          </p:cNvPr>
+          <p:cNvCxnSpPr>
+            <a:cxnSpLocks/>
+            <a:stCxn id="95" idx="3"/>
+            <a:endCxn id="97" idx="1"/>
+          </p:cNvCxnSpPr>
+          <p:nvPr/>
+        </p:nvCxnSpPr>
+        <p:spPr>
+          <a:xfrm flipV="1">
+            <a:off x="7810500" y="5219700"/>
+            <a:ext cx="1562100" cy="209550"/>
+          </a:xfrm>
+          <a:prstGeom prst="bentConnector3">
+            <a:avLst>
+              <a:gd name="adj1" fmla="val 50000"/>
+            </a:avLst>
+          </a:prstGeom>
+          <a:ln w="19050">
+            <a:solidFill>
+              <a:srgbClr val="000000"/>
+            </a:solidFill>
+            <a:tailEnd type="triangle"/>
+          </a:ln>
+        </p:spPr>
+        <p:style>
+          <a:lnRef idx="2">
+            <a:schemeClr val="accent1"/>
+          </a:lnRef>
+          <a:fillRef idx="0">
+            <a:schemeClr val="accent1"/>
+          </a:fillRef>
+          <a:effectRef idx="1">
+            <a:schemeClr val="accent1"/>
+          </a:effectRef>
+          <a:fontRef idx="minor">
+            <a:schemeClr val="tx1"/>
+          </a:fontRef>
+        </p:style>
+      </p:cxnSp>
+      <p:sp>
+        <p:nvSpPr>
+          <p:cNvPr id="101" name="Token">
+            <a:extLst>
+              <a:ext uri="{FF2B5EF4-FFF2-40B4-BE49-F238E27FC236}">
+                <a16:creationId xmlns:a16="http://schemas.microsoft.com/office/drawing/2014/main" id="{C0E23E31-36F2-B643-AA80-96D3143676E7}"/>
+              </a:ext>
+            </a:extLst>
+          </p:cNvPr>
+          <p:cNvSpPr/>
+          <p:nvPr/>
+        </p:nvSpPr>
+        <p:spPr>
+          <a:xfrm>
+            <a:off x="9372600" y="5422900"/>
+            <a:ext cx="1574800" cy="431800"/>
+          </a:xfrm>
+          <a:prstGeom prst="roundRect">
+            <a:avLst>
+              <a:gd name="adj" fmla="val 15000"/>
+            </a:avLst>
+          </a:prstGeom>
+          <a:solidFill>
+            <a:srgbClr val="D2C5F4"/>
+          </a:solidFill>
+          <a:ln w="15875">
+            <a:solidFill>
+              <a:srgbClr val="6D28D9"/>
+            </a:solidFill>
+          </a:ln>
+        </p:spPr>
+        <p:style>
+          <a:lnRef idx="2">
+            <a:schemeClr val="accent1">
+              <a:shade val="15000"/>
+            </a:schemeClr>
+          </a:lnRef>
+          <a:fillRef idx="1">
+            <a:schemeClr val="accent1"/>
+          </a:fillRef>
+          <a:effectRef idx="0">
+            <a:schemeClr val="accent1"/>
+          </a:effectRef>
+          <a:fontRef idx="minor">
+            <a:schemeClr val="lt1"/>
+          </a:fontRef>
+        </p:style>
+        <p:txBody>
+          <a:bodyPr wrap="none" lIns="25400" tIns="0" rIns="25400" bIns="0" rtlCol="0" anchor="ctr"/>
+          <a:lstStyle/>
+          <a:p>
+            <a:pPr algn="ctr"/>
+            <a:r>
+              <a:rPr lang="en-US" sz="1000">
+                <a:solidFill>
+                  <a:srgbClr val="3B1E7A"/>
+                </a:solidFill>
+                <a:latin typeface="Segoe UI Semibold" panose="020B0702040204020203" pitchFamily="34" charset="0"/>
+              </a:rPr>
+              <a:t>Token</a:t>
+            </a:r>
+          </a:p>
+          <a:p>
+            <a:pPr algn="ctr"/>
+            <a:r>
+              <a:rPr lang="en-US" sz="900" i="1">
+                <a:solidFill>
+                  <a:srgbClr val="64748B"/>
+                </a:solidFill>
+                <a:latin typeface="Segoe UI" panose="020B0502040204020203" pitchFamily="34" charset="0"/>
+              </a:rPr>
+              <a:t>token rules and state</a:t>
+            </a:r>
+            <a:endParaRPr lang="de-CH" sz="900" i="1">
+              <a:solidFill>
+                <a:srgbClr val="64748B"/>
+              </a:solidFill>
+              <a:latin typeface="Segoe UI" panose="020B0502040204020203" pitchFamily="34" charset="0"/>
+            </a:endParaRPr>
+          </a:p>
+        </p:txBody>
+      </p:sp>
+      <p:cxnSp>
+        <p:nvCxnSpPr>
+          <p:cNvPr id="102" name="data Blocks -&gt; Token">
+            <a:extLst>
+              <a:ext uri="{FF2B5EF4-FFF2-40B4-BE49-F238E27FC236}">
+                <a16:creationId xmlns:a16="http://schemas.microsoft.com/office/drawing/2014/main" id="{909BEDCE-F4A2-5DA3-84D2-24AE56B8EE72}"/>
+              </a:ext>
+            </a:extLst>
+          </p:cNvPr>
+          <p:cNvCxnSpPr>
+            <a:cxnSpLocks/>
+            <a:stCxn id="95" idx="3"/>
+            <a:endCxn id="101" idx="1"/>
+          </p:cNvCxnSpPr>
+          <p:nvPr/>
+        </p:nvCxnSpPr>
+        <p:spPr>
+          <a:xfrm>
+            <a:off x="7810500" y="5429250"/>
+            <a:ext cx="1562100" cy="209550"/>
+          </a:xfrm>
+          <a:prstGeom prst="bentConnector3">
+            <a:avLst>
+              <a:gd name="adj1" fmla="val 50000"/>
+            </a:avLst>
+          </a:prstGeom>
+          <a:ln w="19050">
+            <a:solidFill>
+              <a:srgbClr val="000000"/>
+            </a:solidFill>
+            <a:tailEnd type="triangle"/>
+          </a:ln>
+        </p:spPr>
+        <p:style>
+          <a:lnRef idx="2">
+            <a:schemeClr val="accent1"/>
+          </a:lnRef>
+          <a:fillRef idx="0">
+            <a:schemeClr val="accent1"/>
+          </a:fillRef>
+          <a:effectRef idx="1">
+            <a:schemeClr val="accent1"/>
+          </a:effectRef>
+          <a:fontRef idx="minor">
+            <a:schemeClr val="tx1"/>
+          </a:fontRef>
+        </p:style>
+      </p:cxnSp>
+      <p:sp>
+        <p:nvSpPr>
+          <p:cNvPr id="103" name="Branch.HeaderTip">
+            <a:extLst>
+              <a:ext uri="{FF2B5EF4-FFF2-40B4-BE49-F238E27FC236}">
+                <a16:creationId xmlns:a16="http://schemas.microsoft.com/office/drawing/2014/main" id="{1C87B57A-C436-0427-6D5D-76643BFAA630}"/>
+              </a:ext>
+            </a:extLst>
+          </p:cNvPr>
+          <p:cNvSpPr/>
+          <p:nvPr/>
+        </p:nvSpPr>
+        <p:spPr>
+          <a:xfrm>
+            <a:off x="4013200" y="5353050"/>
+            <a:ext cx="508000" cy="152400"/>
+          </a:xfrm>
+          <a:prstGeom prst="rect">
+            <a:avLst/>
+          </a:prstGeom>
+          <a:solidFill>
+            <a:srgbClr val="F5F2FD"/>
+          </a:solidFill>
+          <a:ln w="9525">
+            <a:solidFill>
+              <a:srgbClr val="6D28D9"/>
+            </a:solidFill>
+          </a:ln>
+        </p:spPr>
+        <p:style>
+          <a:lnRef idx="2">
+            <a:schemeClr val="accent1">
+              <a:shade val="15000"/>
+            </a:schemeClr>
+          </a:lnRef>
+          <a:fillRef idx="1">
+            <a:schemeClr val="accent1"/>
+          </a:fillRef>
+          <a:effectRef idx="0">
+            <a:schemeClr val="accent1"/>
+          </a:effectRef>
+          <a:fontRef idx="minor">
+            <a:schemeClr val="lt1"/>
+          </a:fontRef>
+        </p:style>
+        <p:txBody>
+          <a:bodyPr wrap="none" lIns="0" tIns="0" rIns="0" bIns="0" rtlCol="0" anchor="ctr">
+            <a:noAutofit/>
+          </a:bodyPr>
+          <a:lstStyle/>
+          <a:p>
+            <a:pPr algn="ctr"/>
+            <a:r>
+              <a:rPr lang="de-CH" sz="600" b="1">
+                <a:solidFill>
+                  <a:srgbClr val="3B1E7A"/>
+                </a:solidFill>
+                <a:latin typeface="Consolas" panose="020B0609020204030204" pitchFamily="49" charset="0"/>
+              </a:rPr>
+              <a:t>HeaderTip</a:t>
+            </a:r>
+          </a:p>
+        </p:txBody>
+      </p:sp>
+      <p:sp>
+        <p:nvSpPr>
+          <p:cNvPr id="110" name="Branch.HeaderRoot">
+            <a:extLst>
+              <a:ext uri="{FF2B5EF4-FFF2-40B4-BE49-F238E27FC236}">
+                <a16:creationId xmlns:a16="http://schemas.microsoft.com/office/drawing/2014/main" id="{936C41C6-BFFB-D835-0AED-03345070854F}"/>
+              </a:ext>
+            </a:extLst>
+          </p:cNvPr>
+          <p:cNvSpPr/>
+          <p:nvPr/>
+        </p:nvSpPr>
+        <p:spPr>
+          <a:xfrm>
+            <a:off x="1574800" y="5353050"/>
+            <a:ext cx="508000" cy="152400"/>
+          </a:xfrm>
+          <a:prstGeom prst="rect">
+            <a:avLst/>
+          </a:prstGeom>
+          <a:solidFill>
+            <a:srgbClr val="F5F2FD"/>
+          </a:solidFill>
+          <a:ln w="9525">
+            <a:solidFill>
+              <a:srgbClr val="6D28D9"/>
+            </a:solidFill>
+          </a:ln>
+        </p:spPr>
+        <p:style>
+          <a:lnRef idx="2">
+            <a:schemeClr val="accent1">
+              <a:shade val="15000"/>
+            </a:schemeClr>
+          </a:lnRef>
+          <a:fillRef idx="1">
+            <a:schemeClr val="accent1"/>
+          </a:fillRef>
+          <a:effectRef idx="0">
+            <a:schemeClr val="accent1"/>
+          </a:effectRef>
+          <a:fontRef idx="minor">
+            <a:schemeClr val="lt1"/>
+          </a:fontRef>
+        </p:style>
+        <p:txBody>
+          <a:bodyPr wrap="none" lIns="0" tIns="0" rIns="0" bIns="0" rtlCol="0" anchor="ctr">
+            <a:noAutofit/>
+          </a:bodyPr>
+          <a:lstStyle/>
+          <a:p>
+            <a:pPr algn="ctr"/>
+            <a:r>
+              <a:rPr lang="de-CH" sz="600" b="1">
+                <a:solidFill>
+                  <a:srgbClr val="3B1E7A"/>
+                </a:solidFill>
+                <a:latin typeface="Consolas" panose="020B0609020204030204" pitchFamily="49" charset="0"/>
+              </a:rPr>
+              <a:t>HeaderRoot</a:t>
+            </a:r>
+          </a:p>
+        </p:txBody>
+      </p:sp>
+      <p:sp>
+        <p:nvSpPr>
+          <p:cNvPr id="111" name="Branch.header chain 2">
+            <a:extLst>
+              <a:ext uri="{FF2B5EF4-FFF2-40B4-BE49-F238E27FC236}">
+                <a16:creationId xmlns:a16="http://schemas.microsoft.com/office/drawing/2014/main" id="{14BFDC19-42D2-32D8-5C32-3EBDC6C320BE}"/>
+              </a:ext>
+            </a:extLst>
+          </p:cNvPr>
+          <p:cNvSpPr/>
+          <p:nvPr/>
+        </p:nvSpPr>
+        <p:spPr>
+          <a:xfrm>
+            <a:off x="2184400" y="5353050"/>
+            <a:ext cx="508000" cy="152400"/>
+          </a:xfrm>
+          <a:prstGeom prst="rect">
+            <a:avLst/>
+          </a:prstGeom>
+          <a:solidFill>
+            <a:srgbClr val="F5F2FD"/>
+          </a:solidFill>
+          <a:ln w="9525">
+            <a:solidFill>
+              <a:srgbClr val="6D28D9"/>
+            </a:solidFill>
+          </a:ln>
+        </p:spPr>
+        <p:style>
+          <a:lnRef idx="2">
+            <a:schemeClr val="accent1">
+              <a:shade val="15000"/>
+            </a:schemeClr>
+          </a:lnRef>
+          <a:fillRef idx="1">
+            <a:schemeClr val="accent1"/>
+          </a:fillRef>
+          <a:effectRef idx="0">
+            <a:schemeClr val="accent1"/>
+          </a:effectRef>
+          <a:fontRef idx="minor">
+            <a:schemeClr val="lt1"/>
+          </a:fontRef>
+        </p:style>
+        <p:txBody>
+          <a:bodyPr rtlCol="0" anchor="ctr"/>
+          <a:lstStyle/>
+          <a:p>
+            <a:pPr algn="ctr"/>
+            <a:endParaRPr lang="de-CH"/>
+          </a:p>
+        </p:txBody>
+      </p:sp>
+      <p:cxnSp>
+        <p:nvCxnSpPr>
+          <p:cNvPr id="112" name="Branch.header chain link 1">
+            <a:extLst>
+              <a:ext uri="{FF2B5EF4-FFF2-40B4-BE49-F238E27FC236}">
+                <a16:creationId xmlns:a16="http://schemas.microsoft.com/office/drawing/2014/main" id="{34211296-AB01-2E95-67C7-6B49749F6DFC}"/>
+              </a:ext>
+            </a:extLst>
+          </p:cNvPr>
+          <p:cNvCxnSpPr>
+            <a:cxnSpLocks/>
+            <a:stCxn id="110" idx="3"/>
+            <a:endCxn id="111" idx="1"/>
+          </p:cNvCxnSpPr>
+          <p:nvPr/>
+        </p:nvCxnSpPr>
+        <p:spPr>
+          <a:xfrm>
+            <a:off x="2082800" y="5429250"/>
+            <a:ext cx="101600" cy="0"/>
+          </a:xfrm>
+          <a:prstGeom prst="straightConnector1">
+            <a:avLst/>
+          </a:prstGeom>
+          <a:ln w="9525">
+            <a:solidFill>
+              <a:srgbClr val="6D28D9"/>
+            </a:solidFill>
+          </a:ln>
+        </p:spPr>
+        <p:style>
+          <a:lnRef idx="2">
+            <a:schemeClr val="accent1"/>
+          </a:lnRef>
+          <a:fillRef idx="0">
+            <a:schemeClr val="accent1"/>
+          </a:fillRef>
+          <a:effectRef idx="1">
+            <a:schemeClr val="accent1"/>
+          </a:effectRef>
+          <a:fontRef idx="minor">
+            <a:schemeClr val="tx1"/>
+          </a:fontRef>
+        </p:style>
+      </p:cxnSp>
+      <p:sp>
+        <p:nvSpPr>
+          <p:cNvPr id="113" name="Branch.header chain 3">
+            <a:extLst>
+              <a:ext uri="{FF2B5EF4-FFF2-40B4-BE49-F238E27FC236}">
+                <a16:creationId xmlns:a16="http://schemas.microsoft.com/office/drawing/2014/main" id="{FDD2A0FE-AA31-094F-E434-4ED935404AA6}"/>
+              </a:ext>
+            </a:extLst>
+          </p:cNvPr>
+          <p:cNvSpPr/>
+          <p:nvPr/>
+        </p:nvSpPr>
+        <p:spPr>
+          <a:xfrm>
+            <a:off x="2794000" y="5353050"/>
+            <a:ext cx="508000" cy="152400"/>
+          </a:xfrm>
+          <a:prstGeom prst="rect">
+            <a:avLst/>
+          </a:prstGeom>
+          <a:solidFill>
+            <a:srgbClr val="F5F2FD"/>
+          </a:solidFill>
+          <a:ln w="9525">
+            <a:solidFill>
+              <a:srgbClr val="6D28D9"/>
+            </a:solidFill>
+          </a:ln>
+        </p:spPr>
+        <p:style>
+          <a:lnRef idx="2">
+            <a:schemeClr val="accent1">
+              <a:shade val="15000"/>
+            </a:schemeClr>
+          </a:lnRef>
+          <a:fillRef idx="1">
+            <a:schemeClr val="accent1"/>
+          </a:fillRef>
+          <a:effectRef idx="0">
+            <a:schemeClr val="accent1"/>
+          </a:effectRef>
+          <a:fontRef idx="minor">
+            <a:schemeClr val="lt1"/>
+          </a:fontRef>
+        </p:style>
+        <p:txBody>
+          <a:bodyPr rtlCol="0" anchor="ctr"/>
+          <a:lstStyle/>
+          <a:p>
+            <a:pPr algn="ctr"/>
+            <a:endParaRPr lang="de-CH"/>
+          </a:p>
+        </p:txBody>
+      </p:sp>
+      <p:cxnSp>
+        <p:nvCxnSpPr>
+          <p:cNvPr id="114" name="Branch.header chain link 2">
+            <a:extLst>
+              <a:ext uri="{FF2B5EF4-FFF2-40B4-BE49-F238E27FC236}">
+                <a16:creationId xmlns:a16="http://schemas.microsoft.com/office/drawing/2014/main" id="{7400F8DD-7F62-2262-0C40-3A003250C12A}"/>
+              </a:ext>
+            </a:extLst>
+          </p:cNvPr>
+          <p:cNvCxnSpPr>
+            <a:cxnSpLocks/>
+            <a:stCxn id="111" idx="3"/>
+            <a:endCxn id="113" idx="1"/>
+          </p:cNvCxnSpPr>
+          <p:nvPr/>
+        </p:nvCxnSpPr>
+        <p:spPr>
+          <a:xfrm>
+            <a:off x="2692400" y="5429250"/>
+            <a:ext cx="101600" cy="0"/>
+          </a:xfrm>
+          <a:prstGeom prst="straightConnector1">
+            <a:avLst/>
+          </a:prstGeom>
+          <a:ln w="9525">
+            <a:solidFill>
+              <a:srgbClr val="6D28D9"/>
+            </a:solidFill>
+          </a:ln>
+        </p:spPr>
+        <p:style>
+          <a:lnRef idx="2">
+            <a:schemeClr val="accent1"/>
+          </a:lnRef>
+          <a:fillRef idx="0">
+            <a:schemeClr val="accent1"/>
+          </a:fillRef>
+          <a:effectRef idx="1">
+            <a:schemeClr val="accent1"/>
+          </a:effectRef>
+          <a:fontRef idx="minor">
+            <a:schemeClr val="tx1"/>
+          </a:fontRef>
+        </p:style>
+      </p:cxnSp>
+      <p:sp>
+        <p:nvSpPr>
+          <p:cNvPr id="115" name="Branch.header chain 4">
+            <a:extLst>
+              <a:ext uri="{FF2B5EF4-FFF2-40B4-BE49-F238E27FC236}">
+                <a16:creationId xmlns:a16="http://schemas.microsoft.com/office/drawing/2014/main" id="{0E007559-1875-6436-4856-465999500C61}"/>
+              </a:ext>
+            </a:extLst>
+          </p:cNvPr>
+          <p:cNvSpPr/>
+          <p:nvPr/>
+        </p:nvSpPr>
+        <p:spPr>
+          <a:xfrm>
+            <a:off x="3403600" y="5353050"/>
+            <a:ext cx="508000" cy="152400"/>
+          </a:xfrm>
+          <a:prstGeom prst="rect">
+            <a:avLst/>
+          </a:prstGeom>
+          <a:solidFill>
+            <a:srgbClr val="F5F2FD"/>
+          </a:solidFill>
+          <a:ln w="9525">
+            <a:solidFill>
+              <a:srgbClr val="6D28D9"/>
+            </a:solidFill>
+          </a:ln>
+        </p:spPr>
+        <p:style>
+          <a:lnRef idx="2">
+            <a:schemeClr val="accent1">
+              <a:shade val="15000"/>
+            </a:schemeClr>
+          </a:lnRef>
+          <a:fillRef idx="1">
+            <a:schemeClr val="accent1"/>
+          </a:fillRef>
+          <a:effectRef idx="0">
+            <a:schemeClr val="accent1"/>
+          </a:effectRef>
+          <a:fontRef idx="minor">
+            <a:schemeClr val="lt1"/>
+          </a:fontRef>
+        </p:style>
+        <p:txBody>
+          <a:bodyPr rtlCol="0" anchor="ctr"/>
+          <a:lstStyle/>
+          <a:p>
+            <a:pPr algn="ctr"/>
+            <a:endParaRPr lang="de-CH"/>
+          </a:p>
+        </p:txBody>
+      </p:sp>
+      <p:cxnSp>
+        <p:nvCxnSpPr>
+          <p:cNvPr id="116" name="Branch.header chain link 3">
+            <a:extLst>
+              <a:ext uri="{FF2B5EF4-FFF2-40B4-BE49-F238E27FC236}">
+                <a16:creationId xmlns:a16="http://schemas.microsoft.com/office/drawing/2014/main" id="{C8216F21-0373-D68B-0472-B86676091A64}"/>
+              </a:ext>
+            </a:extLst>
+          </p:cNvPr>
+          <p:cNvCxnSpPr>
+            <a:cxnSpLocks/>
+            <a:stCxn id="113" idx="3"/>
+            <a:endCxn id="115" idx="1"/>
+          </p:cNvCxnSpPr>
+          <p:nvPr/>
+        </p:nvCxnSpPr>
+        <p:spPr>
+          <a:xfrm>
+            <a:off x="3302000" y="5429250"/>
+            <a:ext cx="101600" cy="0"/>
+          </a:xfrm>
+          <a:prstGeom prst="straightConnector1">
+            <a:avLst/>
+          </a:prstGeom>
+          <a:ln w="9525">
+            <a:solidFill>
+              <a:srgbClr val="6D28D9"/>
+            </a:solidFill>
+          </a:ln>
+        </p:spPr>
+        <p:style>
+          <a:lnRef idx="2">
+            <a:schemeClr val="accent1"/>
+          </a:lnRef>
+          <a:fillRef idx="0">
+            <a:schemeClr val="accent1"/>
+          </a:fillRef>
+          <a:effectRef idx="1">
+            <a:schemeClr val="accent1"/>
+          </a:effectRef>
+          <a:fontRef idx="minor">
+            <a:schemeClr val="tx1"/>
+          </a:fontRef>
+        </p:style>
+      </p:cxnSp>
+      <p:sp>
+        <p:nvSpPr>
+          <p:cNvPr id="88" name="Branch child 1">
+            <a:extLst>
+              <a:ext uri="{FF2B5EF4-FFF2-40B4-BE49-F238E27FC236}">
+                <a16:creationId xmlns:a16="http://schemas.microsoft.com/office/drawing/2014/main" id="{96A7593F-CC2F-E83E-D9CC-44FB85C01AD9}"/>
+              </a:ext>
+            </a:extLst>
+          </p:cNvPr>
+          <p:cNvSpPr/>
+          <p:nvPr/>
+        </p:nvSpPr>
+        <p:spPr>
+          <a:xfrm>
+            <a:off x="968235" y="5638800"/>
+            <a:ext cx="2003565" cy="558800"/>
+          </a:xfrm>
+          <a:prstGeom prst="roundRect">
+            <a:avLst>
+              <a:gd name="adj" fmla="val 13636"/>
+            </a:avLst>
+          </a:prstGeom>
+          <a:solidFill>
+            <a:srgbClr val="AF98EA"/>
+          </a:solidFill>
+          <a:ln w="12700">
+            <a:solidFill>
+              <a:srgbClr val="6D28D9"/>
+            </a:solidFill>
+          </a:ln>
+        </p:spPr>
+        <p:style>
+          <a:lnRef idx="2">
+            <a:schemeClr val="accent1">
+              <a:shade val="15000"/>
+            </a:schemeClr>
+          </a:lnRef>
+          <a:fillRef idx="1">
+            <a:schemeClr val="accent1"/>
+          </a:fillRef>
+          <a:effectRef idx="0">
+            <a:schemeClr val="accent1"/>
+          </a:effectRef>
+          <a:fontRef idx="minor">
+            <a:schemeClr val="lt1"/>
+          </a:fontRef>
+        </p:style>
+        <p:txBody>
+          <a:bodyPr rtlCol="0" anchor="ctr"/>
+          <a:lstStyle/>
+          <a:p>
+            <a:pPr algn="ctr"/>
+            <a:endParaRPr lang="de-CH"/>
+          </a:p>
+        </p:txBody>
+      </p:sp>
+      <p:sp>
+        <p:nvSpPr>
+          <p:cNvPr id="89" name="Branch child 2">
+            <a:extLst>
+              <a:ext uri="{FF2B5EF4-FFF2-40B4-BE49-F238E27FC236}">
+                <a16:creationId xmlns:a16="http://schemas.microsoft.com/office/drawing/2014/main" id="{2CAE123B-2F0C-BEB1-F7DC-A53D24657CC2}"/>
+              </a:ext>
+            </a:extLst>
+          </p:cNvPr>
+          <p:cNvSpPr/>
+          <p:nvPr/>
+        </p:nvSpPr>
+        <p:spPr>
+          <a:xfrm>
+            <a:off x="3733800" y="5638800"/>
+            <a:ext cx="2003565" cy="558800"/>
+          </a:xfrm>
+          <a:prstGeom prst="roundRect">
+            <a:avLst>
+              <a:gd name="adj" fmla="val 13636"/>
+            </a:avLst>
+          </a:prstGeom>
+          <a:solidFill>
+            <a:srgbClr val="AF98EA"/>
+          </a:solidFill>
+          <a:ln w="12700">
+            <a:solidFill>
+              <a:srgbClr val="6D28D9"/>
+            </a:solidFill>
+          </a:ln>
+        </p:spPr>
+        <p:style>
+          <a:lnRef idx="2">
+            <a:schemeClr val="accent1">
+              <a:shade val="15000"/>
+            </a:schemeClr>
+          </a:lnRef>
+          <a:fillRef idx="1">
+            <a:schemeClr val="accent1"/>
+          </a:fillRef>
+          <a:effectRef idx="0">
+            <a:schemeClr val="accent1"/>
+          </a:effectRef>
+          <a:fontRef idx="minor">
+            <a:schemeClr val="lt1"/>
+          </a:fontRef>
+        </p:style>
+        <p:txBody>
+          <a:bodyPr rtlCol="0" anchor="ctr"/>
+          <a:lstStyle/>
+          <a:p>
+            <a:pPr algn="ctr"/>
+            <a:endParaRPr lang="de-CH"/>
+          </a:p>
+        </p:txBody>
+      </p:sp>
+      <p:sp>
+        <p:nvSpPr>
+          <p:cNvPr id="92" name="Branch grandchild 1.2">
+            <a:extLst>
+              <a:ext uri="{FF2B5EF4-FFF2-40B4-BE49-F238E27FC236}">
+                <a16:creationId xmlns:a16="http://schemas.microsoft.com/office/drawing/2014/main" id="{C2EB0164-371C-D566-AD32-2A01EC6427B6}"/>
+              </a:ext>
+            </a:extLst>
+          </p:cNvPr>
+          <p:cNvSpPr/>
+          <p:nvPr/>
+        </p:nvSpPr>
+        <p:spPr>
+          <a:xfrm>
+            <a:off x="2095500" y="5867400"/>
+            <a:ext cx="762000" cy="254000"/>
+          </a:xfrm>
+          <a:prstGeom prst="roundRect">
+            <a:avLst>
+              <a:gd name="adj" fmla="val 20000"/>
+            </a:avLst>
+          </a:prstGeom>
+          <a:solidFill>
+            <a:srgbClr val="8C6BE0"/>
+          </a:solidFill>
+          <a:ln w="9525">
+            <a:solidFill>
+              <a:srgbClr val="6D28D9"/>
+            </a:solidFill>
+          </a:ln>
+        </p:spPr>
+        <p:style>
+          <a:lnRef idx="2">
+            <a:schemeClr val="accent1">
+              <a:shade val="15000"/>
+            </a:schemeClr>
+          </a:lnRef>
+          <a:fillRef idx="1">
+            <a:schemeClr val="accent1"/>
+          </a:fillRef>
+          <a:effectRef idx="0">
+            <a:schemeClr val="accent1"/>
+          </a:effectRef>
+          <a:fontRef idx="minor">
+            <a:schemeClr val="lt1"/>
+          </a:fontRef>
+        </p:style>
+        <p:txBody>
+          <a:bodyPr rtlCol="0" anchor="ctr"/>
+          <a:lstStyle/>
+          <a:p>
+            <a:pPr algn="ctr"/>
+            <a:endParaRPr lang="de-CH"/>
+          </a:p>
+        </p:txBody>
+      </p:sp>
+      <p:sp>
+        <p:nvSpPr>
+          <p:cNvPr id="124" name="Branch child 1.header 1">
+            <a:extLst>
+              <a:ext uri="{FF2B5EF4-FFF2-40B4-BE49-F238E27FC236}">
+                <a16:creationId xmlns:a16="http://schemas.microsoft.com/office/drawing/2014/main" id="{FCB3E271-1E75-69D9-4458-2D2B7EA7F99F}"/>
+              </a:ext>
+            </a:extLst>
+          </p:cNvPr>
+          <p:cNvSpPr/>
+          <p:nvPr/>
+        </p:nvSpPr>
+        <p:spPr>
+          <a:xfrm>
+            <a:off x="2006600" y="5715000"/>
+            <a:ext cx="254000" cy="76200"/>
+          </a:xfrm>
+          <a:prstGeom prst="rect">
+            <a:avLst/>
+          </a:prstGeom>
+          <a:solidFill>
+            <a:srgbClr val="F5F2FD"/>
+          </a:solidFill>
+          <a:ln w="6350">
+            <a:solidFill>
+              <a:srgbClr val="6D28D9"/>
+            </a:solidFill>
+          </a:ln>
+        </p:spPr>
+        <p:style>
+          <a:lnRef idx="2">
+            <a:schemeClr val="accent1">
+              <a:shade val="15000"/>
+            </a:schemeClr>
+          </a:lnRef>
+          <a:fillRef idx="1">
+            <a:schemeClr val="accent1"/>
+          </a:fillRef>
+          <a:effectRef idx="0">
+            <a:schemeClr val="accent1"/>
+          </a:effectRef>
+          <a:fontRef idx="minor">
+            <a:schemeClr val="lt1"/>
+          </a:fontRef>
+        </p:style>
+        <p:txBody>
+          <a:bodyPr rtlCol="0" anchor="ctr"/>
+          <a:lstStyle/>
+          <a:p>
+            <a:pPr algn="ctr"/>
+            <a:endParaRPr lang="de-CH"/>
+          </a:p>
+        </p:txBody>
+      </p:sp>
+      <p:sp>
+        <p:nvSpPr>
+          <p:cNvPr id="125" name="Branch child 1.header 2">
+            <a:extLst>
+              <a:ext uri="{FF2B5EF4-FFF2-40B4-BE49-F238E27FC236}">
+                <a16:creationId xmlns:a16="http://schemas.microsoft.com/office/drawing/2014/main" id="{ECD21137-BB4D-A1BA-60F8-898DACA39C8B}"/>
+              </a:ext>
+            </a:extLst>
+          </p:cNvPr>
+          <p:cNvSpPr/>
+          <p:nvPr/>
+        </p:nvSpPr>
+        <p:spPr>
+          <a:xfrm>
+            <a:off x="2311400" y="5715000"/>
+            <a:ext cx="254000" cy="76200"/>
+          </a:xfrm>
+          <a:prstGeom prst="rect">
+            <a:avLst/>
+          </a:prstGeom>
+          <a:solidFill>
+            <a:srgbClr val="F5F2FD"/>
+          </a:solidFill>
+          <a:ln w="6350">
+            <a:solidFill>
+              <a:srgbClr val="6D28D9"/>
+            </a:solidFill>
+          </a:ln>
+        </p:spPr>
+        <p:style>
+          <a:lnRef idx="2">
+            <a:schemeClr val="accent1">
+              <a:shade val="15000"/>
+            </a:schemeClr>
+          </a:lnRef>
+          <a:fillRef idx="1">
+            <a:schemeClr val="accent1"/>
+          </a:fillRef>
+          <a:effectRef idx="0">
+            <a:schemeClr val="accent1"/>
+          </a:effectRef>
+          <a:fontRef idx="minor">
+            <a:schemeClr val="lt1"/>
+          </a:fontRef>
+        </p:style>
+        <p:txBody>
+          <a:bodyPr rtlCol="0" anchor="ctr"/>
+          <a:lstStyle/>
+          <a:p>
+            <a:pPr algn="ctr"/>
+            <a:endParaRPr lang="de-CH"/>
+          </a:p>
+        </p:txBody>
+      </p:sp>
+      <p:sp>
+        <p:nvSpPr>
+          <p:cNvPr id="127" name="Branch child 1.header 3">
+            <a:extLst>
+              <a:ext uri="{FF2B5EF4-FFF2-40B4-BE49-F238E27FC236}">
+                <a16:creationId xmlns:a16="http://schemas.microsoft.com/office/drawing/2014/main" id="{F7827AB9-99F9-4565-DB78-8F2F553F0393}"/>
+              </a:ext>
+            </a:extLst>
+          </p:cNvPr>
+          <p:cNvSpPr/>
+          <p:nvPr/>
+        </p:nvSpPr>
+        <p:spPr>
+          <a:xfrm>
+            <a:off x="2616200" y="5715000"/>
+            <a:ext cx="254000" cy="76200"/>
+          </a:xfrm>
+          <a:prstGeom prst="rect">
+            <a:avLst/>
+          </a:prstGeom>
+          <a:solidFill>
+            <a:srgbClr val="F5F2FD"/>
+          </a:solidFill>
+          <a:ln w="6350">
+            <a:solidFill>
+              <a:srgbClr val="6D28D9"/>
+            </a:solidFill>
+          </a:ln>
+        </p:spPr>
+        <p:style>
+          <a:lnRef idx="2">
+            <a:schemeClr val="accent1">
+              <a:shade val="15000"/>
+            </a:schemeClr>
+          </a:lnRef>
+          <a:fillRef idx="1">
+            <a:schemeClr val="accent1"/>
+          </a:fillRef>
+          <a:effectRef idx="0">
+            <a:schemeClr val="accent1"/>
+          </a:effectRef>
+          <a:fontRef idx="minor">
+            <a:schemeClr val="lt1"/>
+          </a:fontRef>
+        </p:style>
+        <p:txBody>
+          <a:bodyPr rtlCol="0" anchor="ctr"/>
+          <a:lstStyle/>
+          <a:p>
+            <a:pPr algn="ctr"/>
+            <a:endParaRPr lang="de-CH"/>
+          </a:p>
+        </p:txBody>
+      </p:sp>
+      <p:cxnSp>
+        <p:nvCxnSpPr>
+          <p:cNvPr id="126" name="Branch child 1.header link 1">
+            <a:extLst>
+              <a:ext uri="{FF2B5EF4-FFF2-40B4-BE49-F238E27FC236}">
+                <a16:creationId xmlns:a16="http://schemas.microsoft.com/office/drawing/2014/main" id="{187B19C2-6405-25CB-D32B-7AC44CA4EE60}"/>
+              </a:ext>
+            </a:extLst>
+          </p:cNvPr>
+          <p:cNvCxnSpPr>
+            <a:cxnSpLocks/>
+            <a:stCxn id="124" idx="3"/>
+            <a:endCxn id="125" idx="1"/>
+          </p:cNvCxnSpPr>
+          <p:nvPr/>
+        </p:nvCxnSpPr>
+        <p:spPr>
+          <a:xfrm>
+            <a:off x="2260600" y="5753100"/>
+            <a:ext cx="50800" cy="0"/>
+          </a:xfrm>
+          <a:prstGeom prst="straightConnector1">
+            <a:avLst/>
+          </a:prstGeom>
+          <a:ln w="6350">
+            <a:solidFill>
+              <a:srgbClr val="6D28D9"/>
+            </a:solidFill>
+          </a:ln>
+        </p:spPr>
+        <p:style>
+          <a:lnRef idx="2">
+            <a:schemeClr val="accent1"/>
+          </a:lnRef>
+          <a:fillRef idx="0">
+            <a:schemeClr val="accent1"/>
+          </a:fillRef>
+          <a:effectRef idx="1">
+            <a:schemeClr val="accent1"/>
+          </a:effectRef>
+          <a:fontRef idx="minor">
+            <a:schemeClr val="tx1"/>
+          </a:fontRef>
+        </p:style>
+      </p:cxnSp>
+      <p:cxnSp>
+        <p:nvCxnSpPr>
+          <p:cNvPr id="128" name="Branch child 1.header link 2">
+            <a:extLst>
+              <a:ext uri="{FF2B5EF4-FFF2-40B4-BE49-F238E27FC236}">
+                <a16:creationId xmlns:a16="http://schemas.microsoft.com/office/drawing/2014/main" id="{0F420FA5-BA83-91E1-366A-13BD9CB506D6}"/>
+              </a:ext>
+            </a:extLst>
+          </p:cNvPr>
+          <p:cNvCxnSpPr>
+            <a:cxnSpLocks/>
+            <a:stCxn id="125" idx="3"/>
+            <a:endCxn id="127" idx="1"/>
+          </p:cNvCxnSpPr>
+          <p:nvPr/>
+        </p:nvCxnSpPr>
+        <p:spPr>
+          <a:xfrm>
+            <a:off x="2565400" y="5753100"/>
+            <a:ext cx="50800" cy="0"/>
+          </a:xfrm>
+          <a:prstGeom prst="straightConnector1">
+            <a:avLst/>
+          </a:prstGeom>
+          <a:ln w="6350">
+            <a:solidFill>
+              <a:srgbClr val="6D28D9"/>
+            </a:solidFill>
+          </a:ln>
+        </p:spPr>
+        <p:style>
+          <a:lnRef idx="2">
+            <a:schemeClr val="accent1"/>
+          </a:lnRef>
+          <a:fillRef idx="0">
+            <a:schemeClr val="accent1"/>
+          </a:fillRef>
+          <a:effectRef idx="1">
+            <a:schemeClr val="accent1"/>
+          </a:effectRef>
+          <a:fontRef idx="minor">
+            <a:schemeClr val="tx1"/>
+          </a:fontRef>
+        </p:style>
+      </p:cxnSp>
+      <p:sp>
+        <p:nvSpPr>
+          <p:cNvPr id="132" name="Branch grandchild 1.2.header 1">
+            <a:extLst>
+              <a:ext uri="{FF2B5EF4-FFF2-40B4-BE49-F238E27FC236}">
+                <a16:creationId xmlns:a16="http://schemas.microsoft.com/office/drawing/2014/main" id="{42097D8F-BBC8-2E22-4EDC-95522471CC29}"/>
+              </a:ext>
+            </a:extLst>
+          </p:cNvPr>
+          <p:cNvSpPr/>
+          <p:nvPr/>
+        </p:nvSpPr>
+        <p:spPr>
+          <a:xfrm>
+            <a:off x="2201333" y="5930900"/>
+            <a:ext cx="169333" cy="50800"/>
+          </a:xfrm>
+          <a:prstGeom prst="rect">
+            <a:avLst/>
+          </a:prstGeom>
+          <a:solidFill>
+            <a:srgbClr val="F5F2FD"/>
+          </a:solidFill>
+          <a:ln w="6350">
+            <a:solidFill>
+              <a:srgbClr val="6D28D9"/>
+            </a:solidFill>
+          </a:ln>
+        </p:spPr>
+        <p:style>
+          <a:lnRef idx="2">
+            <a:schemeClr val="accent1">
+              <a:shade val="15000"/>
+            </a:schemeClr>
+          </a:lnRef>
+          <a:fillRef idx="1">
+            <a:schemeClr val="accent1"/>
+          </a:fillRef>
+          <a:effectRef idx="0">
+            <a:schemeClr val="accent1"/>
+          </a:effectRef>
+          <a:fontRef idx="minor">
+            <a:schemeClr val="lt1"/>
+          </a:fontRef>
+        </p:style>
+        <p:txBody>
+          <a:bodyPr rtlCol="0" anchor="ctr"/>
+          <a:lstStyle/>
+          <a:p>
+            <a:pPr algn="ctr"/>
+            <a:endParaRPr lang="de-CH"/>
+          </a:p>
+        </p:txBody>
+      </p:sp>
+      <p:sp>
+        <p:nvSpPr>
+          <p:cNvPr id="133" name="Branch grandchild 1.2.header 2">
+            <a:extLst>
+              <a:ext uri="{FF2B5EF4-FFF2-40B4-BE49-F238E27FC236}">
+                <a16:creationId xmlns:a16="http://schemas.microsoft.com/office/drawing/2014/main" id="{44B94ECC-9180-B254-C628-9D535AB6F930}"/>
+              </a:ext>
+            </a:extLst>
+          </p:cNvPr>
+          <p:cNvSpPr/>
+          <p:nvPr/>
+        </p:nvSpPr>
+        <p:spPr>
+          <a:xfrm>
+            <a:off x="2404533" y="5930900"/>
+            <a:ext cx="169333" cy="50800"/>
+          </a:xfrm>
+          <a:prstGeom prst="rect">
+            <a:avLst/>
+          </a:prstGeom>
+          <a:solidFill>
+            <a:srgbClr val="F5F2FD"/>
+          </a:solidFill>
+          <a:ln w="6350">
+            <a:solidFill>
+              <a:srgbClr val="6D28D9"/>
+            </a:solidFill>
+          </a:ln>
+        </p:spPr>
+        <p:style>
+          <a:lnRef idx="2">
+            <a:schemeClr val="accent1">
+              <a:shade val="15000"/>
+            </a:schemeClr>
+          </a:lnRef>
+          <a:fillRef idx="1">
+            <a:schemeClr val="accent1"/>
+          </a:fillRef>
+          <a:effectRef idx="0">
+            <a:schemeClr val="accent1"/>
+          </a:effectRef>
+          <a:fontRef idx="minor">
+            <a:schemeClr val="lt1"/>
+          </a:fontRef>
+        </p:style>
+        <p:txBody>
+          <a:bodyPr rtlCol="0" anchor="ctr"/>
+          <a:lstStyle/>
+          <a:p>
+            <a:pPr algn="ctr"/>
+            <a:endParaRPr lang="de-CH"/>
+          </a:p>
+        </p:txBody>
+      </p:sp>
+      <p:cxnSp>
+        <p:nvCxnSpPr>
+          <p:cNvPr id="134" name="Branch grandchild 1.2.header link 1">
+            <a:extLst>
+              <a:ext uri="{FF2B5EF4-FFF2-40B4-BE49-F238E27FC236}">
+                <a16:creationId xmlns:a16="http://schemas.microsoft.com/office/drawing/2014/main" id="{E409BA0A-56B5-4820-1C50-6615CF298D06}"/>
+              </a:ext>
+            </a:extLst>
+          </p:cNvPr>
+          <p:cNvCxnSpPr>
+            <a:cxnSpLocks/>
+            <a:stCxn id="132" idx="3"/>
+            <a:endCxn id="133" idx="1"/>
+          </p:cNvCxnSpPr>
+          <p:nvPr/>
+        </p:nvCxnSpPr>
+        <p:spPr>
+          <a:xfrm>
+            <a:off x="2370666" y="5956300"/>
+            <a:ext cx="33867" cy="0"/>
+          </a:xfrm>
+          <a:prstGeom prst="straightConnector1">
+            <a:avLst/>
+          </a:prstGeom>
+          <a:ln w="6350">
+            <a:solidFill>
+              <a:srgbClr val="6D28D9"/>
+            </a:solidFill>
+          </a:ln>
+        </p:spPr>
+        <p:style>
+          <a:lnRef idx="2">
+            <a:schemeClr val="accent1"/>
+          </a:lnRef>
+          <a:fillRef idx="0">
+            <a:schemeClr val="accent1"/>
+          </a:fillRef>
+          <a:effectRef idx="1">
+            <a:schemeClr val="accent1"/>
+          </a:effectRef>
+          <a:fontRef idx="minor">
+            <a:schemeClr val="tx1"/>
+          </a:fontRef>
+        </p:style>
+      </p:cxnSp>
+      <p:sp>
+        <p:nvSpPr>
+          <p:cNvPr id="149" name="Branch child 2.header 1">
+            <a:extLst>
+              <a:ext uri="{FF2B5EF4-FFF2-40B4-BE49-F238E27FC236}">
+                <a16:creationId xmlns:a16="http://schemas.microsoft.com/office/drawing/2014/main" id="{92B60BBA-B161-0AE9-DFF2-4DBA063F77E6}"/>
+              </a:ext>
+            </a:extLst>
+          </p:cNvPr>
+          <p:cNvSpPr/>
+          <p:nvPr/>
+        </p:nvSpPr>
+        <p:spPr>
+          <a:xfrm>
+            <a:off x="3835400" y="5715000"/>
+            <a:ext cx="254000" cy="76200"/>
+          </a:xfrm>
+          <a:prstGeom prst="rect">
+            <a:avLst/>
+          </a:prstGeom>
+          <a:solidFill>
+            <a:srgbClr val="F5F2FD"/>
+          </a:solidFill>
+          <a:ln w="6350">
+            <a:solidFill>
+              <a:srgbClr val="6D28D9"/>
+            </a:solidFill>
+          </a:ln>
+        </p:spPr>
+        <p:style>
+          <a:lnRef idx="2">
+            <a:schemeClr val="accent1">
+              <a:shade val="15000"/>
+            </a:schemeClr>
+          </a:lnRef>
+          <a:fillRef idx="1">
+            <a:schemeClr val="accent1"/>
+          </a:fillRef>
+          <a:effectRef idx="0">
+            <a:schemeClr val="accent1"/>
+          </a:effectRef>
+          <a:fontRef idx="minor">
+            <a:schemeClr val="lt1"/>
+          </a:fontRef>
+        </p:style>
+        <p:txBody>
+          <a:bodyPr rtlCol="0" anchor="ctr"/>
+          <a:lstStyle/>
+          <a:p>
+            <a:pPr algn="ctr"/>
+            <a:endParaRPr lang="de-CH"/>
+          </a:p>
+        </p:txBody>
+      </p:sp>
+      <p:sp>
+        <p:nvSpPr>
+          <p:cNvPr id="150" name="Branch child 2.header 2">
+            <a:extLst>
+              <a:ext uri="{FF2B5EF4-FFF2-40B4-BE49-F238E27FC236}">
+                <a16:creationId xmlns:a16="http://schemas.microsoft.com/office/drawing/2014/main" id="{2E29E53A-7ADA-8FD5-A9ED-33112CC91A32}"/>
+              </a:ext>
+            </a:extLst>
+          </p:cNvPr>
+          <p:cNvSpPr/>
+          <p:nvPr/>
+        </p:nvSpPr>
+        <p:spPr>
+          <a:xfrm>
+            <a:off x="4140200" y="5715000"/>
+            <a:ext cx="254000" cy="76200"/>
+          </a:xfrm>
+          <a:prstGeom prst="rect">
+            <a:avLst/>
+          </a:prstGeom>
+          <a:solidFill>
+            <a:srgbClr val="F5F2FD"/>
+          </a:solidFill>
+          <a:ln w="6350">
+            <a:solidFill>
+              <a:srgbClr val="6D28D9"/>
+            </a:solidFill>
+          </a:ln>
+        </p:spPr>
+        <p:style>
+          <a:lnRef idx="2">
+            <a:schemeClr val="accent1">
+              <a:shade val="15000"/>
+            </a:schemeClr>
+          </a:lnRef>
+          <a:fillRef idx="1">
+            <a:schemeClr val="accent1"/>
+          </a:fillRef>
+          <a:effectRef idx="0">
+            <a:schemeClr val="accent1"/>
+          </a:effectRef>
+          <a:fontRef idx="minor">
+            <a:schemeClr val="lt1"/>
+          </a:fontRef>
+        </p:style>
+        <p:txBody>
+          <a:bodyPr rtlCol="0" anchor="ctr"/>
+          <a:lstStyle/>
+          <a:p>
+            <a:pPr algn="ctr"/>
+            <a:endParaRPr lang="de-CH"/>
+          </a:p>
+        </p:txBody>
+      </p:sp>
+      <p:sp>
+        <p:nvSpPr>
+          <p:cNvPr id="151" name="Branch child 2.header 3">
+            <a:extLst>
+              <a:ext uri="{FF2B5EF4-FFF2-40B4-BE49-F238E27FC236}">
+                <a16:creationId xmlns:a16="http://schemas.microsoft.com/office/drawing/2014/main" id="{228142ED-5778-2DE6-9859-6130838B31F8}"/>
+              </a:ext>
+            </a:extLst>
+          </p:cNvPr>
+          <p:cNvSpPr/>
+          <p:nvPr/>
+        </p:nvSpPr>
+        <p:spPr>
+          <a:xfrm>
+            <a:off x="4445000" y="5715000"/>
+            <a:ext cx="254000" cy="76200"/>
+          </a:xfrm>
+          <a:prstGeom prst="rect">
+            <a:avLst/>
+          </a:prstGeom>
+          <a:solidFill>
+            <a:srgbClr val="F5F2FD"/>
+          </a:solidFill>
+          <a:ln w="6350">
+            <a:solidFill>
+              <a:srgbClr val="6D28D9"/>
+            </a:solidFill>
+          </a:ln>
+        </p:spPr>
+        <p:style>
+          <a:lnRef idx="2">
+            <a:schemeClr val="accent1">
+              <a:shade val="15000"/>
+            </a:schemeClr>
+          </a:lnRef>
+          <a:fillRef idx="1">
+            <a:schemeClr val="accent1"/>
+          </a:fillRef>
+          <a:effectRef idx="0">
+            <a:schemeClr val="accent1"/>
+          </a:effectRef>
+          <a:fontRef idx="minor">
+            <a:schemeClr val="lt1"/>
+          </a:fontRef>
+        </p:style>
+        <p:txBody>
+          <a:bodyPr rtlCol="0" anchor="ctr"/>
+          <a:lstStyle/>
+          <a:p>
+            <a:pPr algn="ctr"/>
+            <a:endParaRPr lang="de-CH"/>
+          </a:p>
+        </p:txBody>
+      </p:sp>
+      <p:cxnSp>
+        <p:nvCxnSpPr>
+          <p:cNvPr id="152" name="Branch child 2.header link 1">
+            <a:extLst>
+              <a:ext uri="{FF2B5EF4-FFF2-40B4-BE49-F238E27FC236}">
+                <a16:creationId xmlns:a16="http://schemas.microsoft.com/office/drawing/2014/main" id="{7765676C-D555-03B9-9FCD-90BEB42087A4}"/>
+              </a:ext>
+            </a:extLst>
+          </p:cNvPr>
+          <p:cNvCxnSpPr>
+            <a:cxnSpLocks/>
+            <a:stCxn id="149" idx="3"/>
+            <a:endCxn id="150" idx="1"/>
+          </p:cNvCxnSpPr>
+          <p:nvPr/>
+        </p:nvCxnSpPr>
+        <p:spPr>
+          <a:xfrm>
+            <a:off x="4089400" y="5753100"/>
+            <a:ext cx="50800" cy="0"/>
+          </a:xfrm>
+          <a:prstGeom prst="straightConnector1">
+            <a:avLst/>
+          </a:prstGeom>
+          <a:ln w="6350">
+            <a:solidFill>
+              <a:srgbClr val="6D28D9"/>
+            </a:solidFill>
+          </a:ln>
+        </p:spPr>
+        <p:style>
+          <a:lnRef idx="2">
+            <a:schemeClr val="accent1"/>
+          </a:lnRef>
+          <a:fillRef idx="0">
+            <a:schemeClr val="accent1"/>
+          </a:fillRef>
+          <a:effectRef idx="1">
+            <a:schemeClr val="accent1"/>
+          </a:effectRef>
+          <a:fontRef idx="minor">
+            <a:schemeClr val="tx1"/>
+          </a:fontRef>
+        </p:style>
+      </p:cxnSp>
+      <p:cxnSp>
+        <p:nvCxnSpPr>
+          <p:cNvPr id="153" name="Branch child 2.header link 2">
+            <a:extLst>
+              <a:ext uri="{FF2B5EF4-FFF2-40B4-BE49-F238E27FC236}">
+                <a16:creationId xmlns:a16="http://schemas.microsoft.com/office/drawing/2014/main" id="{E10B08D9-F419-E65A-0F00-3206FC175EA9}"/>
+              </a:ext>
+            </a:extLst>
+          </p:cNvPr>
+          <p:cNvCxnSpPr>
+            <a:cxnSpLocks/>
+            <a:stCxn id="150" idx="3"/>
+            <a:endCxn id="151" idx="1"/>
+          </p:cNvCxnSpPr>
+          <p:nvPr/>
+        </p:nvCxnSpPr>
+        <p:spPr>
+          <a:xfrm>
+            <a:off x="4394200" y="5753100"/>
+            <a:ext cx="50800" cy="0"/>
+          </a:xfrm>
+          <a:prstGeom prst="straightConnector1">
+            <a:avLst/>
+          </a:prstGeom>
+          <a:ln w="6350">
+            <a:solidFill>
+              <a:srgbClr val="6D28D9"/>
+            </a:solidFill>
+          </a:ln>
+        </p:spPr>
+        <p:style>
+          <a:lnRef idx="2">
+            <a:schemeClr val="accent1"/>
+          </a:lnRef>
+          <a:fillRef idx="0">
+            <a:schemeClr val="accent1"/>
+          </a:fillRef>
+          <a:effectRef idx="1">
+            <a:schemeClr val="accent1"/>
+          </a:effectRef>
+          <a:fontRef idx="minor">
+            <a:schemeClr val="tx1"/>
+          </a:fontRef>
+        </p:style>
+      </p:cxnSp>
+      <p:sp>
+        <p:nvSpPr>
+          <p:cNvPr id="155" name="label Branch child 2">
+            <a:extLst>
+              <a:ext uri="{FF2B5EF4-FFF2-40B4-BE49-F238E27FC236}">
+                <a16:creationId xmlns:a16="http://schemas.microsoft.com/office/drawing/2014/main" id="{42FAE53B-DCED-934C-EFFB-62896D8D5F40}"/>
+              </a:ext>
+            </a:extLst>
+          </p:cNvPr>
+          <p:cNvSpPr txBox="1"/>
+          <p:nvPr/>
+        </p:nvSpPr>
+        <p:spPr>
+          <a:xfrm>
+            <a:off x="1064865" y="5683850"/>
+            <a:ext cx="835165" cy="138499"/>
+          </a:xfrm>
+          <a:prstGeom prst="rect">
+            <a:avLst/>
+          </a:prstGeom>
+          <a:noFill/>
+        </p:spPr>
+        <p:txBody>
+          <a:bodyPr vert="horz" wrap="none" lIns="0" tIns="0" rIns="0" bIns="0" rtlCol="0">
+            <a:spAutoFit/>
+          </a:bodyPr>
+          <a:lstStyle/>
+          <a:p>
+            <a:r>
+              <a:rPr lang="de-CH" sz="900" i="1" dirty="0" err="1">
+                <a:solidFill>
+                  <a:srgbClr val="3B1E7A"/>
+                </a:solidFill>
+                <a:latin typeface="Segoe UI" panose="020B0502040204020203" pitchFamily="34" charset="0"/>
+              </a:rPr>
+              <a:t>header</a:t>
+            </a:r>
+            <a:r>
+              <a:rPr lang="de-CH" sz="900" i="1" dirty="0">
+                <a:solidFill>
+                  <a:srgbClr val="3B1E7A"/>
+                </a:solidFill>
+                <a:latin typeface="Segoe UI" panose="020B0502040204020203" pitchFamily="34" charset="0"/>
+              </a:rPr>
+              <a:t> </a:t>
+            </a:r>
+            <a:r>
+              <a:rPr lang="de-CH" sz="900" i="1" dirty="0" err="1">
+                <a:solidFill>
+                  <a:srgbClr val="3B1E7A"/>
+                </a:solidFill>
+                <a:latin typeface="Segoe UI" panose="020B0502040204020203" pitchFamily="34" charset="0"/>
+              </a:rPr>
+              <a:t>tree</a:t>
+            </a:r>
+            <a:r>
+              <a:rPr lang="de-CH" sz="900" i="1" dirty="0">
+                <a:solidFill>
+                  <a:srgbClr val="3B1E7A"/>
+                </a:solidFill>
+                <a:latin typeface="Segoe UI" panose="020B0502040204020203" pitchFamily="34" charset="0"/>
+              </a:rPr>
+              <a:t> </a:t>
+            </a:r>
+            <a:r>
+              <a:rPr lang="de-CH" sz="900" i="1" dirty="0" err="1">
+                <a:solidFill>
+                  <a:srgbClr val="3B1E7A"/>
+                </a:solidFill>
+                <a:latin typeface="Segoe UI" panose="020B0502040204020203" pitchFamily="34" charset="0"/>
+              </a:rPr>
+              <a:t>child</a:t>
+            </a:r>
+            <a:endParaRPr lang="de-CH" sz="900" i="1" dirty="0">
+              <a:solidFill>
+                <a:srgbClr val="3B1E7A"/>
+              </a:solidFill>
+              <a:latin typeface="Segoe UI" panose="020B0502040204020203" pitchFamily="34" charset="0"/>
+            </a:endParaRPr>
+          </a:p>
+        </p:txBody>
+      </p:sp>
+      <p:cxnSp>
+        <p:nvCxnSpPr>
+          <p:cNvPr id="158" name="Branch.header chain link 4">
+            <a:extLst>
+              <a:ext uri="{FF2B5EF4-FFF2-40B4-BE49-F238E27FC236}">
+                <a16:creationId xmlns:a16="http://schemas.microsoft.com/office/drawing/2014/main" id="{92BCC3D5-4ECA-D80E-C794-8513069B0D6C}"/>
+              </a:ext>
+            </a:extLst>
+          </p:cNvPr>
+          <p:cNvCxnSpPr>
+            <a:cxnSpLocks/>
+            <a:stCxn id="115" idx="3"/>
+            <a:endCxn id="103" idx="1"/>
+          </p:cNvCxnSpPr>
+          <p:nvPr/>
+        </p:nvCxnSpPr>
+        <p:spPr>
+          <a:xfrm>
+            <a:off x="3911600" y="5429250"/>
+            <a:ext cx="101600" cy="0"/>
+          </a:xfrm>
+          <a:prstGeom prst="straightConnector1">
+            <a:avLst/>
+          </a:prstGeom>
+          <a:ln w="9525">
+            <a:solidFill>
+              <a:srgbClr val="6D28D9"/>
+            </a:solidFill>
+          </a:ln>
+        </p:spPr>
+        <p:style>
+          <a:lnRef idx="2">
+            <a:schemeClr val="accent1"/>
+          </a:lnRef>
+          <a:fillRef idx="0">
+            <a:schemeClr val="accent1"/>
+          </a:fillRef>
+          <a:effectRef idx="1">
+            <a:schemeClr val="accent1"/>
+          </a:effectRef>
+          <a:fontRef idx="minor">
+            <a:schemeClr val="tx1"/>
+          </a:fontRef>
+        </p:style>
+      </p:cxnSp>
+      <p:cxnSp>
+        <p:nvCxnSpPr>
+          <p:cNvPr id="161" name="data HeadersMessage -&gt; HeaderTip">
+            <a:extLst>
+              <a:ext uri="{FF2B5EF4-FFF2-40B4-BE49-F238E27FC236}">
+                <a16:creationId xmlns:a16="http://schemas.microsoft.com/office/drawing/2014/main" id="{A4C0C2FD-A67C-F747-0707-3ED047778020}"/>
+              </a:ext>
+            </a:extLst>
+          </p:cNvPr>
+          <p:cNvCxnSpPr>
+            <a:cxnSpLocks/>
+            <a:endCxn id="103" idx="0"/>
+          </p:cNvCxnSpPr>
+          <p:nvPr/>
+        </p:nvCxnSpPr>
+        <p:spPr>
+          <a:xfrm>
+            <a:off x="4267200" y="3759200"/>
+            <a:ext cx="0" cy="1593850"/>
+          </a:xfrm>
+          <a:prstGeom prst="straightConnector1">
+            <a:avLst/>
+          </a:prstGeom>
+          <a:ln w="19050">
+            <a:solidFill>
+              <a:srgbClr val="000000"/>
+            </a:solidFill>
+            <a:tailEnd type="triangle" w="med" len="med"/>
+          </a:ln>
+        </p:spPr>
+        <p:style>
+          <a:lnRef idx="2">
+            <a:schemeClr val="accent1"/>
+          </a:lnRef>
+          <a:fillRef idx="0">
+            <a:schemeClr val="accent1"/>
+          </a:fillRef>
+          <a:effectRef idx="1">
+            <a:schemeClr val="accent1"/>
+          </a:effectRef>
+          <a:fontRef idx="minor">
+            <a:schemeClr val="tx1"/>
+          </a:fontRef>
+        </p:style>
+      </p:cxnSp>
+      <p:cxnSp>
+        <p:nvCxnSpPr>
+          <p:cNvPr id="163" name="fork root -&gt; child 1">
+            <a:extLst>
+              <a:ext uri="{FF2B5EF4-FFF2-40B4-BE49-F238E27FC236}">
+                <a16:creationId xmlns:a16="http://schemas.microsoft.com/office/drawing/2014/main" id="{81CE095D-5D83-9184-217D-8A0657474FE6}"/>
+              </a:ext>
+            </a:extLst>
+          </p:cNvPr>
+          <p:cNvCxnSpPr>
+            <a:cxnSpLocks/>
+            <a:endCxn id="124" idx="0"/>
+          </p:cNvCxnSpPr>
+          <p:nvPr/>
+        </p:nvCxnSpPr>
+        <p:spPr>
+          <a:xfrm>
+            <a:off x="2133600" y="5429250"/>
+            <a:ext cx="0" cy="285750"/>
+          </a:xfrm>
+          <a:prstGeom prst="straightConnector1">
+            <a:avLst/>
+          </a:prstGeom>
+          <a:ln w="6350">
+            <a:solidFill>
+              <a:srgbClr val="6D28D9"/>
+            </a:solidFill>
+          </a:ln>
+        </p:spPr>
+        <p:style>
+          <a:lnRef idx="2">
+            <a:schemeClr val="accent1"/>
+          </a:lnRef>
+          <a:fillRef idx="0">
+            <a:schemeClr val="accent1"/>
+          </a:fillRef>
+          <a:effectRef idx="1">
+            <a:schemeClr val="accent1"/>
+          </a:effectRef>
+          <a:fontRef idx="minor">
+            <a:schemeClr val="tx1"/>
+          </a:fontRef>
+        </p:style>
+      </p:cxnSp>
+      <p:cxnSp>
+        <p:nvCxnSpPr>
+          <p:cNvPr id="164" name="fork root -&gt; child 2">
+            <a:extLst>
+              <a:ext uri="{FF2B5EF4-FFF2-40B4-BE49-F238E27FC236}">
+                <a16:creationId xmlns:a16="http://schemas.microsoft.com/office/drawing/2014/main" id="{7AD9CD69-EDD3-2D2B-7FB1-DF9AE3E69908}"/>
+              </a:ext>
+            </a:extLst>
+          </p:cNvPr>
+          <p:cNvCxnSpPr>
+            <a:cxnSpLocks/>
+            <a:endCxn id="149" idx="0"/>
+          </p:cNvCxnSpPr>
+          <p:nvPr/>
+        </p:nvCxnSpPr>
+        <p:spPr>
+          <a:xfrm>
+            <a:off x="3962400" y="5429250"/>
+            <a:ext cx="0" cy="285750"/>
+          </a:xfrm>
+          <a:prstGeom prst="straightConnector1">
+            <a:avLst/>
+          </a:prstGeom>
+          <a:ln w="6350">
+            <a:solidFill>
+              <a:srgbClr val="6D28D9"/>
+            </a:solidFill>
+          </a:ln>
+        </p:spPr>
+        <p:style>
+          <a:lnRef idx="2">
+            <a:schemeClr val="accent1"/>
+          </a:lnRef>
+          <a:fillRef idx="0">
+            <a:schemeClr val="accent1"/>
+          </a:fillRef>
+          <a:effectRef idx="1">
+            <a:schemeClr val="accent1"/>
+          </a:effectRef>
+          <a:fontRef idx="minor">
+            <a:schemeClr val="tx1"/>
+          </a:fontRef>
+        </p:style>
+      </p:cxnSp>
+      <p:cxnSp>
+        <p:nvCxnSpPr>
+          <p:cNvPr id="165" name="fork child 1 -&gt; grandchild 1.2">
+            <a:extLst>
+              <a:ext uri="{FF2B5EF4-FFF2-40B4-BE49-F238E27FC236}">
+                <a16:creationId xmlns:a16="http://schemas.microsoft.com/office/drawing/2014/main" id="{9EA54941-7424-CB06-718D-64972336D049}"/>
+              </a:ext>
+            </a:extLst>
+          </p:cNvPr>
+          <p:cNvCxnSpPr>
+            <a:cxnSpLocks/>
+            <a:endCxn id="132" idx="0"/>
+          </p:cNvCxnSpPr>
+          <p:nvPr/>
+        </p:nvCxnSpPr>
+        <p:spPr>
+          <a:xfrm>
+            <a:off x="2286000" y="5753100"/>
+            <a:ext cx="0" cy="177800"/>
+          </a:xfrm>
+          <a:prstGeom prst="straightConnector1">
+            <a:avLst/>
+          </a:prstGeom>
+          <a:ln w="6350">
+            <a:solidFill>
+              <a:srgbClr val="6D28D9"/>
+            </a:solidFill>
+          </a:ln>
+        </p:spPr>
+        <p:style>
+          <a:lnRef idx="2">
+            <a:schemeClr val="accent1"/>
+          </a:lnRef>
+          <a:fillRef idx="0">
+            <a:schemeClr val="accent1"/>
+          </a:fillRef>
+          <a:effectRef idx="1">
+            <a:schemeClr val="accent1"/>
+          </a:effectRef>
+          <a:fontRef idx="minor">
+            <a:schemeClr val="tx1"/>
+          </a:fontRef>
+        </p:style>
+      </p:cxnSp>
     </p:spTree>
     <p:extLst>
       <p:ext uri="{BB962C8B-B14F-4D97-AF65-F5344CB8AC3E}">

--- a/Docs/BToken-Sync-Flow.pptx
+++ b/Docs/BToken-Sync-Flow.pptx
@@ -3351,6 +3351,14 @@
 <file path=ppt/slides/slide1.xml><?xml version="1.0" encoding="utf-8"?>
 <p:sld xmlns:a="http://schemas.openxmlformats.org/drawingml/2006/main" xmlns:r="http://schemas.openxmlformats.org/officeDocument/2006/relationships" xmlns:p="http://schemas.openxmlformats.org/presentationml/2006/main">
   <p:cSld>
+    <p:bg>
+      <p:bgPr>
+        <a:solidFill>
+          <a:schemeClr val="bg2"/>
+        </a:solidFill>
+        <a:effectLst/>
+      </p:bgPr>
+    </p:bg>
     <p:spTree>
       <p:nvGrpSpPr>
         <p:cNvPr id="1" name=""/>
@@ -3380,7 +3388,7 @@
         <p:spPr>
           <a:xfrm>
             <a:off x="508000" y="4241800"/>
-            <a:ext cx="11176000" cy="2235200"/>
+            <a:ext cx="11176000" cy="2413000"/>
           </a:xfrm>
           <a:prstGeom prst="roundRect">
             <a:avLst>
@@ -3435,8 +3443,8 @@
         </p:nvSpPr>
         <p:spPr>
           <a:xfrm>
-            <a:off x="635000" y="4749800"/>
-            <a:ext cx="7747000" cy="1549400"/>
+            <a:off x="635000" y="4368800"/>
+            <a:ext cx="7747000" cy="2133600"/>
           </a:xfrm>
           <a:prstGeom prst="roundRect">
             <a:avLst>
@@ -4422,7 +4430,7 @@
         </p:nvSpPr>
         <p:spPr>
           <a:xfrm>
-            <a:off x="634999" y="4318000"/>
+            <a:off x="8970329" y="4318000"/>
             <a:ext cx="2540000" cy="307777"/>
           </a:xfrm>
           <a:prstGeom prst="rect">
@@ -4438,7 +4446,7 @@
           <a:p>
             <a:pPr algn="ctr"/>
             <a:r>
-              <a:rPr lang="en-US" sz="1100">
+              <a:rPr lang="en-US" sz="1100" dirty="0">
                 <a:solidFill>
                   <a:srgbClr val="3B1E7A"/>
                 </a:solidFill>
@@ -4450,7 +4458,7 @@
           <a:p>
             <a:pPr algn="ctr"/>
             <a:r>
-              <a:rPr lang="en-US" sz="900" i="1">
+              <a:rPr lang="en-US" sz="900" i="1" dirty="0">
                 <a:solidFill>
                   <a:srgbClr val="64748B"/>
                 </a:solidFill>
@@ -4458,12 +4466,6 @@
               </a:rPr>
               <a:t>guarded access to the chain</a:t>
             </a:r>
-            <a:endParaRPr lang="en-US" sz="900" i="1" dirty="0">
-              <a:solidFill>
-                <a:srgbClr val="64748B"/>
-              </a:solidFill>
-              <a:latin typeface="Segoe UI" panose="020B0502040204020203" pitchFamily="34" charset="0"/>
-            </a:endParaRPr>
           </a:p>
         </p:txBody>
       </p:sp>
@@ -4481,7 +4483,7 @@
         </p:nvSpPr>
         <p:spPr>
           <a:xfrm>
-            <a:off x="1656642" y="4800600"/>
+            <a:off x="1656642" y="4419600"/>
             <a:ext cx="801501" cy="292388"/>
           </a:xfrm>
           <a:prstGeom prst="rect">
@@ -5850,7 +5852,7 @@
         </p:nvSpPr>
         <p:spPr>
           <a:xfrm>
-            <a:off x="6413500" y="5302250"/>
+            <a:off x="6413500" y="5480050"/>
             <a:ext cx="1397000" cy="254000"/>
           </a:xfrm>
           <a:prstGeom prst="rect">
@@ -6041,7 +6043,7 @@
         <p:spPr>
           <a:xfrm>
             <a:off x="7112000" y="3759200"/>
-            <a:ext cx="0" cy="1543050"/>
+            <a:ext cx="0" cy="1720850"/>
           </a:xfrm>
           <a:prstGeom prst="straightConnector1">
             <a:avLst/>
@@ -6087,7 +6089,7 @@
         <p:spPr>
           <a:xfrm flipV="1">
             <a:off x="7810500" y="4889500"/>
-            <a:ext cx="1562100" cy="539750"/>
+            <a:ext cx="1562100" cy="717550"/>
           </a:xfrm>
           <a:prstGeom prst="bentConnector3">
             <a:avLst>
@@ -6135,7 +6137,7 @@
         <p:spPr>
           <a:xfrm flipV="1">
             <a:off x="7810500" y="5219700"/>
-            <a:ext cx="1562100" cy="209550"/>
+            <a:ext cx="1562100" cy="387350"/>
           </a:xfrm>
           <a:prstGeom prst="bentConnector3">
             <a:avLst>
@@ -6264,8 +6266,8 @@
         </p:nvCxnSpPr>
         <p:spPr>
           <a:xfrm>
-            <a:off x="7810500" y="5429250"/>
-            <a:ext cx="1562100" cy="209550"/>
+            <a:off x="7810500" y="5607050"/>
+            <a:ext cx="1562100" cy="31750"/>
           </a:xfrm>
           <a:prstGeom prst="bentConnector3">
             <a:avLst>
@@ -6308,7 +6310,7 @@
         </p:nvSpPr>
         <p:spPr>
           <a:xfrm>
-            <a:off x="4013200" y="5353050"/>
+            <a:off x="4622800" y="5537200"/>
             <a:ext cx="508000" cy="152400"/>
           </a:xfrm>
           <a:prstGeom prst="rect">
@@ -6372,7 +6374,7 @@
         </p:nvSpPr>
         <p:spPr>
           <a:xfrm>
-            <a:off x="1574800" y="5353050"/>
+            <a:off x="1574800" y="5537200"/>
             <a:ext cx="508000" cy="152400"/>
           </a:xfrm>
           <a:prstGeom prst="rect">
@@ -6436,7 +6438,7 @@
         </p:nvSpPr>
         <p:spPr>
           <a:xfrm>
-            <a:off x="2184400" y="5353050"/>
+            <a:off x="2184400" y="5537200"/>
             <a:ext cx="508000" cy="152400"/>
           </a:xfrm>
           <a:prstGeom prst="rect">
@@ -6468,11 +6470,16 @@
           </a:fontRef>
         </p:style>
         <p:txBody>
-          <a:bodyPr rtlCol="0" anchor="ctr"/>
+          <a:bodyPr wrap="none" lIns="0" tIns="0" rIns="0" bIns="0" rtlCol="0" anchor="ctr"/>
           <a:lstStyle/>
           <a:p>
             <a:pPr algn="ctr"/>
-            <a:endParaRPr lang="de-CH"/>
+            <a:endParaRPr lang="de-CH" sz="600" b="1">
+              <a:solidFill>
+                <a:srgbClr val="3B1E7A"/>
+              </a:solidFill>
+              <a:latin typeface="Consolas" panose="020B0609020204030204" pitchFamily="49" charset="0"/>
+            </a:endParaRPr>
           </a:p>
         </p:txBody>
       </p:sp>
@@ -6494,7 +6501,7 @@
         </p:nvCxnSpPr>
         <p:spPr>
           <a:xfrm>
-            <a:off x="2082800" y="5429250"/>
+            <a:off x="2082800" y="5613400"/>
             <a:ext cx="101600" cy="0"/>
           </a:xfrm>
           <a:prstGeom prst="straightConnector1">
@@ -6535,7 +6542,7 @@
         </p:nvSpPr>
         <p:spPr>
           <a:xfrm>
-            <a:off x="2794000" y="5353050"/>
+            <a:off x="2794000" y="5537200"/>
             <a:ext cx="508000" cy="152400"/>
           </a:xfrm>
           <a:prstGeom prst="rect">
@@ -6593,7 +6600,7 @@
         </p:nvCxnSpPr>
         <p:spPr>
           <a:xfrm>
-            <a:off x="2692400" y="5429250"/>
+            <a:off x="2692400" y="5613400"/>
             <a:ext cx="101600" cy="0"/>
           </a:xfrm>
           <a:prstGeom prst="straightConnector1">
@@ -6634,7 +6641,7 @@
         </p:nvSpPr>
         <p:spPr>
           <a:xfrm>
-            <a:off x="3403600" y="5353050"/>
+            <a:off x="3403600" y="5537200"/>
             <a:ext cx="508000" cy="152400"/>
           </a:xfrm>
           <a:prstGeom prst="rect">
@@ -6666,11 +6673,16 @@
           </a:fontRef>
         </p:style>
         <p:txBody>
-          <a:bodyPr rtlCol="0" anchor="ctr"/>
+          <a:bodyPr wrap="none" lIns="0" tIns="0" rIns="0" bIns="0" rtlCol="0" anchor="ctr"/>
           <a:lstStyle/>
           <a:p>
             <a:pPr algn="ctr"/>
-            <a:endParaRPr lang="de-CH"/>
+            <a:endParaRPr lang="de-CH" sz="600" b="1">
+              <a:solidFill>
+                <a:srgbClr val="3B1E7A"/>
+              </a:solidFill>
+              <a:latin typeface="Consolas" panose="020B0609020204030204" pitchFamily="49" charset="0"/>
+            </a:endParaRPr>
           </a:p>
         </p:txBody>
       </p:sp>
@@ -6692,7 +6704,7 @@
         </p:nvCxnSpPr>
         <p:spPr>
           <a:xfrm>
-            <a:off x="3302000" y="5429250"/>
+            <a:off x="3302000" y="5613400"/>
             <a:ext cx="101600" cy="0"/>
           </a:xfrm>
           <a:prstGeom prst="straightConnector1">
@@ -6733,7 +6745,7 @@
         </p:nvSpPr>
         <p:spPr>
           <a:xfrm>
-            <a:off x="968235" y="5638800"/>
+            <a:off x="968235" y="5816600"/>
             <a:ext cx="2003565" cy="558800"/>
           </a:xfrm>
           <a:prstGeom prst="roundRect">
@@ -6789,7 +6801,7 @@
         </p:nvSpPr>
         <p:spPr>
           <a:xfrm>
-            <a:off x="3733800" y="5638800"/>
+            <a:off x="4343400" y="5816600"/>
             <a:ext cx="2003565" cy="558800"/>
           </a:xfrm>
           <a:prstGeom prst="roundRect">
@@ -6845,7 +6857,7 @@
         </p:nvSpPr>
         <p:spPr>
           <a:xfrm>
-            <a:off x="2095500" y="5867400"/>
+            <a:off x="2095500" y="6045200"/>
             <a:ext cx="762000" cy="254000"/>
           </a:xfrm>
           <a:prstGeom prst="roundRect">
@@ -6901,7 +6913,7 @@
         </p:nvSpPr>
         <p:spPr>
           <a:xfrm>
-            <a:off x="2006600" y="5715000"/>
+            <a:off x="2006600" y="5892800"/>
             <a:ext cx="254000" cy="76200"/>
           </a:xfrm>
           <a:prstGeom prst="rect">
@@ -6955,7 +6967,7 @@
         </p:nvSpPr>
         <p:spPr>
           <a:xfrm>
-            <a:off x="2311400" y="5715000"/>
+            <a:off x="2311400" y="5892800"/>
             <a:ext cx="254000" cy="76200"/>
           </a:xfrm>
           <a:prstGeom prst="rect">
@@ -7009,7 +7021,7 @@
         </p:nvSpPr>
         <p:spPr>
           <a:xfrm>
-            <a:off x="2616200" y="5715000"/>
+            <a:off x="2616200" y="5892800"/>
             <a:ext cx="254000" cy="76200"/>
           </a:xfrm>
           <a:prstGeom prst="rect">
@@ -7067,7 +7079,7 @@
         </p:nvCxnSpPr>
         <p:spPr>
           <a:xfrm>
-            <a:off x="2260600" y="5753100"/>
+            <a:off x="2260600" y="5930900"/>
             <a:ext cx="50800" cy="0"/>
           </a:xfrm>
           <a:prstGeom prst="straightConnector1">
@@ -7112,7 +7124,7 @@
         </p:nvCxnSpPr>
         <p:spPr>
           <a:xfrm>
-            <a:off x="2565400" y="5753100"/>
+            <a:off x="2565400" y="5930900"/>
             <a:ext cx="50800" cy="0"/>
           </a:xfrm>
           <a:prstGeom prst="straightConnector1">
@@ -7153,7 +7165,7 @@
         </p:nvSpPr>
         <p:spPr>
           <a:xfrm>
-            <a:off x="2201333" y="5930900"/>
+            <a:off x="2201333" y="6108700"/>
             <a:ext cx="169333" cy="50800"/>
           </a:xfrm>
           <a:prstGeom prst="rect">
@@ -7207,7 +7219,7 @@
         </p:nvSpPr>
         <p:spPr>
           <a:xfrm>
-            <a:off x="2404533" y="5930900"/>
+            <a:off x="2404533" y="6108700"/>
             <a:ext cx="169333" cy="50800"/>
           </a:xfrm>
           <a:prstGeom prst="rect">
@@ -7265,7 +7277,7 @@
         </p:nvCxnSpPr>
         <p:spPr>
           <a:xfrm>
-            <a:off x="2370666" y="5956300"/>
+            <a:off x="2370666" y="6134100"/>
             <a:ext cx="33867" cy="0"/>
           </a:xfrm>
           <a:prstGeom prst="straightConnector1">
@@ -7306,7 +7318,7 @@
         </p:nvSpPr>
         <p:spPr>
           <a:xfrm>
-            <a:off x="3835400" y="5715000"/>
+            <a:off x="4445000" y="5892800"/>
             <a:ext cx="254000" cy="76200"/>
           </a:xfrm>
           <a:prstGeom prst="rect">
@@ -7360,7 +7372,7 @@
         </p:nvSpPr>
         <p:spPr>
           <a:xfrm>
-            <a:off x="4140200" y="5715000"/>
+            <a:off x="4749800" y="5892800"/>
             <a:ext cx="254000" cy="76200"/>
           </a:xfrm>
           <a:prstGeom prst="rect">
@@ -7414,7 +7426,7 @@
         </p:nvSpPr>
         <p:spPr>
           <a:xfrm>
-            <a:off x="4445000" y="5715000"/>
+            <a:off x="5054600" y="5892800"/>
             <a:ext cx="254000" cy="76200"/>
           </a:xfrm>
           <a:prstGeom prst="rect">
@@ -7472,7 +7484,7 @@
         </p:nvCxnSpPr>
         <p:spPr>
           <a:xfrm>
-            <a:off x="4089400" y="5753100"/>
+            <a:off x="4699000" y="5930900"/>
             <a:ext cx="50800" cy="0"/>
           </a:xfrm>
           <a:prstGeom prst="straightConnector1">
@@ -7517,7 +7529,7 @@
         </p:nvCxnSpPr>
         <p:spPr>
           <a:xfrm>
-            <a:off x="4394200" y="5753100"/>
+            <a:off x="5003800" y="5930900"/>
             <a:ext cx="50800" cy="0"/>
           </a:xfrm>
           <a:prstGeom prst="straightConnector1">
@@ -7558,7 +7570,7 @@
         </p:nvSpPr>
         <p:spPr>
           <a:xfrm>
-            <a:off x="1064865" y="5683850"/>
+            <a:off x="1064865" y="5861650"/>
             <a:ext cx="835165" cy="138499"/>
           </a:xfrm>
           <a:prstGeom prst="rect">
@@ -7638,13 +7650,13 @@
           <p:cNvCxnSpPr>
             <a:cxnSpLocks/>
             <a:stCxn id="115" idx="3"/>
-            <a:endCxn id="103" idx="1"/>
+            <a:endCxn id="166" idx="1"/>
           </p:cNvCxnSpPr>
           <p:nvPr/>
         </p:nvCxnSpPr>
         <p:spPr>
           <a:xfrm>
-            <a:off x="3911600" y="5429250"/>
+            <a:off x="3911600" y="5613400"/>
             <a:ext cx="101600" cy="0"/>
           </a:xfrm>
           <a:prstGeom prst="straightConnector1">
@@ -7682,14 +7694,13 @@
           </p:cNvPr>
           <p:cNvCxnSpPr>
             <a:cxnSpLocks/>
-            <a:endCxn id="103" idx="0"/>
           </p:cNvCxnSpPr>
           <p:nvPr/>
         </p:nvCxnSpPr>
         <p:spPr>
           <a:xfrm>
-            <a:off x="4267200" y="3759200"/>
-            <a:ext cx="0" cy="1593850"/>
+            <a:off x="4876800" y="3759200"/>
+            <a:ext cx="0" cy="1778000"/>
           </a:xfrm>
           <a:prstGeom prst="straightConnector1">
             <a:avLst/>
@@ -7727,14 +7738,13 @@
           </p:cNvPr>
           <p:cNvCxnSpPr>
             <a:cxnSpLocks/>
-            <a:endCxn id="124" idx="0"/>
           </p:cNvCxnSpPr>
           <p:nvPr/>
         </p:nvCxnSpPr>
         <p:spPr>
           <a:xfrm>
-            <a:off x="2133600" y="5429250"/>
-            <a:ext cx="0" cy="285750"/>
+            <a:off x="2133600" y="5613400"/>
+            <a:ext cx="0" cy="279400"/>
           </a:xfrm>
           <a:prstGeom prst="straightConnector1">
             <a:avLst/>
@@ -7771,14 +7781,13 @@
           </p:cNvPr>
           <p:cNvCxnSpPr>
             <a:cxnSpLocks/>
-            <a:endCxn id="149" idx="0"/>
           </p:cNvCxnSpPr>
           <p:nvPr/>
         </p:nvCxnSpPr>
         <p:spPr>
           <a:xfrm>
-            <a:off x="3962400" y="5429250"/>
-            <a:ext cx="0" cy="285750"/>
+            <a:off x="4572000" y="5613400"/>
+            <a:ext cx="0" cy="279400"/>
           </a:xfrm>
           <a:prstGeom prst="straightConnector1">
             <a:avLst/>
@@ -7815,13 +7824,12 @@
           </p:cNvPr>
           <p:cNvCxnSpPr>
             <a:cxnSpLocks/>
-            <a:endCxn id="132" idx="0"/>
           </p:cNvCxnSpPr>
           <p:nvPr/>
         </p:nvCxnSpPr>
         <p:spPr>
           <a:xfrm>
-            <a:off x="2286000" y="5753100"/>
+            <a:off x="2286000" y="5930900"/>
             <a:ext cx="0" cy="177800"/>
           </a:xfrm>
           <a:prstGeom prst="straightConnector1">
@@ -7831,6 +7839,308 @@
             <a:solidFill>
               <a:srgbClr val="6D28D9"/>
             </a:solidFill>
+          </a:ln>
+        </p:spPr>
+        <p:style>
+          <a:lnRef idx="2">
+            <a:schemeClr val="accent1"/>
+          </a:lnRef>
+          <a:fillRef idx="0">
+            <a:schemeClr val="accent1"/>
+          </a:fillRef>
+          <a:effectRef idx="1">
+            <a:schemeClr val="accent1"/>
+          </a:effectRef>
+          <a:fontRef idx="minor">
+            <a:schemeClr val="tx1"/>
+          </a:fontRef>
+        </p:style>
+      </p:cxnSp>
+      <p:sp>
+        <p:nvSpPr>
+          <p:cNvPr id="166" name="Branch.header chain 5">
+            <a:extLst>
+              <a:ext uri="{FF2B5EF4-FFF2-40B4-BE49-F238E27FC236}">
+                <a16:creationId xmlns:a16="http://schemas.microsoft.com/office/drawing/2014/main" id="{7332F24B-144B-6C65-A9EB-FBAAC5499DCB}"/>
+              </a:ext>
+            </a:extLst>
+          </p:cNvPr>
+          <p:cNvSpPr/>
+          <p:nvPr/>
+        </p:nvSpPr>
+        <p:spPr>
+          <a:xfrm>
+            <a:off x="4013200" y="5537200"/>
+            <a:ext cx="508000" cy="152400"/>
+          </a:xfrm>
+          <a:prstGeom prst="rect">
+            <a:avLst/>
+          </a:prstGeom>
+          <a:solidFill>
+            <a:srgbClr val="F5F2FD"/>
+          </a:solidFill>
+          <a:ln w="9525">
+            <a:solidFill>
+              <a:srgbClr val="6D28D9"/>
+            </a:solidFill>
+          </a:ln>
+        </p:spPr>
+        <p:style>
+          <a:lnRef idx="2">
+            <a:schemeClr val="accent1">
+              <a:shade val="15000"/>
+            </a:schemeClr>
+          </a:lnRef>
+          <a:fillRef idx="1">
+            <a:schemeClr val="accent1"/>
+          </a:fillRef>
+          <a:effectRef idx="0">
+            <a:schemeClr val="accent1"/>
+          </a:effectRef>
+          <a:fontRef idx="minor">
+            <a:schemeClr val="lt1"/>
+          </a:fontRef>
+        </p:style>
+        <p:txBody>
+          <a:bodyPr rtlCol="0" anchor="ctr"/>
+          <a:lstStyle/>
+          <a:p>
+            <a:pPr algn="ctr"/>
+            <a:endParaRPr lang="de-CH"/>
+          </a:p>
+        </p:txBody>
+      </p:sp>
+      <p:cxnSp>
+        <p:nvCxnSpPr>
+          <p:cNvPr id="167" name="Branch.header chain link 5">
+            <a:extLst>
+              <a:ext uri="{FF2B5EF4-FFF2-40B4-BE49-F238E27FC236}">
+                <a16:creationId xmlns:a16="http://schemas.microsoft.com/office/drawing/2014/main" id="{CC67833F-EF6C-ECCC-08C0-62B9910FDEE5}"/>
+              </a:ext>
+            </a:extLst>
+          </p:cNvPr>
+          <p:cNvCxnSpPr>
+            <a:cxnSpLocks/>
+            <a:stCxn id="166" idx="3"/>
+            <a:endCxn id="103" idx="1"/>
+          </p:cNvCxnSpPr>
+          <p:nvPr/>
+        </p:nvCxnSpPr>
+        <p:spPr>
+          <a:xfrm>
+            <a:off x="4521200" y="5613400"/>
+            <a:ext cx="101600" cy="0"/>
+          </a:xfrm>
+          <a:prstGeom prst="straightConnector1">
+            <a:avLst/>
+          </a:prstGeom>
+          <a:ln w="9525">
+            <a:solidFill>
+              <a:srgbClr val="6D28D9"/>
+            </a:solidFill>
+          </a:ln>
+        </p:spPr>
+        <p:style>
+          <a:lnRef idx="2">
+            <a:schemeClr val="accent1"/>
+          </a:lnRef>
+          <a:fillRef idx="0">
+            <a:schemeClr val="accent1"/>
+          </a:fillRef>
+          <a:effectRef idx="1">
+            <a:schemeClr val="accent1"/>
+          </a:effectRef>
+          <a:fontRef idx="minor">
+            <a:schemeClr val="tx1"/>
+          </a:fontRef>
+        </p:style>
+      </p:cxnSp>
+      <p:sp>
+        <p:nvSpPr>
+          <p:cNvPr id="170" name="Branch.AdvanceTipBlockchain">
+            <a:extLst>
+              <a:ext uri="{FF2B5EF4-FFF2-40B4-BE49-F238E27FC236}">
+                <a16:creationId xmlns:a16="http://schemas.microsoft.com/office/drawing/2014/main" id="{8431A813-A47F-8A64-4C9C-875AC26C2842}"/>
+              </a:ext>
+            </a:extLst>
+          </p:cNvPr>
+          <p:cNvSpPr/>
+          <p:nvPr/>
+        </p:nvSpPr>
+        <p:spPr>
+          <a:xfrm>
+            <a:off x="1879600" y="4775200"/>
+            <a:ext cx="1117600" cy="558800"/>
+          </a:xfrm>
+          <a:prstGeom prst="roundRect">
+            <a:avLst>
+              <a:gd name="adj" fmla="val 12000"/>
+            </a:avLst>
+          </a:prstGeom>
+          <a:solidFill>
+            <a:srgbClr val="FFFFFF"/>
+          </a:solidFill>
+          <a:ln w="9525">
+            <a:solidFill>
+              <a:srgbClr val="6D28D9"/>
+            </a:solidFill>
+          </a:ln>
+        </p:spPr>
+        <p:style>
+          <a:lnRef idx="2">
+            <a:schemeClr val="accent1">
+              <a:shade val="15000"/>
+            </a:schemeClr>
+          </a:lnRef>
+          <a:fillRef idx="1">
+            <a:schemeClr val="accent1"/>
+          </a:fillRef>
+          <a:effectRef idx="0">
+            <a:schemeClr val="accent1"/>
+          </a:effectRef>
+          <a:fontRef idx="minor">
+            <a:schemeClr val="lt1"/>
+          </a:fontRef>
+        </p:style>
+        <p:txBody>
+          <a:bodyPr wrap="none" lIns="25400" tIns="25400" rIns="25400" bIns="0" rtlCol="0" anchor="t"/>
+          <a:lstStyle/>
+          <a:p>
+            <a:pPr algn="ctr"/>
+            <a:r>
+              <a:rPr lang="en-US" sz="700" b="1">
+                <a:solidFill>
+                  <a:srgbClr val="3B1E7A"/>
+                </a:solidFill>
+                <a:latin typeface="Consolas" panose="020B0609020204030204" pitchFamily="49" charset="0"/>
+              </a:rPr>
+              <a:t>AdvanceTipBlockchain</a:t>
+            </a:r>
+          </a:p>
+          <a:p>
+            <a:pPr algn="ctr"/>
+            <a:r>
+              <a:rPr lang="en-US" sz="650">
+                <a:solidFill>
+                  <a:srgbClr val="64748B"/>
+                </a:solidFill>
+                <a:latin typeface="Consolas" panose="020B0609020204030204" pitchFamily="49" charset="0"/>
+              </a:rPr>
+              <a:t>follows gapless Blocks</a:t>
+            </a:r>
+          </a:p>
+          <a:p>
+            <a:pPr algn="ctr"/>
+            <a:r>
+              <a:rPr lang="en-US" sz="650">
+                <a:solidFill>
+                  <a:srgbClr val="64748B"/>
+                </a:solidFill>
+                <a:latin typeface="Consolas" panose="020B0609020204030204" pitchFamily="49" charset="0"/>
+              </a:rPr>
+              <a:t>stronger tip → reorg</a:t>
+            </a:r>
+            <a:endParaRPr lang="de-CH" sz="650">
+              <a:solidFill>
+                <a:srgbClr val="64748B"/>
+              </a:solidFill>
+              <a:latin typeface="Consolas" panose="020B0609020204030204" pitchFamily="49" charset="0"/>
+            </a:endParaRPr>
+          </a:p>
+        </p:txBody>
+      </p:sp>
+      <p:sp>
+        <p:nvSpPr>
+          <p:cNvPr id="171" name="Branch.HeaderTipBlockchain">
+            <a:extLst>
+              <a:ext uri="{FF2B5EF4-FFF2-40B4-BE49-F238E27FC236}">
+                <a16:creationId xmlns:a16="http://schemas.microsoft.com/office/drawing/2014/main" id="{A5872FF5-D932-5FB2-4272-403788DC913D}"/>
+              </a:ext>
+            </a:extLst>
+          </p:cNvPr>
+          <p:cNvSpPr/>
+          <p:nvPr/>
+        </p:nvSpPr>
+        <p:spPr>
+          <a:xfrm>
+            <a:off x="1993900" y="5156200"/>
+            <a:ext cx="889000" cy="127000"/>
+          </a:xfrm>
+          <a:prstGeom prst="rect">
+            <a:avLst/>
+          </a:prstGeom>
+          <a:solidFill>
+            <a:srgbClr val="F5F2FD"/>
+          </a:solidFill>
+          <a:ln w="9525">
+            <a:solidFill>
+              <a:srgbClr val="6D28D9"/>
+            </a:solidFill>
+          </a:ln>
+        </p:spPr>
+        <p:style>
+          <a:lnRef idx="2">
+            <a:schemeClr val="accent1">
+              <a:shade val="15000"/>
+            </a:schemeClr>
+          </a:lnRef>
+          <a:fillRef idx="1">
+            <a:schemeClr val="accent1"/>
+          </a:fillRef>
+          <a:effectRef idx="0">
+            <a:schemeClr val="accent1"/>
+          </a:effectRef>
+          <a:fontRef idx="minor">
+            <a:schemeClr val="lt1"/>
+          </a:fontRef>
+        </p:style>
+        <p:txBody>
+          <a:bodyPr wrap="none" lIns="0" tIns="0" rIns="0" bIns="0" rtlCol="0" anchor="ctr"/>
+          <a:lstStyle/>
+          <a:p>
+            <a:pPr algn="ctr"/>
+            <a:r>
+              <a:rPr lang="de-CH" sz="600" b="1">
+                <a:solidFill>
+                  <a:srgbClr val="3B1E7A"/>
+                </a:solidFill>
+                <a:latin typeface="Consolas" panose="020B0609020204030204" pitchFamily="49" charset="0"/>
+              </a:rPr>
+              <a:t>HeaderTipBlockchain</a:t>
+            </a:r>
+          </a:p>
+        </p:txBody>
+      </p:sp>
+      <p:cxnSp>
+        <p:nvCxnSpPr>
+          <p:cNvPr id="172" name="ref HeaderTipBlockchain -&gt; header">
+            <a:extLst>
+              <a:ext uri="{FF2B5EF4-FFF2-40B4-BE49-F238E27FC236}">
+                <a16:creationId xmlns:a16="http://schemas.microsoft.com/office/drawing/2014/main" id="{5B2F41E5-7A22-54CA-E5D0-A276D292D330}"/>
+              </a:ext>
+            </a:extLst>
+          </p:cNvPr>
+          <p:cNvCxnSpPr>
+            <a:cxnSpLocks/>
+            <a:stCxn id="171" idx="2"/>
+            <a:endCxn id="111" idx="0"/>
+          </p:cNvCxnSpPr>
+          <p:nvPr/>
+        </p:nvCxnSpPr>
+        <p:spPr>
+          <a:xfrm>
+            <a:off x="2438400" y="5283200"/>
+            <a:ext cx="0" cy="254000"/>
+          </a:xfrm>
+          <a:prstGeom prst="straightConnector1">
+            <a:avLst/>
+          </a:prstGeom>
+          <a:ln w="9525">
+            <a:solidFill>
+              <a:srgbClr val="6D28D9"/>
+            </a:solidFill>
+            <a:headEnd type="oval" w="sm" len="sm"/>
+            <a:tailEnd type="triangle" w="sm" len="sm"/>
           </a:ln>
         </p:spPr>
         <p:style>
@@ -7864,6 +8174,14 @@
 <file path=ppt/slides/slide2.xml><?xml version="1.0" encoding="utf-8"?>
 <p:sld xmlns:a="http://schemas.openxmlformats.org/drawingml/2006/main" xmlns:r="http://schemas.openxmlformats.org/officeDocument/2006/relationships" xmlns:p="http://schemas.openxmlformats.org/presentationml/2006/main">
   <p:cSld>
+    <p:bg>
+      <p:bgPr>
+        <a:solidFill>
+          <a:schemeClr val="bg2"/>
+        </a:solidFill>
+        <a:effectLst/>
+      </p:bgPr>
+    </p:bg>
     <p:spTree>
       <p:nvGrpSpPr>
         <p:cNvPr id="1" name=""/>

--- a/Docs/BToken-Sync-Flow.pptx
+++ b/Docs/BToken-Sync-Flow.pptx
@@ -5852,7 +5852,7 @@
         </p:nvSpPr>
         <p:spPr>
           <a:xfrm>
-            <a:off x="6413500" y="5480050"/>
+            <a:off x="6438899" y="5321300"/>
             <a:ext cx="1397000" cy="254000"/>
           </a:xfrm>
           <a:prstGeom prst="rect">
@@ -6043,7 +6043,7 @@
         <p:spPr>
           <a:xfrm>
             <a:off x="7112000" y="3759200"/>
-            <a:ext cx="0" cy="1720850"/>
+            <a:ext cx="25399" cy="1562100"/>
           </a:xfrm>
           <a:prstGeom prst="straightConnector1">
             <a:avLst/>
@@ -6088,8 +6088,8 @@
         </p:nvCxnSpPr>
         <p:spPr>
           <a:xfrm flipV="1">
-            <a:off x="7810500" y="4889500"/>
-            <a:ext cx="1562100" cy="717550"/>
+            <a:off x="7835899" y="4889500"/>
+            <a:ext cx="1536701" cy="558800"/>
           </a:xfrm>
           <a:prstGeom prst="bentConnector3">
             <a:avLst>
@@ -6136,8 +6136,8 @@
         </p:nvCxnSpPr>
         <p:spPr>
           <a:xfrm flipV="1">
-            <a:off x="7810500" y="5219700"/>
-            <a:ext cx="1562100" cy="387350"/>
+            <a:off x="7835899" y="5219700"/>
+            <a:ext cx="1536701" cy="228600"/>
           </a:xfrm>
           <a:prstGeom prst="bentConnector3">
             <a:avLst>
@@ -6266,8 +6266,8 @@
         </p:nvCxnSpPr>
         <p:spPr>
           <a:xfrm>
-            <a:off x="7810500" y="5607050"/>
-            <a:ext cx="1562100" cy="31750"/>
+            <a:off x="7835899" y="5448300"/>
+            <a:ext cx="1536701" cy="190500"/>
           </a:xfrm>
           <a:prstGeom prst="bentConnector3">
             <a:avLst>
@@ -6310,8 +6310,8 @@
         </p:nvSpPr>
         <p:spPr>
           <a:xfrm>
-            <a:off x="4622800" y="5537200"/>
-            <a:ext cx="508000" cy="152400"/>
+            <a:off x="4597400" y="5348025"/>
+            <a:ext cx="558800" cy="203200"/>
           </a:xfrm>
           <a:prstGeom prst="rect">
             <a:avLst/>
@@ -6349,7 +6349,7 @@
           <a:p>
             <a:pPr algn="ctr"/>
             <a:r>
-              <a:rPr lang="de-CH" sz="600" b="1">
+              <a:rPr lang="de-CH" sz="700" b="1" dirty="0" err="1">
                 <a:solidFill>
                   <a:srgbClr val="3B1E7A"/>
                 </a:solidFill>
@@ -6357,6 +6357,12 @@
               </a:rPr>
               <a:t>HeaderTip</a:t>
             </a:r>
+            <a:endParaRPr lang="de-CH" sz="700" b="1" dirty="0">
+              <a:solidFill>
+                <a:srgbClr val="3B1E7A"/>
+              </a:solidFill>
+              <a:latin typeface="Consolas" panose="020B0609020204030204" pitchFamily="49" charset="0"/>
+            </a:endParaRPr>
           </a:p>
         </p:txBody>
       </p:sp>
@@ -6374,8 +6380,8 @@
         </p:nvSpPr>
         <p:spPr>
           <a:xfrm>
-            <a:off x="1574800" y="5537200"/>
-            <a:ext cx="508000" cy="152400"/>
+            <a:off x="787400" y="5348025"/>
+            <a:ext cx="558800" cy="203200"/>
           </a:xfrm>
           <a:prstGeom prst="rect">
             <a:avLst/>
@@ -6413,7 +6419,7 @@
           <a:p>
             <a:pPr algn="ctr"/>
             <a:r>
-              <a:rPr lang="de-CH" sz="600" b="1">
+              <a:rPr lang="de-CH" sz="700" b="1">
                 <a:solidFill>
                   <a:srgbClr val="3B1E7A"/>
                 </a:solidFill>
@@ -6438,8 +6444,8 @@
         </p:nvSpPr>
         <p:spPr>
           <a:xfrm>
-            <a:off x="2184400" y="5537200"/>
-            <a:ext cx="508000" cy="152400"/>
+            <a:off x="1422400" y="5348025"/>
+            <a:ext cx="558800" cy="203200"/>
           </a:xfrm>
           <a:prstGeom prst="rect">
             <a:avLst/>
@@ -6470,16 +6476,21 @@
           </a:fontRef>
         </p:style>
         <p:txBody>
-          <a:bodyPr wrap="none" lIns="0" tIns="0" rIns="0" bIns="0" rtlCol="0" anchor="ctr"/>
+          <a:bodyPr wrap="none" lIns="0" tIns="0" rIns="0" bIns="0" rtlCol="0" anchor="ctr">
+            <a:noAutofit/>
+          </a:bodyPr>
           <a:lstStyle/>
           <a:p>
             <a:pPr algn="ctr"/>
-            <a:endParaRPr lang="de-CH" sz="600" b="1">
-              <a:solidFill>
-                <a:srgbClr val="3B1E7A"/>
-              </a:solidFill>
-              <a:latin typeface="Consolas" panose="020B0609020204030204" pitchFamily="49" charset="0"/>
-            </a:endParaRPr>
+            <a:r>
+              <a:rPr lang="de-CH" sz="700" b="1">
+                <a:solidFill>
+                  <a:srgbClr val="3B1E7A"/>
+                </a:solidFill>
+                <a:latin typeface="Consolas" panose="020B0609020204030204" pitchFamily="49" charset="0"/>
+              </a:rPr>
+              <a:t>1</a:t>
+            </a:r>
           </a:p>
         </p:txBody>
       </p:sp>
@@ -6494,15 +6505,13 @@
           </p:cNvPr>
           <p:cNvCxnSpPr>
             <a:cxnSpLocks/>
-            <a:stCxn id="110" idx="3"/>
-            <a:endCxn id="111" idx="1"/>
           </p:cNvCxnSpPr>
           <p:nvPr/>
         </p:nvCxnSpPr>
         <p:spPr>
           <a:xfrm>
-            <a:off x="2082800" y="5613400"/>
-            <a:ext cx="101600" cy="0"/>
+            <a:off x="1346200" y="5449625"/>
+            <a:ext cx="76200" cy="0"/>
           </a:xfrm>
           <a:prstGeom prst="straightConnector1">
             <a:avLst/>
@@ -6542,8 +6551,8 @@
         </p:nvSpPr>
         <p:spPr>
           <a:xfrm>
-            <a:off x="2794000" y="5537200"/>
-            <a:ext cx="508000" cy="152400"/>
+            <a:off x="2057400" y="5348025"/>
+            <a:ext cx="558800" cy="203200"/>
           </a:xfrm>
           <a:prstGeom prst="rect">
             <a:avLst/>
@@ -6574,11 +6583,21 @@
           </a:fontRef>
         </p:style>
         <p:txBody>
-          <a:bodyPr rtlCol="0" anchor="ctr"/>
+          <a:bodyPr wrap="none" lIns="0" tIns="0" rIns="0" bIns="0" rtlCol="0" anchor="ctr">
+            <a:noAutofit/>
+          </a:bodyPr>
           <a:lstStyle/>
           <a:p>
             <a:pPr algn="ctr"/>
-            <a:endParaRPr lang="de-CH"/>
+            <a:r>
+              <a:rPr lang="de-CH" sz="700" b="1">
+                <a:solidFill>
+                  <a:srgbClr val="3B1E7A"/>
+                </a:solidFill>
+                <a:latin typeface="Consolas" panose="020B0609020204030204" pitchFamily="49" charset="0"/>
+              </a:rPr>
+              <a:t>2</a:t>
+            </a:r>
           </a:p>
         </p:txBody>
       </p:sp>
@@ -6593,15 +6612,13 @@
           </p:cNvPr>
           <p:cNvCxnSpPr>
             <a:cxnSpLocks/>
-            <a:stCxn id="111" idx="3"/>
-            <a:endCxn id="113" idx="1"/>
           </p:cNvCxnSpPr>
           <p:nvPr/>
         </p:nvCxnSpPr>
         <p:spPr>
           <a:xfrm>
-            <a:off x="2692400" y="5613400"/>
-            <a:ext cx="101600" cy="0"/>
+            <a:off x="1981200" y="5449625"/>
+            <a:ext cx="76200" cy="0"/>
           </a:xfrm>
           <a:prstGeom prst="straightConnector1">
             <a:avLst/>
@@ -6629,7 +6646,7 @@
       </p:cxnSp>
       <p:sp>
         <p:nvSpPr>
-          <p:cNvPr id="115" name="Branch.header chain 4">
+          <p:cNvPr id="115" name="Branch.header chain 5">
             <a:extLst>
               <a:ext uri="{FF2B5EF4-FFF2-40B4-BE49-F238E27FC236}">
                 <a16:creationId xmlns:a16="http://schemas.microsoft.com/office/drawing/2014/main" id="{0E007559-1875-6436-4856-465999500C61}"/>
@@ -6641,8 +6658,8 @@
         </p:nvSpPr>
         <p:spPr>
           <a:xfrm>
-            <a:off x="3403600" y="5537200"/>
-            <a:ext cx="508000" cy="152400"/>
+            <a:off x="3327400" y="5348025"/>
+            <a:ext cx="558800" cy="203200"/>
           </a:xfrm>
           <a:prstGeom prst="rect">
             <a:avLst/>
@@ -6673,16 +6690,21 @@
           </a:fontRef>
         </p:style>
         <p:txBody>
-          <a:bodyPr wrap="none" lIns="0" tIns="0" rIns="0" bIns="0" rtlCol="0" anchor="ctr"/>
+          <a:bodyPr wrap="none" lIns="0" tIns="0" rIns="0" bIns="0" rtlCol="0" anchor="ctr">
+            <a:noAutofit/>
+          </a:bodyPr>
           <a:lstStyle/>
           <a:p>
             <a:pPr algn="ctr"/>
-            <a:endParaRPr lang="de-CH" sz="600" b="1">
-              <a:solidFill>
-                <a:srgbClr val="3B1E7A"/>
-              </a:solidFill>
-              <a:latin typeface="Consolas" panose="020B0609020204030204" pitchFamily="49" charset="0"/>
-            </a:endParaRPr>
+            <a:r>
+              <a:rPr lang="de-CH" sz="700" b="1">
+                <a:solidFill>
+                  <a:srgbClr val="3B1E7A"/>
+                </a:solidFill>
+                <a:latin typeface="Consolas" panose="020B0609020204030204" pitchFamily="49" charset="0"/>
+              </a:rPr>
+              <a:t>4</a:t>
+            </a:r>
           </a:p>
         </p:txBody>
       </p:sp>
@@ -6697,15 +6719,13 @@
           </p:cNvPr>
           <p:cNvCxnSpPr>
             <a:cxnSpLocks/>
-            <a:stCxn id="113" idx="3"/>
-            <a:endCxn id="115" idx="1"/>
           </p:cNvCxnSpPr>
           <p:nvPr/>
         </p:nvCxnSpPr>
         <p:spPr>
           <a:xfrm>
-            <a:off x="3302000" y="5613400"/>
-            <a:ext cx="101600" cy="0"/>
+            <a:off x="2616200" y="5449625"/>
+            <a:ext cx="76200" cy="0"/>
           </a:xfrm>
           <a:prstGeom prst="straightConnector1">
             <a:avLst/>
@@ -6745,8 +6765,8 @@
         </p:nvSpPr>
         <p:spPr>
           <a:xfrm>
-            <a:off x="968235" y="5816600"/>
-            <a:ext cx="2003565" cy="558800"/>
+            <a:off x="2425700" y="5678225"/>
+            <a:ext cx="1168400" cy="558800"/>
           </a:xfrm>
           <a:prstGeom prst="roundRect">
             <a:avLst>
@@ -6801,8 +6821,8 @@
         </p:nvSpPr>
         <p:spPr>
           <a:xfrm>
-            <a:off x="4343400" y="5816600"/>
-            <a:ext cx="2003565" cy="558800"/>
+            <a:off x="3695700" y="5678225"/>
+            <a:ext cx="1168400" cy="558800"/>
           </a:xfrm>
           <a:prstGeom prst="roundRect">
             <a:avLst>
@@ -6857,12 +6877,12 @@
         </p:nvSpPr>
         <p:spPr>
           <a:xfrm>
-            <a:off x="2095500" y="6045200"/>
-            <a:ext cx="762000" cy="254000"/>
+            <a:off x="2641600" y="5932225"/>
+            <a:ext cx="647700" cy="228600"/>
           </a:xfrm>
           <a:prstGeom prst="roundRect">
             <a:avLst>
-              <a:gd name="adj" fmla="val 20000"/>
+              <a:gd name="adj" fmla="val 22222"/>
             </a:avLst>
           </a:prstGeom>
           <a:solidFill>
@@ -6913,8 +6933,8 @@
         </p:nvSpPr>
         <p:spPr>
           <a:xfrm>
-            <a:off x="2006600" y="5892800"/>
-            <a:ext cx="254000" cy="76200"/>
+            <a:off x="2501900" y="5754425"/>
+            <a:ext cx="304800" cy="101600"/>
           </a:xfrm>
           <a:prstGeom prst="rect">
             <a:avLst/>
@@ -6945,11 +6965,21 @@
           </a:fontRef>
         </p:style>
         <p:txBody>
-          <a:bodyPr rtlCol="0" anchor="ctr"/>
+          <a:bodyPr wrap="none" lIns="0" tIns="0" rIns="0" bIns="0" rtlCol="0" anchor="ctr">
+            <a:noAutofit/>
+          </a:bodyPr>
           <a:lstStyle/>
           <a:p>
             <a:pPr algn="ctr"/>
-            <a:endParaRPr lang="de-CH"/>
+            <a:r>
+              <a:rPr lang="de-CH" sz="600" b="1">
+                <a:solidFill>
+                  <a:srgbClr val="3B1E7A"/>
+                </a:solidFill>
+                <a:latin typeface="Consolas" panose="020B0609020204030204" pitchFamily="49" charset="0"/>
+              </a:rPr>
+              <a:t>3</a:t>
+            </a:r>
           </a:p>
         </p:txBody>
       </p:sp>
@@ -6967,8 +6997,8 @@
         </p:nvSpPr>
         <p:spPr>
           <a:xfrm>
-            <a:off x="2311400" y="5892800"/>
-            <a:ext cx="254000" cy="76200"/>
+            <a:off x="2857500" y="5754425"/>
+            <a:ext cx="304800" cy="101600"/>
           </a:xfrm>
           <a:prstGeom prst="rect">
             <a:avLst/>
@@ -6999,11 +7029,21 @@
           </a:fontRef>
         </p:style>
         <p:txBody>
-          <a:bodyPr rtlCol="0" anchor="ctr"/>
+          <a:bodyPr wrap="none" lIns="0" tIns="0" rIns="0" bIns="0" rtlCol="0" anchor="ctr">
+            <a:noAutofit/>
+          </a:bodyPr>
           <a:lstStyle/>
           <a:p>
             <a:pPr algn="ctr"/>
-            <a:endParaRPr lang="de-CH"/>
+            <a:r>
+              <a:rPr lang="de-CH" sz="600" b="1">
+                <a:solidFill>
+                  <a:srgbClr val="3B1E7A"/>
+                </a:solidFill>
+                <a:latin typeface="Consolas" panose="020B0609020204030204" pitchFamily="49" charset="0"/>
+              </a:rPr>
+              <a:t>4</a:t>
+            </a:r>
           </a:p>
         </p:txBody>
       </p:sp>
@@ -7021,14 +7061,14 @@
         </p:nvSpPr>
         <p:spPr>
           <a:xfrm>
-            <a:off x="2616200" y="5892800"/>
-            <a:ext cx="254000" cy="76200"/>
+            <a:off x="3213100" y="5754425"/>
+            <a:ext cx="304800" cy="101600"/>
           </a:xfrm>
           <a:prstGeom prst="rect">
             <a:avLst/>
           </a:prstGeom>
           <a:solidFill>
-            <a:srgbClr val="F5F2FD"/>
+            <a:srgbClr val="FF0000"/>
           </a:solidFill>
           <a:ln w="6350">
             <a:solidFill>
@@ -7053,11 +7093,21 @@
           </a:fontRef>
         </p:style>
         <p:txBody>
-          <a:bodyPr rtlCol="0" anchor="ctr"/>
+          <a:bodyPr wrap="none" lIns="0" tIns="0" rIns="0" bIns="0" rtlCol="0" anchor="ctr">
+            <a:noAutofit/>
+          </a:bodyPr>
           <a:lstStyle/>
           <a:p>
             <a:pPr algn="ctr"/>
-            <a:endParaRPr lang="de-CH"/>
+            <a:r>
+              <a:rPr lang="de-CH" sz="600" b="1">
+                <a:solidFill>
+                  <a:srgbClr val="FFFFFF"/>
+                </a:solidFill>
+                <a:latin typeface="Consolas" panose="020B0609020204030204" pitchFamily="49" charset="0"/>
+              </a:rPr>
+              <a:t>5</a:t>
+            </a:r>
           </a:p>
         </p:txBody>
       </p:sp>
@@ -7072,14 +7122,12 @@
           </p:cNvPr>
           <p:cNvCxnSpPr>
             <a:cxnSpLocks/>
-            <a:stCxn id="124" idx="3"/>
-            <a:endCxn id="125" idx="1"/>
           </p:cNvCxnSpPr>
           <p:nvPr/>
         </p:nvCxnSpPr>
         <p:spPr>
           <a:xfrm>
-            <a:off x="2260600" y="5930900"/>
+            <a:off x="2806700" y="5805225"/>
             <a:ext cx="50800" cy="0"/>
           </a:xfrm>
           <a:prstGeom prst="straightConnector1">
@@ -7117,14 +7165,12 @@
           </p:cNvPr>
           <p:cNvCxnSpPr>
             <a:cxnSpLocks/>
-            <a:stCxn id="125" idx="3"/>
-            <a:endCxn id="127" idx="1"/>
           </p:cNvCxnSpPr>
           <p:nvPr/>
         </p:nvCxnSpPr>
         <p:spPr>
           <a:xfrm>
-            <a:off x="2565400" y="5930900"/>
+            <a:off x="3162300" y="5805225"/>
             <a:ext cx="50800" cy="0"/>
           </a:xfrm>
           <a:prstGeom prst="straightConnector1">
@@ -7165,8 +7211,8 @@
         </p:nvSpPr>
         <p:spPr>
           <a:xfrm>
-            <a:off x="2201333" y="6108700"/>
-            <a:ext cx="169333" cy="50800"/>
+            <a:off x="2717799" y="6008425"/>
+            <a:ext cx="228600" cy="76200"/>
           </a:xfrm>
           <a:prstGeom prst="rect">
             <a:avLst/>
@@ -7197,11 +7243,21 @@
           </a:fontRef>
         </p:style>
         <p:txBody>
-          <a:bodyPr rtlCol="0" anchor="ctr"/>
+          <a:bodyPr wrap="none" lIns="0" tIns="0" rIns="0" bIns="0" rtlCol="0" anchor="ctr">
+            <a:noAutofit/>
+          </a:bodyPr>
           <a:lstStyle/>
           <a:p>
             <a:pPr algn="ctr"/>
-            <a:endParaRPr lang="de-CH"/>
+            <a:r>
+              <a:rPr lang="de-CH" sz="500" b="1">
+                <a:solidFill>
+                  <a:srgbClr val="3B1E7A"/>
+                </a:solidFill>
+                <a:latin typeface="Consolas" panose="020B0609020204030204" pitchFamily="49" charset="0"/>
+              </a:rPr>
+              <a:t>4</a:t>
+            </a:r>
           </a:p>
         </p:txBody>
       </p:sp>
@@ -7219,8 +7275,8 @@
         </p:nvSpPr>
         <p:spPr>
           <a:xfrm>
-            <a:off x="2404533" y="6108700"/>
-            <a:ext cx="169333" cy="50800"/>
+            <a:off x="2984499" y="6008425"/>
+            <a:ext cx="228600" cy="76200"/>
           </a:xfrm>
           <a:prstGeom prst="rect">
             <a:avLst/>
@@ -7251,11 +7307,21 @@
           </a:fontRef>
         </p:style>
         <p:txBody>
-          <a:bodyPr rtlCol="0" anchor="ctr"/>
+          <a:bodyPr wrap="none" lIns="0" tIns="0" rIns="0" bIns="0" rtlCol="0" anchor="ctr">
+            <a:noAutofit/>
+          </a:bodyPr>
           <a:lstStyle/>
           <a:p>
             <a:pPr algn="ctr"/>
-            <a:endParaRPr lang="de-CH"/>
+            <a:r>
+              <a:rPr lang="de-CH" sz="500" b="1">
+                <a:solidFill>
+                  <a:srgbClr val="3B1E7A"/>
+                </a:solidFill>
+                <a:latin typeface="Consolas" panose="020B0609020204030204" pitchFamily="49" charset="0"/>
+              </a:rPr>
+              <a:t>5</a:t>
+            </a:r>
           </a:p>
         </p:txBody>
       </p:sp>
@@ -7270,15 +7336,13 @@
           </p:cNvPr>
           <p:cNvCxnSpPr>
             <a:cxnSpLocks/>
-            <a:stCxn id="132" idx="3"/>
-            <a:endCxn id="133" idx="1"/>
           </p:cNvCxnSpPr>
           <p:nvPr/>
         </p:nvCxnSpPr>
         <p:spPr>
           <a:xfrm>
-            <a:off x="2370666" y="6134100"/>
-            <a:ext cx="33867" cy="0"/>
+            <a:off x="2946400" y="6046525"/>
+            <a:ext cx="38100" cy="0"/>
           </a:xfrm>
           <a:prstGeom prst="straightConnector1">
             <a:avLst/>
@@ -7318,8 +7382,8 @@
         </p:nvSpPr>
         <p:spPr>
           <a:xfrm>
-            <a:off x="4445000" y="5892800"/>
-            <a:ext cx="254000" cy="76200"/>
+            <a:off x="3771900" y="5754425"/>
+            <a:ext cx="304800" cy="101600"/>
           </a:xfrm>
           <a:prstGeom prst="rect">
             <a:avLst/>
@@ -7350,11 +7414,21 @@
           </a:fontRef>
         </p:style>
         <p:txBody>
-          <a:bodyPr rtlCol="0" anchor="ctr"/>
+          <a:bodyPr wrap="none" lIns="0" tIns="0" rIns="0" bIns="0" rtlCol="0" anchor="ctr">
+            <a:noAutofit/>
+          </a:bodyPr>
           <a:lstStyle/>
           <a:p>
             <a:pPr algn="ctr"/>
-            <a:endParaRPr lang="de-CH"/>
+            <a:r>
+              <a:rPr lang="de-CH" sz="600" b="1">
+                <a:solidFill>
+                  <a:srgbClr val="3B1E7A"/>
+                </a:solidFill>
+                <a:latin typeface="Consolas" panose="020B0609020204030204" pitchFamily="49" charset="0"/>
+              </a:rPr>
+              <a:t>5</a:t>
+            </a:r>
           </a:p>
         </p:txBody>
       </p:sp>
@@ -7372,8 +7446,8 @@
         </p:nvSpPr>
         <p:spPr>
           <a:xfrm>
-            <a:off x="4749800" y="5892800"/>
-            <a:ext cx="254000" cy="76200"/>
+            <a:off x="4127500" y="5754425"/>
+            <a:ext cx="304800" cy="101600"/>
           </a:xfrm>
           <a:prstGeom prst="rect">
             <a:avLst/>
@@ -7404,11 +7478,21 @@
           </a:fontRef>
         </p:style>
         <p:txBody>
-          <a:bodyPr rtlCol="0" anchor="ctr"/>
+          <a:bodyPr wrap="none" lIns="0" tIns="0" rIns="0" bIns="0" rtlCol="0" anchor="ctr">
+            <a:noAutofit/>
+          </a:bodyPr>
           <a:lstStyle/>
           <a:p>
             <a:pPr algn="ctr"/>
-            <a:endParaRPr lang="de-CH"/>
+            <a:r>
+              <a:rPr lang="de-CH" sz="600" b="1">
+                <a:solidFill>
+                  <a:srgbClr val="3B1E7A"/>
+                </a:solidFill>
+                <a:latin typeface="Consolas" panose="020B0609020204030204" pitchFamily="49" charset="0"/>
+              </a:rPr>
+              <a:t>6</a:t>
+            </a:r>
           </a:p>
         </p:txBody>
       </p:sp>
@@ -7426,8 +7510,8 @@
         </p:nvSpPr>
         <p:spPr>
           <a:xfrm>
-            <a:off x="5054600" y="5892800"/>
-            <a:ext cx="254000" cy="76200"/>
+            <a:off x="4483100" y="5754425"/>
+            <a:ext cx="304800" cy="101600"/>
           </a:xfrm>
           <a:prstGeom prst="rect">
             <a:avLst/>
@@ -7458,11 +7542,21 @@
           </a:fontRef>
         </p:style>
         <p:txBody>
-          <a:bodyPr rtlCol="0" anchor="ctr"/>
+          <a:bodyPr wrap="none" lIns="0" tIns="0" rIns="0" bIns="0" rtlCol="0" anchor="ctr">
+            <a:noAutofit/>
+          </a:bodyPr>
           <a:lstStyle/>
           <a:p>
             <a:pPr algn="ctr"/>
-            <a:endParaRPr lang="de-CH"/>
+            <a:r>
+              <a:rPr lang="de-CH" sz="600" b="1">
+                <a:solidFill>
+                  <a:srgbClr val="3B1E7A"/>
+                </a:solidFill>
+                <a:latin typeface="Consolas" panose="020B0609020204030204" pitchFamily="49" charset="0"/>
+              </a:rPr>
+              <a:t>7</a:t>
+            </a:r>
           </a:p>
         </p:txBody>
       </p:sp>
@@ -7477,14 +7571,12 @@
           </p:cNvPr>
           <p:cNvCxnSpPr>
             <a:cxnSpLocks/>
-            <a:stCxn id="149" idx="3"/>
-            <a:endCxn id="150" idx="1"/>
           </p:cNvCxnSpPr>
           <p:nvPr/>
         </p:nvCxnSpPr>
         <p:spPr>
           <a:xfrm>
-            <a:off x="4699000" y="5930900"/>
+            <a:off x="4076700" y="5805225"/>
             <a:ext cx="50800" cy="0"/>
           </a:xfrm>
           <a:prstGeom prst="straightConnector1">
@@ -7522,14 +7614,12 @@
           </p:cNvPr>
           <p:cNvCxnSpPr>
             <a:cxnSpLocks/>
-            <a:stCxn id="150" idx="3"/>
-            <a:endCxn id="151" idx="1"/>
           </p:cNvCxnSpPr>
           <p:nvPr/>
         </p:nvCxnSpPr>
         <p:spPr>
           <a:xfrm>
-            <a:off x="5003800" y="5930900"/>
+            <a:off x="4432300" y="5805225"/>
             <a:ext cx="50800" cy="0"/>
           </a:xfrm>
           <a:prstGeom prst="straightConnector1">
@@ -7556,91 +7646,9 @@
           </a:fontRef>
         </p:style>
       </p:cxnSp>
-      <p:sp>
-        <p:nvSpPr>
-          <p:cNvPr id="155" name="label Branch child 2">
-            <a:extLst>
-              <a:ext uri="{FF2B5EF4-FFF2-40B4-BE49-F238E27FC236}">
-                <a16:creationId xmlns:a16="http://schemas.microsoft.com/office/drawing/2014/main" id="{42FAE53B-DCED-934C-EFFB-62896D8D5F40}"/>
-              </a:ext>
-            </a:extLst>
-          </p:cNvPr>
-          <p:cNvSpPr txBox="1"/>
-          <p:nvPr/>
-        </p:nvSpPr>
-        <p:spPr>
-          <a:xfrm>
-            <a:off x="1064865" y="5861650"/>
-            <a:ext cx="835165" cy="138499"/>
-          </a:xfrm>
-          <a:prstGeom prst="rect">
-            <a:avLst/>
-          </a:prstGeom>
-          <a:noFill/>
-        </p:spPr>
-        <p:txBody>
-          <a:bodyPr vert="horz" wrap="none" lIns="0" tIns="0" rIns="0" bIns="0" rtlCol="0">
-            <a:spAutoFit/>
-          </a:bodyPr>
-          <a:lstStyle/>
-          <a:p>
-            <a:r>
-              <a:rPr lang="de-CH" sz="900" i="1" dirty="0" err="1">
-                <a:solidFill>
-                  <a:srgbClr val="3B1E7A"/>
-                </a:solidFill>
-                <a:latin typeface="Segoe UI" panose="020B0502040204020203" pitchFamily="34" charset="0"/>
-              </a:rPr>
-              <a:t>header</a:t>
-            </a:r>
-            <a:r>
-              <a:rPr lang="de-CH" sz="900" i="1" dirty="0">
-                <a:solidFill>
-                  <a:srgbClr val="3B1E7A"/>
-                </a:solidFill>
-                <a:latin typeface="Segoe UI" panose="020B0502040204020203" pitchFamily="34" charset="0"/>
-              </a:rPr>
-              <a:t> </a:t>
-            </a:r>
-            <a:r>
-              <a:rPr lang="de-CH" sz="900" i="1" dirty="0" err="1">
-                <a:solidFill>
-                  <a:srgbClr val="3B1E7A"/>
-                </a:solidFill>
-                <a:latin typeface="Segoe UI" panose="020B0502040204020203" pitchFamily="34" charset="0"/>
-              </a:rPr>
-              <a:t>tree</a:t>
-            </a:r>
-            <a:r>
-              <a:rPr lang="de-CH" sz="900" i="1" dirty="0">
-                <a:solidFill>
-                  <a:srgbClr val="3B1E7A"/>
-                </a:solidFill>
-                <a:latin typeface="Segoe UI" panose="020B0502040204020203" pitchFamily="34" charset="0"/>
-              </a:rPr>
-              <a:t> </a:t>
-            </a:r>
-            <a:r>
-              <a:rPr lang="de-CH" sz="900" i="1" dirty="0" err="1">
-                <a:solidFill>
-                  <a:srgbClr val="3B1E7A"/>
-                </a:solidFill>
-                <a:latin typeface="Segoe UI" panose="020B0502040204020203" pitchFamily="34" charset="0"/>
-              </a:rPr>
-              <a:t>child</a:t>
-            </a:r>
-            <a:endParaRPr lang="de-CH" sz="900" i="1" dirty="0">
-              <a:solidFill>
-                <a:srgbClr val="3B1E7A"/>
-              </a:solidFill>
-              <a:latin typeface="Segoe UI" panose="020B0502040204020203" pitchFamily="34" charset="0"/>
-            </a:endParaRPr>
-          </a:p>
-        </p:txBody>
-      </p:sp>
       <p:cxnSp>
         <p:nvCxnSpPr>
-          <p:cNvPr id="158" name="Branch.header chain link 4">
+          <p:cNvPr id="158" name="Branch.header chain link 5">
             <a:extLst>
               <a:ext uri="{FF2B5EF4-FFF2-40B4-BE49-F238E27FC236}">
                 <a16:creationId xmlns:a16="http://schemas.microsoft.com/office/drawing/2014/main" id="{92BCC3D5-4ECA-D80E-C794-8513069B0D6C}"/>
@@ -7649,15 +7657,13 @@
           </p:cNvPr>
           <p:cNvCxnSpPr>
             <a:cxnSpLocks/>
-            <a:stCxn id="115" idx="3"/>
-            <a:endCxn id="166" idx="1"/>
           </p:cNvCxnSpPr>
           <p:nvPr/>
         </p:nvCxnSpPr>
         <p:spPr>
           <a:xfrm>
-            <a:off x="3911600" y="5613400"/>
-            <a:ext cx="101600" cy="0"/>
+            <a:off x="3886200" y="5449625"/>
+            <a:ext cx="76200" cy="0"/>
           </a:xfrm>
           <a:prstGeom prst="straightConnector1">
             <a:avLst/>
@@ -7694,13 +7700,14 @@
           </p:cNvPr>
           <p:cNvCxnSpPr>
             <a:cxnSpLocks/>
+            <a:endCxn id="103" idx="0"/>
           </p:cNvCxnSpPr>
           <p:nvPr/>
         </p:nvCxnSpPr>
         <p:spPr>
           <a:xfrm>
             <a:off x="4876800" y="3759200"/>
-            <a:ext cx="0" cy="1778000"/>
+            <a:ext cx="0" cy="1588825"/>
           </a:xfrm>
           <a:prstGeom prst="straightConnector1">
             <a:avLst/>
@@ -7743,8 +7750,8 @@
         </p:nvCxnSpPr>
         <p:spPr>
           <a:xfrm>
-            <a:off x="2133600" y="5613400"/>
-            <a:ext cx="0" cy="279400"/>
+            <a:off x="2654300" y="5449625"/>
+            <a:ext cx="0" cy="304800"/>
           </a:xfrm>
           <a:prstGeom prst="straightConnector1">
             <a:avLst/>
@@ -7786,8 +7793,8 @@
         </p:nvCxnSpPr>
         <p:spPr>
           <a:xfrm>
-            <a:off x="4572000" y="5613400"/>
-            <a:ext cx="0" cy="279400"/>
+            <a:off x="3924300" y="5449625"/>
+            <a:ext cx="0" cy="304800"/>
           </a:xfrm>
           <a:prstGeom prst="straightConnector1">
             <a:avLst/>
@@ -7829,8 +7836,8 @@
         </p:nvCxnSpPr>
         <p:spPr>
           <a:xfrm>
-            <a:off x="2286000" y="5930900"/>
-            <a:ext cx="0" cy="177800"/>
+            <a:off x="2832100" y="5805225"/>
+            <a:ext cx="0" cy="203200"/>
           </a:xfrm>
           <a:prstGeom prst="straightConnector1">
             <a:avLst/>
@@ -7858,7 +7865,7 @@
       </p:cxnSp>
       <p:sp>
         <p:nvSpPr>
-          <p:cNvPr id="166" name="Branch.header chain 5">
+          <p:cNvPr id="166" name="Branch.header chain 6">
             <a:extLst>
               <a:ext uri="{FF2B5EF4-FFF2-40B4-BE49-F238E27FC236}">
                 <a16:creationId xmlns:a16="http://schemas.microsoft.com/office/drawing/2014/main" id="{7332F24B-144B-6C65-A9EB-FBAAC5499DCB}"/>
@@ -7870,8 +7877,8 @@
         </p:nvSpPr>
         <p:spPr>
           <a:xfrm>
-            <a:off x="4013200" y="5537200"/>
-            <a:ext cx="508000" cy="152400"/>
+            <a:off x="3962400" y="5348025"/>
+            <a:ext cx="558800" cy="203200"/>
           </a:xfrm>
           <a:prstGeom prst="rect">
             <a:avLst/>
@@ -7902,17 +7909,27 @@
           </a:fontRef>
         </p:style>
         <p:txBody>
-          <a:bodyPr rtlCol="0" anchor="ctr"/>
+          <a:bodyPr wrap="none" lIns="0" tIns="0" rIns="0" bIns="0" rtlCol="0" anchor="ctr">
+            <a:noAutofit/>
+          </a:bodyPr>
           <a:lstStyle/>
           <a:p>
             <a:pPr algn="ctr"/>
-            <a:endParaRPr lang="de-CH"/>
+            <a:r>
+              <a:rPr lang="de-CH" sz="700" b="1">
+                <a:solidFill>
+                  <a:srgbClr val="3B1E7A"/>
+                </a:solidFill>
+                <a:latin typeface="Consolas" panose="020B0609020204030204" pitchFamily="49" charset="0"/>
+              </a:rPr>
+              <a:t>5</a:t>
+            </a:r>
           </a:p>
         </p:txBody>
       </p:sp>
       <p:cxnSp>
         <p:nvCxnSpPr>
-          <p:cNvPr id="167" name="Branch.header chain link 5">
+          <p:cNvPr id="167" name="Branch.header chain link 6">
             <a:extLst>
               <a:ext uri="{FF2B5EF4-FFF2-40B4-BE49-F238E27FC236}">
                 <a16:creationId xmlns:a16="http://schemas.microsoft.com/office/drawing/2014/main" id="{CC67833F-EF6C-ECCC-08C0-62B9910FDEE5}"/>
@@ -7921,15 +7938,13 @@
           </p:cNvPr>
           <p:cNvCxnSpPr>
             <a:cxnSpLocks/>
-            <a:stCxn id="166" idx="3"/>
-            <a:endCxn id="103" idx="1"/>
           </p:cNvCxnSpPr>
           <p:nvPr/>
         </p:nvCxnSpPr>
         <p:spPr>
           <a:xfrm>
-            <a:off x="4521200" y="5613400"/>
-            <a:ext cx="101600" cy="0"/>
+            <a:off x="4521200" y="5449625"/>
+            <a:ext cx="76200" cy="0"/>
           </a:xfrm>
           <a:prstGeom prst="straightConnector1">
             <a:avLst/>
@@ -7957,10 +7972,10 @@
       </p:cxnSp>
       <p:sp>
         <p:nvSpPr>
-          <p:cNvPr id="170" name="Branch.AdvanceTipBlockchain">
-            <a:extLst>
-              <a:ext uri="{FF2B5EF4-FFF2-40B4-BE49-F238E27FC236}">
-                <a16:creationId xmlns:a16="http://schemas.microsoft.com/office/drawing/2014/main" id="{8431A813-A47F-8A64-4C9C-875AC26C2842}"/>
+          <p:cNvPr id="171" name="Branch.HeaderTipBlockchain">
+            <a:extLst>
+              <a:ext uri="{FF2B5EF4-FFF2-40B4-BE49-F238E27FC236}">
+                <a16:creationId xmlns:a16="http://schemas.microsoft.com/office/drawing/2014/main" id="{A5872FF5-D932-5FB2-4272-403788DC913D}"/>
               </a:ext>
             </a:extLst>
           </p:cNvPr>
@@ -7969,101 +7984,7 @@
         </p:nvSpPr>
         <p:spPr>
           <a:xfrm>
-            <a:off x="1879600" y="4775200"/>
-            <a:ext cx="1117600" cy="558800"/>
-          </a:xfrm>
-          <a:prstGeom prst="roundRect">
-            <a:avLst>
-              <a:gd name="adj" fmla="val 12000"/>
-            </a:avLst>
-          </a:prstGeom>
-          <a:solidFill>
-            <a:srgbClr val="FFFFFF"/>
-          </a:solidFill>
-          <a:ln w="9525">
-            <a:solidFill>
-              <a:srgbClr val="6D28D9"/>
-            </a:solidFill>
-          </a:ln>
-        </p:spPr>
-        <p:style>
-          <a:lnRef idx="2">
-            <a:schemeClr val="accent1">
-              <a:shade val="15000"/>
-            </a:schemeClr>
-          </a:lnRef>
-          <a:fillRef idx="1">
-            <a:schemeClr val="accent1"/>
-          </a:fillRef>
-          <a:effectRef idx="0">
-            <a:schemeClr val="accent1"/>
-          </a:effectRef>
-          <a:fontRef idx="minor">
-            <a:schemeClr val="lt1"/>
-          </a:fontRef>
-        </p:style>
-        <p:txBody>
-          <a:bodyPr wrap="none" lIns="25400" tIns="25400" rIns="25400" bIns="0" rtlCol="0" anchor="t"/>
-          <a:lstStyle/>
-          <a:p>
-            <a:pPr algn="ctr"/>
-            <a:r>
-              <a:rPr lang="en-US" sz="700" b="1">
-                <a:solidFill>
-                  <a:srgbClr val="3B1E7A"/>
-                </a:solidFill>
-                <a:latin typeface="Consolas" panose="020B0609020204030204" pitchFamily="49" charset="0"/>
-              </a:rPr>
-              <a:t>AdvanceTipBlockchain</a:t>
-            </a:r>
-          </a:p>
-          <a:p>
-            <a:pPr algn="ctr"/>
-            <a:r>
-              <a:rPr lang="en-US" sz="650">
-                <a:solidFill>
-                  <a:srgbClr val="64748B"/>
-                </a:solidFill>
-                <a:latin typeface="Consolas" panose="020B0609020204030204" pitchFamily="49" charset="0"/>
-              </a:rPr>
-              <a:t>follows gapless Blocks</a:t>
-            </a:r>
-          </a:p>
-          <a:p>
-            <a:pPr algn="ctr"/>
-            <a:r>
-              <a:rPr lang="en-US" sz="650">
-                <a:solidFill>
-                  <a:srgbClr val="64748B"/>
-                </a:solidFill>
-                <a:latin typeface="Consolas" panose="020B0609020204030204" pitchFamily="49" charset="0"/>
-              </a:rPr>
-              <a:t>stronger tip → reorg</a:t>
-            </a:r>
-            <a:endParaRPr lang="de-CH" sz="650">
-              <a:solidFill>
-                <a:srgbClr val="64748B"/>
-              </a:solidFill>
-              <a:latin typeface="Consolas" panose="020B0609020204030204" pitchFamily="49" charset="0"/>
-            </a:endParaRPr>
-          </a:p>
-        </p:txBody>
-      </p:sp>
-      <p:sp>
-        <p:nvSpPr>
-          <p:cNvPr id="171" name="Branch.HeaderTipBlockchain">
-            <a:extLst>
-              <a:ext uri="{FF2B5EF4-FFF2-40B4-BE49-F238E27FC236}">
-                <a16:creationId xmlns:a16="http://schemas.microsoft.com/office/drawing/2014/main" id="{A5872FF5-D932-5FB2-4272-403788DC913D}"/>
-              </a:ext>
-            </a:extLst>
-          </p:cNvPr>
-          <p:cNvSpPr/>
-          <p:nvPr/>
-        </p:nvSpPr>
-        <p:spPr>
-          <a:xfrm>
-            <a:off x="1993900" y="5156200"/>
+            <a:off x="1257300" y="4992425"/>
             <a:ext cx="889000" cy="127000"/>
           </a:xfrm>
           <a:prstGeom prst="rect">
@@ -8122,15 +8043,13 @@
           </p:cNvPr>
           <p:cNvCxnSpPr>
             <a:cxnSpLocks/>
-            <a:stCxn id="171" idx="2"/>
-            <a:endCxn id="111" idx="0"/>
           </p:cNvCxnSpPr>
           <p:nvPr/>
         </p:nvCxnSpPr>
         <p:spPr>
           <a:xfrm>
-            <a:off x="2438400" y="5283200"/>
-            <a:ext cx="0" cy="254000"/>
+            <a:off x="1701800" y="5119425"/>
+            <a:ext cx="0" cy="228600"/>
           </a:xfrm>
           <a:prstGeom prst="straightConnector1">
             <a:avLst/>
@@ -8141,6 +8060,113 @@
             </a:solidFill>
             <a:headEnd type="oval" w="sm" len="sm"/>
             <a:tailEnd type="triangle" w="sm" len="sm"/>
+          </a:ln>
+        </p:spPr>
+        <p:style>
+          <a:lnRef idx="2">
+            <a:schemeClr val="accent1"/>
+          </a:lnRef>
+          <a:fillRef idx="0">
+            <a:schemeClr val="accent1"/>
+          </a:fillRef>
+          <a:effectRef idx="1">
+            <a:schemeClr val="accent1"/>
+          </a:effectRef>
+          <a:fontRef idx="minor">
+            <a:schemeClr val="tx1"/>
+          </a:fontRef>
+        </p:style>
+      </p:cxnSp>
+      <p:sp>
+        <p:nvSpPr>
+          <p:cNvPr id="176" name="Branch.header chain 4">
+            <a:extLst>
+              <a:ext uri="{FF2B5EF4-FFF2-40B4-BE49-F238E27FC236}">
+                <a16:creationId xmlns:a16="http://schemas.microsoft.com/office/drawing/2014/main" id="{134957A9-D776-9018-713B-A233057ADC84}"/>
+              </a:ext>
+            </a:extLst>
+          </p:cNvPr>
+          <p:cNvSpPr/>
+          <p:nvPr/>
+        </p:nvSpPr>
+        <p:spPr>
+          <a:xfrm>
+            <a:off x="2692400" y="5348025"/>
+            <a:ext cx="558800" cy="203200"/>
+          </a:xfrm>
+          <a:prstGeom prst="rect">
+            <a:avLst/>
+          </a:prstGeom>
+          <a:solidFill>
+            <a:srgbClr val="F5F2FD"/>
+          </a:solidFill>
+          <a:ln w="9525">
+            <a:solidFill>
+              <a:srgbClr val="6D28D9"/>
+            </a:solidFill>
+          </a:ln>
+        </p:spPr>
+        <p:style>
+          <a:lnRef idx="2">
+            <a:schemeClr val="accent1">
+              <a:shade val="15000"/>
+            </a:schemeClr>
+          </a:lnRef>
+          <a:fillRef idx="1">
+            <a:schemeClr val="accent1"/>
+          </a:fillRef>
+          <a:effectRef idx="0">
+            <a:schemeClr val="accent1"/>
+          </a:effectRef>
+          <a:fontRef idx="minor">
+            <a:schemeClr val="lt1"/>
+          </a:fontRef>
+        </p:style>
+        <p:txBody>
+          <a:bodyPr wrap="none" lIns="0" tIns="0" rIns="0" bIns="0" rtlCol="0" anchor="ctr">
+            <a:noAutofit/>
+          </a:bodyPr>
+          <a:lstStyle/>
+          <a:p>
+            <a:pPr algn="ctr"/>
+            <a:r>
+              <a:rPr lang="de-CH" sz="700" b="1">
+                <a:solidFill>
+                  <a:srgbClr val="3B1E7A"/>
+                </a:solidFill>
+                <a:latin typeface="Consolas" panose="020B0609020204030204" pitchFamily="49" charset="0"/>
+              </a:rPr>
+              <a:t>3</a:t>
+            </a:r>
+          </a:p>
+        </p:txBody>
+      </p:sp>
+      <p:cxnSp>
+        <p:nvCxnSpPr>
+          <p:cNvPr id="177" name="Branch.header chain link 4">
+            <a:extLst>
+              <a:ext uri="{FF2B5EF4-FFF2-40B4-BE49-F238E27FC236}">
+                <a16:creationId xmlns:a16="http://schemas.microsoft.com/office/drawing/2014/main" id="{F2CA65DC-1E4E-D722-F51F-CF1016FBA05F}"/>
+              </a:ext>
+            </a:extLst>
+          </p:cNvPr>
+          <p:cNvCxnSpPr>
+            <a:cxnSpLocks/>
+          </p:cNvCxnSpPr>
+          <p:nvPr/>
+        </p:nvCxnSpPr>
+        <p:spPr>
+          <a:xfrm>
+            <a:off x="3251200" y="5449625"/>
+            <a:ext cx="76200" cy="0"/>
+          </a:xfrm>
+          <a:prstGeom prst="straightConnector1">
+            <a:avLst/>
+          </a:prstGeom>
+          <a:ln w="9525">
+            <a:solidFill>
+              <a:srgbClr val="6D28D9"/>
+            </a:solidFill>
           </a:ln>
         </p:spPr>
         <p:style>

--- a/Docs/BToken-Sync-Flow.pptx
+++ b/Docs/BToken-Sync-Flow.pptx
@@ -4505,7 +4505,7 @@
                 </a:solidFill>
                 <a:latin typeface="Segoe UI Semibold" panose="020B0702040204020203" pitchFamily="34" charset="0"/>
               </a:rPr>
-              <a:t>Branch</a:t>
+              <a:t>Chain</a:t>
             </a:r>
           </a:p>
           <a:p>

--- a/Docs/BToken-Sync-Flow.pptx
+++ b/Docs/BToken-Sync-Flow.pptx
@@ -3388,15 +3388,15 @@
         <p:spPr>
           <a:xfrm>
             <a:off x="508000" y="4241800"/>
-            <a:ext cx="11176000" cy="2413000"/>
+            <a:ext cx="11176000" cy="2372815"/>
           </a:xfrm>
           <a:prstGeom prst="roundRect">
             <a:avLst>
-              <a:gd name="adj" fmla="val 6000"/>
+              <a:gd name="adj" fmla="val 5816"/>
             </a:avLst>
           </a:prstGeom>
           <a:solidFill>
-            <a:srgbClr val="F5F2FD"/>
+            <a:srgbClr val="EBE5FB"/>
           </a:solidFill>
           <a:ln w="15875">
             <a:solidFill>
@@ -3443,12 +3443,12 @@
         </p:nvSpPr>
         <p:spPr>
           <a:xfrm>
-            <a:off x="635000" y="4368800"/>
-            <a:ext cx="7747000" cy="2133600"/>
+            <a:off x="635000" y="4434701"/>
+            <a:ext cx="7747000" cy="1997944"/>
           </a:xfrm>
           <a:prstGeom prst="roundRect">
             <a:avLst>
-              <a:gd name="adj" fmla="val 6557"/>
+              <a:gd name="adj" fmla="val 6322"/>
             </a:avLst>
           </a:prstGeom>
           <a:solidFill>
@@ -3555,7 +3555,7 @@
         </p:nvSpPr>
         <p:spPr>
           <a:xfrm>
-            <a:off x="914400" y="2819400"/>
+            <a:off x="838200" y="2768600"/>
             <a:ext cx="7747000" cy="1143000"/>
           </a:xfrm>
           <a:prstGeom prst="roundRect">
@@ -3607,6 +3607,1173 @@
       </p:sp>
       <p:sp>
         <p:nvSpPr>
+          <p:cNvPr id="208" name="remote peer stack 2">
+            <a:extLst>
+              <a:ext uri="{FF2B5EF4-FFF2-40B4-BE49-F238E27FC236}">
+                <a16:creationId xmlns:a16="http://schemas.microsoft.com/office/drawing/2014/main" id="{ECB2271F-CF9D-5E6E-CB42-15E2A6293589}"/>
+              </a:ext>
+            </a:extLst>
+          </p:cNvPr>
+          <p:cNvSpPr/>
+          <p:nvPr/>
+        </p:nvSpPr>
+        <p:spPr>
+          <a:xfrm>
+            <a:off x="838200" y="1524000"/>
+            <a:ext cx="7747000" cy="330200"/>
+          </a:xfrm>
+          <a:prstGeom prst="roundRect">
+            <a:avLst>
+              <a:gd name="adj" fmla="val 30000"/>
+            </a:avLst>
+          </a:prstGeom>
+          <a:solidFill>
+            <a:srgbClr val="FDF0DC">
+              <a:alpha val="40000"/>
+            </a:srgbClr>
+          </a:solidFill>
+          <a:ln w="15875" cap="flat" cmpd="sng" algn="ctr">
+            <a:solidFill>
+              <a:srgbClr val="C2700A">
+                <a:alpha val="30000"/>
+              </a:srgbClr>
+            </a:solidFill>
+            <a:prstDash val="solid"/>
+            <a:miter lim="800000"/>
+            <a:headEnd type="none" w="med" len="med"/>
+            <a:tailEnd type="none" w="med" len="med"/>
+          </a:ln>
+        </p:spPr>
+        <p:style>
+          <a:lnRef idx="2">
+            <a:schemeClr val="accent1">
+              <a:shade val="15000"/>
+            </a:schemeClr>
+          </a:lnRef>
+          <a:fillRef idx="1">
+            <a:schemeClr val="accent1"/>
+          </a:fillRef>
+          <a:effectRef idx="0">
+            <a:schemeClr val="accent1"/>
+          </a:effectRef>
+          <a:fontRef idx="minor">
+            <a:schemeClr val="lt1"/>
+          </a:fontRef>
+        </p:style>
+        <p:txBody>
+          <a:bodyPr rtlCol="0" anchor="ctr"/>
+          <a:lstStyle/>
+          <a:p>
+            <a:pPr algn="ctr"/>
+            <a:endParaRPr lang="en-US" sz="1200" dirty="0">
+              <a:solidFill>
+                <a:srgbClr val="7A4306"/>
+              </a:solidFill>
+              <a:latin typeface="Segoe UI Semibold" panose="020B0702040204020203" pitchFamily="34" charset="0"/>
+            </a:endParaRPr>
+          </a:p>
+        </p:txBody>
+      </p:sp>
+      <p:cxnSp>
+        <p:nvCxnSpPr>
+          <p:cNvPr id="209" name="Straight Connector 14 stack 2">
+            <a:extLst>
+              <a:ext uri="{FF2B5EF4-FFF2-40B4-BE49-F238E27FC236}">
+                <a16:creationId xmlns:a16="http://schemas.microsoft.com/office/drawing/2014/main" id="{91B37BA2-09C8-C756-56F8-AAA7DDFCC10E}"/>
+              </a:ext>
+            </a:extLst>
+          </p:cNvPr>
+          <p:cNvCxnSpPr/>
+          <p:nvPr/>
+        </p:nvCxnSpPr>
+        <p:spPr>
+          <a:xfrm flipV="1">
+            <a:off x="4965700" y="1854200"/>
+            <a:ext cx="0" cy="1371600"/>
+          </a:xfrm>
+          <a:prstGeom prst="line">
+            <a:avLst/>
+          </a:prstGeom>
+          <a:ln w="22225" cap="flat" cmpd="sng" algn="ctr">
+            <a:solidFill>
+              <a:srgbClr val="C2700A">
+                <a:alpha val="30000"/>
+              </a:srgbClr>
+            </a:solidFill>
+            <a:prstDash val="solid"/>
+            <a:miter lim="800000"/>
+            <a:headEnd type="none" w="med" len="med"/>
+            <a:tailEnd type="triangle" w="med" len="med"/>
+          </a:ln>
+        </p:spPr>
+        <p:style>
+          <a:lnRef idx="2">
+            <a:schemeClr val="accent1"/>
+          </a:lnRef>
+          <a:fillRef idx="0">
+            <a:schemeClr val="accent1"/>
+          </a:fillRef>
+          <a:effectRef idx="1">
+            <a:schemeClr val="accent1"/>
+          </a:effectRef>
+          <a:fontRef idx="minor">
+            <a:schemeClr val="tx1"/>
+          </a:fontRef>
+        </p:style>
+      </p:cxnSp>
+      <p:cxnSp>
+        <p:nvCxnSpPr>
+          <p:cNvPr id="210" name="Straight Connector 15 stack 2">
+            <a:extLst>
+              <a:ext uri="{FF2B5EF4-FFF2-40B4-BE49-F238E27FC236}">
+                <a16:creationId xmlns:a16="http://schemas.microsoft.com/office/drawing/2014/main" id="{B0B09E27-DFB1-7CB5-BA5E-8E5DE44B6067}"/>
+              </a:ext>
+            </a:extLst>
+          </p:cNvPr>
+          <p:cNvCxnSpPr/>
+          <p:nvPr/>
+        </p:nvCxnSpPr>
+        <p:spPr>
+          <a:xfrm>
+            <a:off x="4076700" y="1854200"/>
+            <a:ext cx="0" cy="1371600"/>
+          </a:xfrm>
+          <a:prstGeom prst="line">
+            <a:avLst/>
+          </a:prstGeom>
+          <a:ln w="22225" cap="flat" cmpd="sng" algn="ctr">
+            <a:solidFill>
+              <a:srgbClr val="C2700A">
+                <a:alpha val="30000"/>
+              </a:srgbClr>
+            </a:solidFill>
+            <a:prstDash val="solid"/>
+            <a:miter lim="800000"/>
+            <a:headEnd type="none" w="med" len="med"/>
+            <a:tailEnd type="triangle" w="med" len="med"/>
+          </a:ln>
+        </p:spPr>
+        <p:style>
+          <a:lnRef idx="2">
+            <a:schemeClr val="accent1"/>
+          </a:lnRef>
+          <a:fillRef idx="0">
+            <a:schemeClr val="accent1"/>
+          </a:fillRef>
+          <a:effectRef idx="1">
+            <a:schemeClr val="accent1"/>
+          </a:effectRef>
+          <a:fontRef idx="minor">
+            <a:schemeClr val="tx1"/>
+          </a:fontRef>
+        </p:style>
+      </p:cxnSp>
+      <p:cxnSp>
+        <p:nvCxnSpPr>
+          <p:cNvPr id="211" name="Straight Connector 30 stack 2">
+            <a:extLst>
+              <a:ext uri="{FF2B5EF4-FFF2-40B4-BE49-F238E27FC236}">
+                <a16:creationId xmlns:a16="http://schemas.microsoft.com/office/drawing/2014/main" id="{ED8B7D77-D015-8FF7-264A-E239634EEF51}"/>
+              </a:ext>
+            </a:extLst>
+          </p:cNvPr>
+          <p:cNvCxnSpPr/>
+          <p:nvPr/>
+        </p:nvCxnSpPr>
+        <p:spPr>
+          <a:xfrm flipV="1">
+            <a:off x="6743700" y="1854200"/>
+            <a:ext cx="0" cy="1371600"/>
+          </a:xfrm>
+          <a:prstGeom prst="line">
+            <a:avLst/>
+          </a:prstGeom>
+          <a:ln w="22225" cap="flat" cmpd="sng" algn="ctr">
+            <a:solidFill>
+              <a:srgbClr val="C2700A">
+                <a:alpha val="30000"/>
+              </a:srgbClr>
+            </a:solidFill>
+            <a:prstDash val="solid"/>
+            <a:miter lim="800000"/>
+            <a:headEnd type="none" w="med" len="med"/>
+            <a:tailEnd type="triangle" w="med" len="med"/>
+          </a:ln>
+        </p:spPr>
+        <p:style>
+          <a:lnRef idx="2">
+            <a:schemeClr val="accent1"/>
+          </a:lnRef>
+          <a:fillRef idx="0">
+            <a:schemeClr val="accent1"/>
+          </a:fillRef>
+          <a:effectRef idx="1">
+            <a:schemeClr val="accent1"/>
+          </a:effectRef>
+          <a:fontRef idx="minor">
+            <a:schemeClr val="tx1"/>
+          </a:fontRef>
+        </p:style>
+      </p:cxnSp>
+      <p:cxnSp>
+        <p:nvCxnSpPr>
+          <p:cNvPr id="212" name="Straight Connector 31 stack 2">
+            <a:extLst>
+              <a:ext uri="{FF2B5EF4-FFF2-40B4-BE49-F238E27FC236}">
+                <a16:creationId xmlns:a16="http://schemas.microsoft.com/office/drawing/2014/main" id="{F708C155-CC23-B426-2E82-7DF4DBC8EC18}"/>
+              </a:ext>
+            </a:extLst>
+          </p:cNvPr>
+          <p:cNvCxnSpPr/>
+          <p:nvPr/>
+        </p:nvCxnSpPr>
+        <p:spPr>
+          <a:xfrm>
+            <a:off x="7632700" y="1854200"/>
+            <a:ext cx="0" cy="1371600"/>
+          </a:xfrm>
+          <a:prstGeom prst="line">
+            <a:avLst/>
+          </a:prstGeom>
+          <a:ln w="22225" cap="flat" cmpd="sng" algn="ctr">
+            <a:solidFill>
+              <a:srgbClr val="C2700A">
+                <a:alpha val="30000"/>
+              </a:srgbClr>
+            </a:solidFill>
+            <a:prstDash val="solid"/>
+            <a:miter lim="800000"/>
+            <a:headEnd type="none" w="med" len="med"/>
+            <a:tailEnd type="triangle" w="med" len="med"/>
+          </a:ln>
+        </p:spPr>
+        <p:style>
+          <a:lnRef idx="2">
+            <a:schemeClr val="accent1"/>
+          </a:lnRef>
+          <a:fillRef idx="0">
+            <a:schemeClr val="accent1"/>
+          </a:fillRef>
+          <a:effectRef idx="1">
+            <a:schemeClr val="accent1"/>
+          </a:effectRef>
+          <a:fontRef idx="minor">
+            <a:schemeClr val="tx1"/>
+          </a:fontRef>
+        </p:style>
+      </p:cxnSp>
+      <p:sp>
+        <p:nvSpPr>
+          <p:cNvPr id="213" name="Rounded Rectangle 16 stack 2">
+            <a:extLst>
+              <a:ext uri="{FF2B5EF4-FFF2-40B4-BE49-F238E27FC236}">
+                <a16:creationId xmlns:a16="http://schemas.microsoft.com/office/drawing/2014/main" id="{5CC5E55B-4625-D8FE-E87B-E34EDEE875BA}"/>
+              </a:ext>
+            </a:extLst>
+          </p:cNvPr>
+          <p:cNvSpPr/>
+          <p:nvPr/>
+        </p:nvSpPr>
+        <p:spPr>
+          <a:xfrm>
+            <a:off x="4521200" y="2095500"/>
+            <a:ext cx="889000" cy="215900"/>
+          </a:xfrm>
+          <a:prstGeom prst="roundRect">
+            <a:avLst>
+              <a:gd name="adj" fmla="val 50000"/>
+            </a:avLst>
+          </a:prstGeom>
+          <a:solidFill>
+            <a:srgbClr val="FFFFFF">
+              <a:alpha val="40000"/>
+            </a:srgbClr>
+          </a:solidFill>
+          <a:ln w="12700" cap="flat" cmpd="sng" algn="ctr">
+            <a:solidFill>
+              <a:srgbClr val="C2700A">
+                <a:alpha val="30000"/>
+              </a:srgbClr>
+            </a:solidFill>
+            <a:prstDash val="solid"/>
+            <a:miter lim="800000"/>
+            <a:headEnd type="none" w="med" len="med"/>
+            <a:tailEnd type="none" w="med" len="med"/>
+          </a:ln>
+        </p:spPr>
+        <p:style>
+          <a:lnRef idx="2">
+            <a:schemeClr val="accent1">
+              <a:shade val="15000"/>
+            </a:schemeClr>
+          </a:lnRef>
+          <a:fillRef idx="1">
+            <a:schemeClr val="accent1"/>
+          </a:fillRef>
+          <a:effectRef idx="0">
+            <a:schemeClr val="accent1"/>
+          </a:effectRef>
+          <a:fontRef idx="minor">
+            <a:schemeClr val="lt1"/>
+          </a:fontRef>
+        </p:style>
+        <p:txBody>
+          <a:bodyPr wrap="none" lIns="25400" tIns="0" rIns="25400" bIns="0" rtlCol="0" anchor="ctr"/>
+          <a:lstStyle/>
+          <a:p>
+            <a:pPr algn="ctr"/>
+            <a:endParaRPr lang="en-US" sz="950" b="1" dirty="0">
+              <a:solidFill>
+                <a:srgbClr val="7A4306"/>
+              </a:solidFill>
+              <a:latin typeface="Consolas" panose="020B0609020204030204" pitchFamily="49" charset="0"/>
+            </a:endParaRPr>
+          </a:p>
+        </p:txBody>
+      </p:sp>
+      <p:sp>
+        <p:nvSpPr>
+          <p:cNvPr id="214" name="Rounded Rectangle 17 stack 2">
+            <a:extLst>
+              <a:ext uri="{FF2B5EF4-FFF2-40B4-BE49-F238E27FC236}">
+                <a16:creationId xmlns:a16="http://schemas.microsoft.com/office/drawing/2014/main" id="{6A2F6082-C497-8CE8-2067-87D3373A4CD5}"/>
+              </a:ext>
+            </a:extLst>
+          </p:cNvPr>
+          <p:cNvSpPr/>
+          <p:nvPr/>
+        </p:nvSpPr>
+        <p:spPr>
+          <a:xfrm>
+            <a:off x="3738880" y="2095500"/>
+            <a:ext cx="675640" cy="215900"/>
+          </a:xfrm>
+          <a:prstGeom prst="roundRect">
+            <a:avLst>
+              <a:gd name="adj" fmla="val 50000"/>
+            </a:avLst>
+          </a:prstGeom>
+          <a:solidFill>
+            <a:srgbClr val="FFFFFF">
+              <a:alpha val="40000"/>
+            </a:srgbClr>
+          </a:solidFill>
+          <a:ln w="12700" cap="flat" cmpd="sng" algn="ctr">
+            <a:solidFill>
+              <a:srgbClr val="C2700A">
+                <a:alpha val="30000"/>
+              </a:srgbClr>
+            </a:solidFill>
+            <a:prstDash val="solid"/>
+            <a:miter lim="800000"/>
+            <a:headEnd type="none" w="med" len="med"/>
+            <a:tailEnd type="none" w="med" len="med"/>
+          </a:ln>
+        </p:spPr>
+        <p:style>
+          <a:lnRef idx="2">
+            <a:schemeClr val="accent1">
+              <a:shade val="15000"/>
+            </a:schemeClr>
+          </a:lnRef>
+          <a:fillRef idx="1">
+            <a:schemeClr val="accent1"/>
+          </a:fillRef>
+          <a:effectRef idx="0">
+            <a:schemeClr val="accent1"/>
+          </a:effectRef>
+          <a:fontRef idx="minor">
+            <a:schemeClr val="lt1"/>
+          </a:fontRef>
+        </p:style>
+        <p:txBody>
+          <a:bodyPr wrap="none" lIns="25400" tIns="0" rIns="25400" bIns="0" rtlCol="0" anchor="ctr"/>
+          <a:lstStyle/>
+          <a:p>
+            <a:pPr algn="ctr"/>
+            <a:endParaRPr lang="en-US" sz="950" b="1" dirty="0">
+              <a:solidFill>
+                <a:srgbClr val="7A4306"/>
+              </a:solidFill>
+              <a:latin typeface="Consolas" panose="020B0609020204030204" pitchFamily="49" charset="0"/>
+            </a:endParaRPr>
+          </a:p>
+        </p:txBody>
+      </p:sp>
+      <p:sp>
+        <p:nvSpPr>
+          <p:cNvPr id="215" name="Rounded Rectangle 32 stack 2">
+            <a:extLst>
+              <a:ext uri="{FF2B5EF4-FFF2-40B4-BE49-F238E27FC236}">
+                <a16:creationId xmlns:a16="http://schemas.microsoft.com/office/drawing/2014/main" id="{70133638-5EED-2E35-582B-72D1C7414D40}"/>
+              </a:ext>
+            </a:extLst>
+          </p:cNvPr>
+          <p:cNvSpPr/>
+          <p:nvPr/>
+        </p:nvSpPr>
+        <p:spPr>
+          <a:xfrm>
+            <a:off x="6405880" y="2095500"/>
+            <a:ext cx="675640" cy="215900"/>
+          </a:xfrm>
+          <a:prstGeom prst="roundRect">
+            <a:avLst>
+              <a:gd name="adj" fmla="val 50000"/>
+            </a:avLst>
+          </a:prstGeom>
+          <a:solidFill>
+            <a:srgbClr val="FFFFFF">
+              <a:alpha val="40000"/>
+            </a:srgbClr>
+          </a:solidFill>
+          <a:ln w="12700" cap="flat" cmpd="sng" algn="ctr">
+            <a:solidFill>
+              <a:srgbClr val="C2700A">
+                <a:alpha val="30000"/>
+              </a:srgbClr>
+            </a:solidFill>
+            <a:prstDash val="solid"/>
+            <a:miter lim="800000"/>
+            <a:headEnd type="none" w="med" len="med"/>
+            <a:tailEnd type="none" w="med" len="med"/>
+          </a:ln>
+        </p:spPr>
+        <p:style>
+          <a:lnRef idx="2">
+            <a:schemeClr val="accent1">
+              <a:shade val="15000"/>
+            </a:schemeClr>
+          </a:lnRef>
+          <a:fillRef idx="1">
+            <a:schemeClr val="accent1"/>
+          </a:fillRef>
+          <a:effectRef idx="0">
+            <a:schemeClr val="accent1"/>
+          </a:effectRef>
+          <a:fontRef idx="minor">
+            <a:schemeClr val="lt1"/>
+          </a:fontRef>
+        </p:style>
+        <p:txBody>
+          <a:bodyPr wrap="none" lIns="25400" tIns="0" rIns="25400" bIns="0" rtlCol="0" anchor="ctr"/>
+          <a:lstStyle/>
+          <a:p>
+            <a:pPr algn="ctr"/>
+            <a:endParaRPr lang="en-US" sz="950" b="1" dirty="0">
+              <a:solidFill>
+                <a:srgbClr val="7A4306"/>
+              </a:solidFill>
+              <a:latin typeface="Consolas" panose="020B0609020204030204" pitchFamily="49" charset="0"/>
+            </a:endParaRPr>
+          </a:p>
+        </p:txBody>
+      </p:sp>
+      <p:sp>
+        <p:nvSpPr>
+          <p:cNvPr id="216" name="Rounded Rectangle 33 stack 2">
+            <a:extLst>
+              <a:ext uri="{FF2B5EF4-FFF2-40B4-BE49-F238E27FC236}">
+                <a16:creationId xmlns:a16="http://schemas.microsoft.com/office/drawing/2014/main" id="{22D0540F-E70B-E6ED-1D06-5626AED33045}"/>
+              </a:ext>
+            </a:extLst>
+          </p:cNvPr>
+          <p:cNvSpPr/>
+          <p:nvPr/>
+        </p:nvSpPr>
+        <p:spPr>
+          <a:xfrm>
+            <a:off x="7366000" y="2095500"/>
+            <a:ext cx="533400" cy="215900"/>
+          </a:xfrm>
+          <a:prstGeom prst="roundRect">
+            <a:avLst>
+              <a:gd name="adj" fmla="val 50000"/>
+            </a:avLst>
+          </a:prstGeom>
+          <a:solidFill>
+            <a:srgbClr val="FFFFFF">
+              <a:alpha val="40000"/>
+            </a:srgbClr>
+          </a:solidFill>
+          <a:ln w="12700" cap="flat" cmpd="sng" algn="ctr">
+            <a:solidFill>
+              <a:srgbClr val="C2700A">
+                <a:alpha val="30000"/>
+              </a:srgbClr>
+            </a:solidFill>
+            <a:prstDash val="solid"/>
+            <a:miter lim="800000"/>
+            <a:headEnd type="none" w="med" len="med"/>
+            <a:tailEnd type="none" w="med" len="med"/>
+          </a:ln>
+        </p:spPr>
+        <p:style>
+          <a:lnRef idx="2">
+            <a:schemeClr val="accent1">
+              <a:shade val="15000"/>
+            </a:schemeClr>
+          </a:lnRef>
+          <a:fillRef idx="1">
+            <a:schemeClr val="accent1"/>
+          </a:fillRef>
+          <a:effectRef idx="0">
+            <a:schemeClr val="accent1"/>
+          </a:effectRef>
+          <a:fontRef idx="minor">
+            <a:schemeClr val="lt1"/>
+          </a:fontRef>
+        </p:style>
+        <p:txBody>
+          <a:bodyPr wrap="none" lIns="25400" tIns="0" rIns="25400" bIns="0" rtlCol="0" anchor="ctr"/>
+          <a:lstStyle/>
+          <a:p>
+            <a:pPr algn="ctr"/>
+            <a:endParaRPr lang="en-US" sz="950" b="1" dirty="0">
+              <a:solidFill>
+                <a:srgbClr val="7A4306"/>
+              </a:solidFill>
+              <a:latin typeface="Consolas" panose="020B0609020204030204" pitchFamily="49" charset="0"/>
+            </a:endParaRPr>
+          </a:p>
+        </p:txBody>
+      </p:sp>
+      <p:cxnSp>
+        <p:nvCxnSpPr>
+          <p:cNvPr id="217" name="wire verack stack 2">
+            <a:extLst>
+              <a:ext uri="{FF2B5EF4-FFF2-40B4-BE49-F238E27FC236}">
+                <a16:creationId xmlns:a16="http://schemas.microsoft.com/office/drawing/2014/main" id="{D8B180A3-5C4D-394B-9C1F-92E56D70DF5B}"/>
+              </a:ext>
+            </a:extLst>
+          </p:cNvPr>
+          <p:cNvCxnSpPr/>
+          <p:nvPr/>
+        </p:nvCxnSpPr>
+        <p:spPr>
+          <a:xfrm>
+            <a:off x="1600200" y="1854200"/>
+            <a:ext cx="0" cy="1371600"/>
+          </a:xfrm>
+          <a:prstGeom prst="line">
+            <a:avLst/>
+          </a:prstGeom>
+          <a:ln w="22225" cap="flat" cmpd="sng" algn="ctr">
+            <a:solidFill>
+              <a:srgbClr val="C2700A">
+                <a:alpha val="30000"/>
+              </a:srgbClr>
+            </a:solidFill>
+            <a:prstDash val="solid"/>
+            <a:miter lim="800000"/>
+            <a:headEnd type="none" w="med" len="med"/>
+            <a:tailEnd type="triangle" w="med" len="med"/>
+          </a:ln>
+        </p:spPr>
+        <p:style>
+          <a:lnRef idx="2">
+            <a:schemeClr val="accent1"/>
+          </a:lnRef>
+          <a:fillRef idx="0">
+            <a:schemeClr val="accent1"/>
+          </a:fillRef>
+          <a:effectRef idx="1">
+            <a:schemeClr val="accent1"/>
+          </a:effectRef>
+          <a:fontRef idx="minor">
+            <a:schemeClr val="tx1"/>
+          </a:fontRef>
+        </p:style>
+      </p:cxnSp>
+      <p:sp>
+        <p:nvSpPr>
+          <p:cNvPr id="218" name="pill verack stack 2">
+            <a:extLst>
+              <a:ext uri="{FF2B5EF4-FFF2-40B4-BE49-F238E27FC236}">
+                <a16:creationId xmlns:a16="http://schemas.microsoft.com/office/drawing/2014/main" id="{BFE7C911-9B72-DD26-161B-48303809046C}"/>
+              </a:ext>
+            </a:extLst>
+          </p:cNvPr>
+          <p:cNvSpPr/>
+          <p:nvPr/>
+        </p:nvSpPr>
+        <p:spPr>
+          <a:xfrm>
+            <a:off x="1297940" y="2095500"/>
+            <a:ext cx="604520" cy="215900"/>
+          </a:xfrm>
+          <a:prstGeom prst="roundRect">
+            <a:avLst>
+              <a:gd name="adj" fmla="val 50000"/>
+            </a:avLst>
+          </a:prstGeom>
+          <a:solidFill>
+            <a:srgbClr val="FFFFFF">
+              <a:alpha val="40000"/>
+            </a:srgbClr>
+          </a:solidFill>
+          <a:ln w="12700" cap="flat" cmpd="sng" algn="ctr">
+            <a:solidFill>
+              <a:srgbClr val="C2700A">
+                <a:alpha val="30000"/>
+              </a:srgbClr>
+            </a:solidFill>
+            <a:prstDash val="solid"/>
+            <a:miter lim="800000"/>
+            <a:headEnd type="none" w="med" len="med"/>
+            <a:tailEnd type="none" w="med" len="med"/>
+          </a:ln>
+        </p:spPr>
+        <p:style>
+          <a:lnRef idx="2">
+            <a:schemeClr val="accent1">
+              <a:shade val="15000"/>
+            </a:schemeClr>
+          </a:lnRef>
+          <a:fillRef idx="1">
+            <a:schemeClr val="accent1"/>
+          </a:fillRef>
+          <a:effectRef idx="0">
+            <a:schemeClr val="accent1"/>
+          </a:effectRef>
+          <a:fontRef idx="minor">
+            <a:schemeClr val="lt1"/>
+          </a:fontRef>
+        </p:style>
+        <p:txBody>
+          <a:bodyPr wrap="none" lIns="25400" tIns="0" rIns="25400" bIns="0" rtlCol="0" anchor="ctr"/>
+          <a:lstStyle/>
+          <a:p>
+            <a:pPr algn="ctr"/>
+            <a:endParaRPr lang="en-US" sz="950" b="1" dirty="0">
+              <a:solidFill>
+                <a:srgbClr val="7A4306"/>
+              </a:solidFill>
+              <a:latin typeface="Consolas" panose="020B0609020204030204" pitchFamily="49" charset="0"/>
+            </a:endParaRPr>
+          </a:p>
+        </p:txBody>
+      </p:sp>
+      <p:cxnSp>
+        <p:nvCxnSpPr>
+          <p:cNvPr id="219" name="wire getheaders VerAck stack 2">
+            <a:extLst>
+              <a:ext uri="{FF2B5EF4-FFF2-40B4-BE49-F238E27FC236}">
+                <a16:creationId xmlns:a16="http://schemas.microsoft.com/office/drawing/2014/main" id="{1D87AD18-6DFA-4E7F-F8C9-0A0AA1B24EB9}"/>
+              </a:ext>
+            </a:extLst>
+          </p:cNvPr>
+          <p:cNvCxnSpPr/>
+          <p:nvPr/>
+        </p:nvCxnSpPr>
+        <p:spPr>
+          <a:xfrm flipV="1">
+            <a:off x="2489200" y="1854200"/>
+            <a:ext cx="0" cy="1371600"/>
+          </a:xfrm>
+          <a:prstGeom prst="line">
+            <a:avLst/>
+          </a:prstGeom>
+          <a:ln w="22225" cap="flat" cmpd="sng" algn="ctr">
+            <a:solidFill>
+              <a:srgbClr val="C2700A">
+                <a:alpha val="30000"/>
+              </a:srgbClr>
+            </a:solidFill>
+            <a:prstDash val="solid"/>
+            <a:miter lim="800000"/>
+            <a:headEnd type="none" w="med" len="med"/>
+            <a:tailEnd type="triangle" w="med" len="med"/>
+          </a:ln>
+        </p:spPr>
+        <p:style>
+          <a:lnRef idx="2">
+            <a:schemeClr val="accent1"/>
+          </a:lnRef>
+          <a:fillRef idx="0">
+            <a:schemeClr val="accent1"/>
+          </a:fillRef>
+          <a:effectRef idx="1">
+            <a:schemeClr val="accent1"/>
+          </a:effectRef>
+          <a:fontRef idx="minor">
+            <a:schemeClr val="tx1"/>
+          </a:fontRef>
+        </p:style>
+      </p:cxnSp>
+      <p:sp>
+        <p:nvSpPr>
+          <p:cNvPr id="220" name="pill getheaders VerAck stack 2">
+            <a:extLst>
+              <a:ext uri="{FF2B5EF4-FFF2-40B4-BE49-F238E27FC236}">
+                <a16:creationId xmlns:a16="http://schemas.microsoft.com/office/drawing/2014/main" id="{A0868E58-EAF1-AE71-6273-2A1910FE8D83}"/>
+              </a:ext>
+            </a:extLst>
+          </p:cNvPr>
+          <p:cNvSpPr/>
+          <p:nvPr/>
+        </p:nvSpPr>
+        <p:spPr>
+          <a:xfrm>
+            <a:off x="2044700" y="2095500"/>
+            <a:ext cx="889000" cy="215900"/>
+          </a:xfrm>
+          <a:prstGeom prst="roundRect">
+            <a:avLst>
+              <a:gd name="adj" fmla="val 50000"/>
+            </a:avLst>
+          </a:prstGeom>
+          <a:solidFill>
+            <a:srgbClr val="FFFFFF">
+              <a:alpha val="40000"/>
+            </a:srgbClr>
+          </a:solidFill>
+          <a:ln w="12700" cap="flat" cmpd="sng" algn="ctr">
+            <a:solidFill>
+              <a:srgbClr val="C2700A">
+                <a:alpha val="30000"/>
+              </a:srgbClr>
+            </a:solidFill>
+            <a:prstDash val="solid"/>
+            <a:miter lim="800000"/>
+            <a:headEnd type="none" w="med" len="med"/>
+            <a:tailEnd type="none" w="med" len="med"/>
+          </a:ln>
+        </p:spPr>
+        <p:style>
+          <a:lnRef idx="2">
+            <a:schemeClr val="accent1">
+              <a:shade val="15000"/>
+            </a:schemeClr>
+          </a:lnRef>
+          <a:fillRef idx="1">
+            <a:schemeClr val="accent1"/>
+          </a:fillRef>
+          <a:effectRef idx="0">
+            <a:schemeClr val="accent1"/>
+          </a:effectRef>
+          <a:fontRef idx="minor">
+            <a:schemeClr val="lt1"/>
+          </a:fontRef>
+        </p:style>
+        <p:txBody>
+          <a:bodyPr wrap="none" lIns="25400" tIns="0" rIns="25400" bIns="0" rtlCol="0" anchor="ctr"/>
+          <a:lstStyle/>
+          <a:p>
+            <a:pPr algn="ctr"/>
+            <a:endParaRPr lang="en-US" sz="950" b="1" dirty="0">
+              <a:solidFill>
+                <a:srgbClr val="7A4306"/>
+              </a:solidFill>
+              <a:latin typeface="Consolas" panose="020B0609020204030204" pitchFamily="49" charset="0"/>
+            </a:endParaRPr>
+          </a:p>
+        </p:txBody>
+      </p:sp>
+      <p:sp>
+        <p:nvSpPr>
+          <p:cNvPr id="221" name="badge 1 verack stack 2">
+            <a:extLst>
+              <a:ext uri="{FF2B5EF4-FFF2-40B4-BE49-F238E27FC236}">
+                <a16:creationId xmlns:a16="http://schemas.microsoft.com/office/drawing/2014/main" id="{D6EA3BD5-5375-63F0-CDD4-CF6E08E7F226}"/>
+              </a:ext>
+            </a:extLst>
+          </p:cNvPr>
+          <p:cNvSpPr/>
+          <p:nvPr/>
+        </p:nvSpPr>
+        <p:spPr>
+          <a:xfrm>
+            <a:off x="1517650" y="2393950"/>
+            <a:ext cx="165100" cy="165100"/>
+          </a:xfrm>
+          <a:prstGeom prst="ellipse">
+            <a:avLst/>
+          </a:prstGeom>
+          <a:solidFill>
+            <a:srgbClr val="C2700A">
+              <a:alpha val="40000"/>
+            </a:srgbClr>
+          </a:solidFill>
+          <a:ln w="9525" cap="flat" cmpd="sng" algn="ctr">
+            <a:solidFill>
+              <a:srgbClr val="FFFFFF">
+                <a:alpha val="30000"/>
+              </a:srgbClr>
+            </a:solidFill>
+            <a:prstDash val="solid"/>
+            <a:miter lim="800000"/>
+            <a:headEnd type="none" w="med" len="med"/>
+            <a:tailEnd type="none" w="med" len="med"/>
+          </a:ln>
+        </p:spPr>
+        <p:style>
+          <a:lnRef idx="2">
+            <a:schemeClr val="accent1">
+              <a:shade val="15000"/>
+            </a:schemeClr>
+          </a:lnRef>
+          <a:fillRef idx="1">
+            <a:schemeClr val="accent1"/>
+          </a:fillRef>
+          <a:effectRef idx="0">
+            <a:schemeClr val="accent1"/>
+          </a:effectRef>
+          <a:fontRef idx="minor">
+            <a:schemeClr val="lt1"/>
+          </a:fontRef>
+        </p:style>
+        <p:txBody>
+          <a:bodyPr wrap="none" lIns="0" tIns="0" rIns="0" bIns="0" rtlCol="0" anchor="ctr"/>
+          <a:lstStyle/>
+          <a:p>
+            <a:pPr algn="ctr"/>
+            <a:endParaRPr lang="en-US" sz="800" dirty="0">
+              <a:solidFill>
+                <a:srgbClr val="FFFFFF"/>
+              </a:solidFill>
+              <a:latin typeface="Segoe UI Semibold" panose="020B0702040204020203" pitchFamily="34" charset="0"/>
+            </a:endParaRPr>
+          </a:p>
+        </p:txBody>
+      </p:sp>
+      <p:sp>
+        <p:nvSpPr>
+          <p:cNvPr id="222" name="badge 2 getheaders VerAck stack 2">
+            <a:extLst>
+              <a:ext uri="{FF2B5EF4-FFF2-40B4-BE49-F238E27FC236}">
+                <a16:creationId xmlns:a16="http://schemas.microsoft.com/office/drawing/2014/main" id="{500DEA32-E4C3-8118-5C6B-7F8D7A1FFB67}"/>
+              </a:ext>
+            </a:extLst>
+          </p:cNvPr>
+          <p:cNvSpPr/>
+          <p:nvPr/>
+        </p:nvSpPr>
+        <p:spPr>
+          <a:xfrm>
+            <a:off x="2406650" y="2393950"/>
+            <a:ext cx="165100" cy="165100"/>
+          </a:xfrm>
+          <a:prstGeom prst="ellipse">
+            <a:avLst/>
+          </a:prstGeom>
+          <a:solidFill>
+            <a:srgbClr val="C2700A">
+              <a:alpha val="40000"/>
+            </a:srgbClr>
+          </a:solidFill>
+          <a:ln w="9525" cap="flat" cmpd="sng" algn="ctr">
+            <a:solidFill>
+              <a:srgbClr val="FFFFFF">
+                <a:alpha val="30000"/>
+              </a:srgbClr>
+            </a:solidFill>
+            <a:prstDash val="solid"/>
+            <a:miter lim="800000"/>
+            <a:headEnd type="none" w="med" len="med"/>
+            <a:tailEnd type="none" w="med" len="med"/>
+          </a:ln>
+        </p:spPr>
+        <p:style>
+          <a:lnRef idx="2">
+            <a:schemeClr val="accent1">
+              <a:shade val="15000"/>
+            </a:schemeClr>
+          </a:lnRef>
+          <a:fillRef idx="1">
+            <a:schemeClr val="accent1"/>
+          </a:fillRef>
+          <a:effectRef idx="0">
+            <a:schemeClr val="accent1"/>
+          </a:effectRef>
+          <a:fontRef idx="minor">
+            <a:schemeClr val="lt1"/>
+          </a:fontRef>
+        </p:style>
+        <p:txBody>
+          <a:bodyPr wrap="none" lIns="0" tIns="0" rIns="0" bIns="0" rtlCol="0" anchor="ctr"/>
+          <a:lstStyle/>
+          <a:p>
+            <a:pPr algn="ctr"/>
+            <a:endParaRPr lang="en-US" sz="800" dirty="0">
+              <a:solidFill>
+                <a:srgbClr val="FFFFFF"/>
+              </a:solidFill>
+              <a:latin typeface="Segoe UI Semibold" panose="020B0702040204020203" pitchFamily="34" charset="0"/>
+            </a:endParaRPr>
+          </a:p>
+        </p:txBody>
+      </p:sp>
+      <p:sp>
+        <p:nvSpPr>
+          <p:cNvPr id="223" name="badge 3 headers stack 2">
+            <a:extLst>
+              <a:ext uri="{FF2B5EF4-FFF2-40B4-BE49-F238E27FC236}">
+                <a16:creationId xmlns:a16="http://schemas.microsoft.com/office/drawing/2014/main" id="{1375C536-0940-B8E0-1C9C-0F219A64E867}"/>
+              </a:ext>
+            </a:extLst>
+          </p:cNvPr>
+          <p:cNvSpPr/>
+          <p:nvPr/>
+        </p:nvSpPr>
+        <p:spPr>
+          <a:xfrm>
+            <a:off x="3994150" y="2393950"/>
+            <a:ext cx="165100" cy="165100"/>
+          </a:xfrm>
+          <a:prstGeom prst="ellipse">
+            <a:avLst/>
+          </a:prstGeom>
+          <a:solidFill>
+            <a:srgbClr val="C2700A">
+              <a:alpha val="40000"/>
+            </a:srgbClr>
+          </a:solidFill>
+          <a:ln w="9525" cap="flat" cmpd="sng" algn="ctr">
+            <a:solidFill>
+              <a:srgbClr val="FFFFFF">
+                <a:alpha val="30000"/>
+              </a:srgbClr>
+            </a:solidFill>
+            <a:prstDash val="solid"/>
+            <a:miter lim="800000"/>
+            <a:headEnd type="none" w="med" len="med"/>
+            <a:tailEnd type="none" w="med" len="med"/>
+          </a:ln>
+        </p:spPr>
+        <p:style>
+          <a:lnRef idx="2">
+            <a:schemeClr val="accent1">
+              <a:shade val="15000"/>
+            </a:schemeClr>
+          </a:lnRef>
+          <a:fillRef idx="1">
+            <a:schemeClr val="accent1"/>
+          </a:fillRef>
+          <a:effectRef idx="0">
+            <a:schemeClr val="accent1"/>
+          </a:effectRef>
+          <a:fontRef idx="minor">
+            <a:schemeClr val="lt1"/>
+          </a:fontRef>
+        </p:style>
+        <p:txBody>
+          <a:bodyPr wrap="none" lIns="0" tIns="0" rIns="0" bIns="0" rtlCol="0" anchor="ctr"/>
+          <a:lstStyle/>
+          <a:p>
+            <a:pPr algn="ctr"/>
+            <a:endParaRPr lang="en-US" sz="800" dirty="0">
+              <a:solidFill>
+                <a:srgbClr val="FFFFFF"/>
+              </a:solidFill>
+              <a:latin typeface="Segoe UI Semibold" panose="020B0702040204020203" pitchFamily="34" charset="0"/>
+            </a:endParaRPr>
+          </a:p>
+        </p:txBody>
+      </p:sp>
+      <p:sp>
+        <p:nvSpPr>
+          <p:cNvPr id="224" name="badge 4 getheaders stack 2">
+            <a:extLst>
+              <a:ext uri="{FF2B5EF4-FFF2-40B4-BE49-F238E27FC236}">
+                <a16:creationId xmlns:a16="http://schemas.microsoft.com/office/drawing/2014/main" id="{8CF03B37-40D8-3D38-55D2-5B71913A6858}"/>
+              </a:ext>
+            </a:extLst>
+          </p:cNvPr>
+          <p:cNvSpPr/>
+          <p:nvPr/>
+        </p:nvSpPr>
+        <p:spPr>
+          <a:xfrm>
+            <a:off x="4883150" y="2393950"/>
+            <a:ext cx="165100" cy="165100"/>
+          </a:xfrm>
+          <a:prstGeom prst="ellipse">
+            <a:avLst/>
+          </a:prstGeom>
+          <a:solidFill>
+            <a:srgbClr val="C2700A">
+              <a:alpha val="40000"/>
+            </a:srgbClr>
+          </a:solidFill>
+          <a:ln w="9525" cap="flat" cmpd="sng" algn="ctr">
+            <a:solidFill>
+              <a:srgbClr val="FFFFFF">
+                <a:alpha val="30000"/>
+              </a:srgbClr>
+            </a:solidFill>
+            <a:prstDash val="solid"/>
+            <a:miter lim="800000"/>
+            <a:headEnd type="none" w="med" len="med"/>
+            <a:tailEnd type="none" w="med" len="med"/>
+          </a:ln>
+        </p:spPr>
+        <p:style>
+          <a:lnRef idx="2">
+            <a:schemeClr val="accent1">
+              <a:shade val="15000"/>
+            </a:schemeClr>
+          </a:lnRef>
+          <a:fillRef idx="1">
+            <a:schemeClr val="accent1"/>
+          </a:fillRef>
+          <a:effectRef idx="0">
+            <a:schemeClr val="accent1"/>
+          </a:effectRef>
+          <a:fontRef idx="minor">
+            <a:schemeClr val="lt1"/>
+          </a:fontRef>
+        </p:style>
+        <p:txBody>
+          <a:bodyPr wrap="none" lIns="0" tIns="0" rIns="0" bIns="0" rtlCol="0" anchor="ctr"/>
+          <a:lstStyle/>
+          <a:p>
+            <a:pPr algn="ctr"/>
+            <a:endParaRPr lang="en-US" sz="800" dirty="0">
+              <a:solidFill>
+                <a:srgbClr val="FFFFFF"/>
+              </a:solidFill>
+              <a:latin typeface="Segoe UI Semibold" panose="020B0702040204020203" pitchFamily="34" charset="0"/>
+            </a:endParaRPr>
+          </a:p>
+        </p:txBody>
+      </p:sp>
+      <p:sp>
+        <p:nvSpPr>
+          <p:cNvPr id="225" name="badge 5 getdata stack 2">
+            <a:extLst>
+              <a:ext uri="{FF2B5EF4-FFF2-40B4-BE49-F238E27FC236}">
+                <a16:creationId xmlns:a16="http://schemas.microsoft.com/office/drawing/2014/main" id="{E927BF4C-504A-BA85-EA7A-472242FC2A72}"/>
+              </a:ext>
+            </a:extLst>
+          </p:cNvPr>
+          <p:cNvSpPr/>
+          <p:nvPr/>
+        </p:nvSpPr>
+        <p:spPr>
+          <a:xfrm>
+            <a:off x="6661150" y="2393950"/>
+            <a:ext cx="165100" cy="165100"/>
+          </a:xfrm>
+          <a:prstGeom prst="ellipse">
+            <a:avLst/>
+          </a:prstGeom>
+          <a:solidFill>
+            <a:srgbClr val="C2700A">
+              <a:alpha val="40000"/>
+            </a:srgbClr>
+          </a:solidFill>
+          <a:ln w="9525" cap="flat" cmpd="sng" algn="ctr">
+            <a:solidFill>
+              <a:srgbClr val="FFFFFF">
+                <a:alpha val="30000"/>
+              </a:srgbClr>
+            </a:solidFill>
+            <a:prstDash val="solid"/>
+            <a:miter lim="800000"/>
+            <a:headEnd type="none" w="med" len="med"/>
+            <a:tailEnd type="none" w="med" len="med"/>
+          </a:ln>
+        </p:spPr>
+        <p:style>
+          <a:lnRef idx="2">
+            <a:schemeClr val="accent1">
+              <a:shade val="15000"/>
+            </a:schemeClr>
+          </a:lnRef>
+          <a:fillRef idx="1">
+            <a:schemeClr val="accent1"/>
+          </a:fillRef>
+          <a:effectRef idx="0">
+            <a:schemeClr val="accent1"/>
+          </a:effectRef>
+          <a:fontRef idx="minor">
+            <a:schemeClr val="lt1"/>
+          </a:fontRef>
+        </p:style>
+        <p:txBody>
+          <a:bodyPr wrap="none" lIns="0" tIns="0" rIns="0" bIns="0" rtlCol="0" anchor="ctr"/>
+          <a:lstStyle/>
+          <a:p>
+            <a:pPr algn="ctr"/>
+            <a:endParaRPr lang="en-US" sz="800" dirty="0">
+              <a:solidFill>
+                <a:srgbClr val="FFFFFF"/>
+              </a:solidFill>
+              <a:latin typeface="Segoe UI Semibold" panose="020B0702040204020203" pitchFamily="34" charset="0"/>
+            </a:endParaRPr>
+          </a:p>
+        </p:txBody>
+      </p:sp>
+      <p:sp>
+        <p:nvSpPr>
+          <p:cNvPr id="226" name="badge 6 block stack 2">
+            <a:extLst>
+              <a:ext uri="{FF2B5EF4-FFF2-40B4-BE49-F238E27FC236}">
+                <a16:creationId xmlns:a16="http://schemas.microsoft.com/office/drawing/2014/main" id="{71D7F02B-48D6-B1D5-A514-F10FFFC9E14A}"/>
+              </a:ext>
+            </a:extLst>
+          </p:cNvPr>
+          <p:cNvSpPr/>
+          <p:nvPr/>
+        </p:nvSpPr>
+        <p:spPr>
+          <a:xfrm>
+            <a:off x="7550150" y="2393950"/>
+            <a:ext cx="165100" cy="165100"/>
+          </a:xfrm>
+          <a:prstGeom prst="ellipse">
+            <a:avLst/>
+          </a:prstGeom>
+          <a:solidFill>
+            <a:srgbClr val="C2700A">
+              <a:alpha val="40000"/>
+            </a:srgbClr>
+          </a:solidFill>
+          <a:ln w="9525" cap="flat" cmpd="sng" algn="ctr">
+            <a:solidFill>
+              <a:srgbClr val="FFFFFF">
+                <a:alpha val="30000"/>
+              </a:srgbClr>
+            </a:solidFill>
+            <a:prstDash val="solid"/>
+            <a:miter lim="800000"/>
+            <a:headEnd type="none" w="med" len="med"/>
+            <a:tailEnd type="none" w="med" len="med"/>
+          </a:ln>
+        </p:spPr>
+        <p:style>
+          <a:lnRef idx="2">
+            <a:schemeClr val="accent1">
+              <a:shade val="15000"/>
+            </a:schemeClr>
+          </a:lnRef>
+          <a:fillRef idx="1">
+            <a:schemeClr val="accent1"/>
+          </a:fillRef>
+          <a:effectRef idx="0">
+            <a:schemeClr val="accent1"/>
+          </a:effectRef>
+          <a:fontRef idx="minor">
+            <a:schemeClr val="lt1"/>
+          </a:fontRef>
+        </p:style>
+        <p:txBody>
+          <a:bodyPr wrap="none" lIns="0" tIns="0" rIns="0" bIns="0" rtlCol="0" anchor="ctr"/>
+          <a:lstStyle/>
+          <a:p>
+            <a:pPr algn="ctr"/>
+            <a:endParaRPr lang="en-US" sz="800" dirty="0">
+              <a:solidFill>
+                <a:srgbClr val="FFFFFF"/>
+              </a:solidFill>
+              <a:latin typeface="Segoe UI Semibold" panose="020B0702040204020203" pitchFamily="34" charset="0"/>
+            </a:endParaRPr>
+          </a:p>
+        </p:txBody>
+      </p:sp>
+      <p:sp>
+        <p:nvSpPr>
           <p:cNvPr id="21" name="Peer stack 1">
             <a:extLst>
               <a:ext uri="{FF2B5EF4-FFF2-40B4-BE49-F238E27FC236}">
@@ -3619,7 +4786,7 @@
         </p:nvSpPr>
         <p:spPr>
           <a:xfrm>
-            <a:off x="838200" y="2768600"/>
+            <a:off x="800100" y="2743200"/>
             <a:ext cx="7747000" cy="1143000"/>
           </a:xfrm>
           <a:prstGeom prst="roundRect">
@@ -3666,6 +4833,1173 @@
           <a:p>
             <a:pPr algn="ctr"/>
             <a:endParaRPr lang="de-CH"/>
+          </a:p>
+        </p:txBody>
+      </p:sp>
+      <p:sp>
+        <p:nvSpPr>
+          <p:cNvPr id="189" name="remote peer stack 1">
+            <a:extLst>
+              <a:ext uri="{FF2B5EF4-FFF2-40B4-BE49-F238E27FC236}">
+                <a16:creationId xmlns:a16="http://schemas.microsoft.com/office/drawing/2014/main" id="{DCCE252A-B375-1BA1-A317-4FD35FCECC20}"/>
+              </a:ext>
+            </a:extLst>
+          </p:cNvPr>
+          <p:cNvSpPr/>
+          <p:nvPr/>
+        </p:nvSpPr>
+        <p:spPr>
+          <a:xfrm>
+            <a:off x="800100" y="1498600"/>
+            <a:ext cx="7747000" cy="330200"/>
+          </a:xfrm>
+          <a:prstGeom prst="roundRect">
+            <a:avLst>
+              <a:gd name="adj" fmla="val 30000"/>
+            </a:avLst>
+          </a:prstGeom>
+          <a:solidFill>
+            <a:srgbClr val="FDF0DC">
+              <a:alpha val="70000"/>
+            </a:srgbClr>
+          </a:solidFill>
+          <a:ln w="15875" cap="flat" cmpd="sng" algn="ctr">
+            <a:solidFill>
+              <a:srgbClr val="C2700A">
+                <a:alpha val="65000"/>
+              </a:srgbClr>
+            </a:solidFill>
+            <a:prstDash val="solid"/>
+            <a:miter lim="800000"/>
+            <a:headEnd type="none" w="med" len="med"/>
+            <a:tailEnd type="none" w="med" len="med"/>
+          </a:ln>
+        </p:spPr>
+        <p:style>
+          <a:lnRef idx="2">
+            <a:schemeClr val="accent1">
+              <a:shade val="15000"/>
+            </a:schemeClr>
+          </a:lnRef>
+          <a:fillRef idx="1">
+            <a:schemeClr val="accent1"/>
+          </a:fillRef>
+          <a:effectRef idx="0">
+            <a:schemeClr val="accent1"/>
+          </a:effectRef>
+          <a:fontRef idx="minor">
+            <a:schemeClr val="lt1"/>
+          </a:fontRef>
+        </p:style>
+        <p:txBody>
+          <a:bodyPr rtlCol="0" anchor="ctr"/>
+          <a:lstStyle/>
+          <a:p>
+            <a:pPr algn="ctr"/>
+            <a:endParaRPr lang="en-US" sz="1200" dirty="0">
+              <a:solidFill>
+                <a:srgbClr val="7A4306"/>
+              </a:solidFill>
+              <a:latin typeface="Segoe UI Semibold" panose="020B0702040204020203" pitchFamily="34" charset="0"/>
+            </a:endParaRPr>
+          </a:p>
+        </p:txBody>
+      </p:sp>
+      <p:cxnSp>
+        <p:nvCxnSpPr>
+          <p:cNvPr id="190" name="Straight Connector 14 stack 1">
+            <a:extLst>
+              <a:ext uri="{FF2B5EF4-FFF2-40B4-BE49-F238E27FC236}">
+                <a16:creationId xmlns:a16="http://schemas.microsoft.com/office/drawing/2014/main" id="{F449EE4F-AE2A-EDB1-6CAF-3ED288E500EB}"/>
+              </a:ext>
+            </a:extLst>
+          </p:cNvPr>
+          <p:cNvCxnSpPr/>
+          <p:nvPr/>
+        </p:nvCxnSpPr>
+        <p:spPr>
+          <a:xfrm flipV="1">
+            <a:off x="4927600" y="1828800"/>
+            <a:ext cx="0" cy="1371600"/>
+          </a:xfrm>
+          <a:prstGeom prst="line">
+            <a:avLst/>
+          </a:prstGeom>
+          <a:ln w="22225" cap="flat" cmpd="sng" algn="ctr">
+            <a:solidFill>
+              <a:srgbClr val="C2700A">
+                <a:alpha val="65000"/>
+              </a:srgbClr>
+            </a:solidFill>
+            <a:prstDash val="solid"/>
+            <a:miter lim="800000"/>
+            <a:headEnd type="none" w="med" len="med"/>
+            <a:tailEnd type="triangle" w="med" len="med"/>
+          </a:ln>
+        </p:spPr>
+        <p:style>
+          <a:lnRef idx="2">
+            <a:schemeClr val="accent1"/>
+          </a:lnRef>
+          <a:fillRef idx="0">
+            <a:schemeClr val="accent1"/>
+          </a:fillRef>
+          <a:effectRef idx="1">
+            <a:schemeClr val="accent1"/>
+          </a:effectRef>
+          <a:fontRef idx="minor">
+            <a:schemeClr val="tx1"/>
+          </a:fontRef>
+        </p:style>
+      </p:cxnSp>
+      <p:cxnSp>
+        <p:nvCxnSpPr>
+          <p:cNvPr id="191" name="Straight Connector 15 stack 1">
+            <a:extLst>
+              <a:ext uri="{FF2B5EF4-FFF2-40B4-BE49-F238E27FC236}">
+                <a16:creationId xmlns:a16="http://schemas.microsoft.com/office/drawing/2014/main" id="{D74D8805-BDE1-A4A4-A8FD-5F9FFB0019B0}"/>
+              </a:ext>
+            </a:extLst>
+          </p:cNvPr>
+          <p:cNvCxnSpPr/>
+          <p:nvPr/>
+        </p:nvCxnSpPr>
+        <p:spPr>
+          <a:xfrm>
+            <a:off x="4038600" y="1828800"/>
+            <a:ext cx="0" cy="1371600"/>
+          </a:xfrm>
+          <a:prstGeom prst="line">
+            <a:avLst/>
+          </a:prstGeom>
+          <a:ln w="22225" cap="flat" cmpd="sng" algn="ctr">
+            <a:solidFill>
+              <a:srgbClr val="C2700A">
+                <a:alpha val="65000"/>
+              </a:srgbClr>
+            </a:solidFill>
+            <a:prstDash val="solid"/>
+            <a:miter lim="800000"/>
+            <a:headEnd type="none" w="med" len="med"/>
+            <a:tailEnd type="triangle" w="med" len="med"/>
+          </a:ln>
+        </p:spPr>
+        <p:style>
+          <a:lnRef idx="2">
+            <a:schemeClr val="accent1"/>
+          </a:lnRef>
+          <a:fillRef idx="0">
+            <a:schemeClr val="accent1"/>
+          </a:fillRef>
+          <a:effectRef idx="1">
+            <a:schemeClr val="accent1"/>
+          </a:effectRef>
+          <a:fontRef idx="minor">
+            <a:schemeClr val="tx1"/>
+          </a:fontRef>
+        </p:style>
+      </p:cxnSp>
+      <p:cxnSp>
+        <p:nvCxnSpPr>
+          <p:cNvPr id="192" name="Straight Connector 30 stack 1">
+            <a:extLst>
+              <a:ext uri="{FF2B5EF4-FFF2-40B4-BE49-F238E27FC236}">
+                <a16:creationId xmlns:a16="http://schemas.microsoft.com/office/drawing/2014/main" id="{43416829-9B7B-D832-9D2A-BC2E45917A21}"/>
+              </a:ext>
+            </a:extLst>
+          </p:cNvPr>
+          <p:cNvCxnSpPr/>
+          <p:nvPr/>
+        </p:nvCxnSpPr>
+        <p:spPr>
+          <a:xfrm flipV="1">
+            <a:off x="6705600" y="1828800"/>
+            <a:ext cx="0" cy="1371600"/>
+          </a:xfrm>
+          <a:prstGeom prst="line">
+            <a:avLst/>
+          </a:prstGeom>
+          <a:ln w="22225" cap="flat" cmpd="sng" algn="ctr">
+            <a:solidFill>
+              <a:srgbClr val="C2700A">
+                <a:alpha val="65000"/>
+              </a:srgbClr>
+            </a:solidFill>
+            <a:prstDash val="solid"/>
+            <a:miter lim="800000"/>
+            <a:headEnd type="none" w="med" len="med"/>
+            <a:tailEnd type="triangle" w="med" len="med"/>
+          </a:ln>
+        </p:spPr>
+        <p:style>
+          <a:lnRef idx="2">
+            <a:schemeClr val="accent1"/>
+          </a:lnRef>
+          <a:fillRef idx="0">
+            <a:schemeClr val="accent1"/>
+          </a:fillRef>
+          <a:effectRef idx="1">
+            <a:schemeClr val="accent1"/>
+          </a:effectRef>
+          <a:fontRef idx="minor">
+            <a:schemeClr val="tx1"/>
+          </a:fontRef>
+        </p:style>
+      </p:cxnSp>
+      <p:cxnSp>
+        <p:nvCxnSpPr>
+          <p:cNvPr id="193" name="Straight Connector 31 stack 1">
+            <a:extLst>
+              <a:ext uri="{FF2B5EF4-FFF2-40B4-BE49-F238E27FC236}">
+                <a16:creationId xmlns:a16="http://schemas.microsoft.com/office/drawing/2014/main" id="{C0BA47FB-6856-F977-22A8-1DD2F3A2CBAD}"/>
+              </a:ext>
+            </a:extLst>
+          </p:cNvPr>
+          <p:cNvCxnSpPr/>
+          <p:nvPr/>
+        </p:nvCxnSpPr>
+        <p:spPr>
+          <a:xfrm>
+            <a:off x="7594600" y="1828800"/>
+            <a:ext cx="0" cy="1371600"/>
+          </a:xfrm>
+          <a:prstGeom prst="line">
+            <a:avLst/>
+          </a:prstGeom>
+          <a:ln w="22225" cap="flat" cmpd="sng" algn="ctr">
+            <a:solidFill>
+              <a:srgbClr val="C2700A">
+                <a:alpha val="65000"/>
+              </a:srgbClr>
+            </a:solidFill>
+            <a:prstDash val="solid"/>
+            <a:miter lim="800000"/>
+            <a:headEnd type="none" w="med" len="med"/>
+            <a:tailEnd type="triangle" w="med" len="med"/>
+          </a:ln>
+        </p:spPr>
+        <p:style>
+          <a:lnRef idx="2">
+            <a:schemeClr val="accent1"/>
+          </a:lnRef>
+          <a:fillRef idx="0">
+            <a:schemeClr val="accent1"/>
+          </a:fillRef>
+          <a:effectRef idx="1">
+            <a:schemeClr val="accent1"/>
+          </a:effectRef>
+          <a:fontRef idx="minor">
+            <a:schemeClr val="tx1"/>
+          </a:fontRef>
+        </p:style>
+      </p:cxnSp>
+      <p:sp>
+        <p:nvSpPr>
+          <p:cNvPr id="194" name="Rounded Rectangle 16 stack 1">
+            <a:extLst>
+              <a:ext uri="{FF2B5EF4-FFF2-40B4-BE49-F238E27FC236}">
+                <a16:creationId xmlns:a16="http://schemas.microsoft.com/office/drawing/2014/main" id="{7AF2D134-E9E6-62D3-927C-7A10989FB6E6}"/>
+              </a:ext>
+            </a:extLst>
+          </p:cNvPr>
+          <p:cNvSpPr/>
+          <p:nvPr/>
+        </p:nvSpPr>
+        <p:spPr>
+          <a:xfrm>
+            <a:off x="4483100" y="2070100"/>
+            <a:ext cx="889000" cy="215900"/>
+          </a:xfrm>
+          <a:prstGeom prst="roundRect">
+            <a:avLst>
+              <a:gd name="adj" fmla="val 50000"/>
+            </a:avLst>
+          </a:prstGeom>
+          <a:solidFill>
+            <a:srgbClr val="FFFFFF">
+              <a:alpha val="70000"/>
+            </a:srgbClr>
+          </a:solidFill>
+          <a:ln w="12700" cap="flat" cmpd="sng" algn="ctr">
+            <a:solidFill>
+              <a:srgbClr val="C2700A">
+                <a:alpha val="65000"/>
+              </a:srgbClr>
+            </a:solidFill>
+            <a:prstDash val="solid"/>
+            <a:miter lim="800000"/>
+            <a:headEnd type="none" w="med" len="med"/>
+            <a:tailEnd type="none" w="med" len="med"/>
+          </a:ln>
+        </p:spPr>
+        <p:style>
+          <a:lnRef idx="2">
+            <a:schemeClr val="accent1">
+              <a:shade val="15000"/>
+            </a:schemeClr>
+          </a:lnRef>
+          <a:fillRef idx="1">
+            <a:schemeClr val="accent1"/>
+          </a:fillRef>
+          <a:effectRef idx="0">
+            <a:schemeClr val="accent1"/>
+          </a:effectRef>
+          <a:fontRef idx="minor">
+            <a:schemeClr val="lt1"/>
+          </a:fontRef>
+        </p:style>
+        <p:txBody>
+          <a:bodyPr wrap="none" lIns="25400" tIns="0" rIns="25400" bIns="0" rtlCol="0" anchor="ctr"/>
+          <a:lstStyle/>
+          <a:p>
+            <a:pPr algn="ctr"/>
+            <a:endParaRPr lang="en-US" sz="950" b="1" dirty="0">
+              <a:solidFill>
+                <a:srgbClr val="7A4306"/>
+              </a:solidFill>
+              <a:latin typeface="Consolas" panose="020B0609020204030204" pitchFamily="49" charset="0"/>
+            </a:endParaRPr>
+          </a:p>
+        </p:txBody>
+      </p:sp>
+      <p:sp>
+        <p:nvSpPr>
+          <p:cNvPr id="195" name="Rounded Rectangle 17 stack 1">
+            <a:extLst>
+              <a:ext uri="{FF2B5EF4-FFF2-40B4-BE49-F238E27FC236}">
+                <a16:creationId xmlns:a16="http://schemas.microsoft.com/office/drawing/2014/main" id="{DC81FC58-33AE-360E-3AF7-EB5B9F87969F}"/>
+              </a:ext>
+            </a:extLst>
+          </p:cNvPr>
+          <p:cNvSpPr/>
+          <p:nvPr/>
+        </p:nvSpPr>
+        <p:spPr>
+          <a:xfrm>
+            <a:off x="3700780" y="2070100"/>
+            <a:ext cx="675640" cy="215900"/>
+          </a:xfrm>
+          <a:prstGeom prst="roundRect">
+            <a:avLst>
+              <a:gd name="adj" fmla="val 50000"/>
+            </a:avLst>
+          </a:prstGeom>
+          <a:solidFill>
+            <a:srgbClr val="FFFFFF">
+              <a:alpha val="70000"/>
+            </a:srgbClr>
+          </a:solidFill>
+          <a:ln w="12700" cap="flat" cmpd="sng" algn="ctr">
+            <a:solidFill>
+              <a:srgbClr val="C2700A">
+                <a:alpha val="65000"/>
+              </a:srgbClr>
+            </a:solidFill>
+            <a:prstDash val="solid"/>
+            <a:miter lim="800000"/>
+            <a:headEnd type="none" w="med" len="med"/>
+            <a:tailEnd type="none" w="med" len="med"/>
+          </a:ln>
+        </p:spPr>
+        <p:style>
+          <a:lnRef idx="2">
+            <a:schemeClr val="accent1">
+              <a:shade val="15000"/>
+            </a:schemeClr>
+          </a:lnRef>
+          <a:fillRef idx="1">
+            <a:schemeClr val="accent1"/>
+          </a:fillRef>
+          <a:effectRef idx="0">
+            <a:schemeClr val="accent1"/>
+          </a:effectRef>
+          <a:fontRef idx="minor">
+            <a:schemeClr val="lt1"/>
+          </a:fontRef>
+        </p:style>
+        <p:txBody>
+          <a:bodyPr wrap="none" lIns="25400" tIns="0" rIns="25400" bIns="0" rtlCol="0" anchor="ctr"/>
+          <a:lstStyle/>
+          <a:p>
+            <a:pPr algn="ctr"/>
+            <a:endParaRPr lang="en-US" sz="950" b="1" dirty="0">
+              <a:solidFill>
+                <a:srgbClr val="7A4306"/>
+              </a:solidFill>
+              <a:latin typeface="Consolas" panose="020B0609020204030204" pitchFamily="49" charset="0"/>
+            </a:endParaRPr>
+          </a:p>
+        </p:txBody>
+      </p:sp>
+      <p:sp>
+        <p:nvSpPr>
+          <p:cNvPr id="196" name="Rounded Rectangle 32 stack 1">
+            <a:extLst>
+              <a:ext uri="{FF2B5EF4-FFF2-40B4-BE49-F238E27FC236}">
+                <a16:creationId xmlns:a16="http://schemas.microsoft.com/office/drawing/2014/main" id="{0AA21423-0B19-075C-7F2B-980EE26A9AD9}"/>
+              </a:ext>
+            </a:extLst>
+          </p:cNvPr>
+          <p:cNvSpPr/>
+          <p:nvPr/>
+        </p:nvSpPr>
+        <p:spPr>
+          <a:xfrm>
+            <a:off x="6367780" y="2070100"/>
+            <a:ext cx="675640" cy="215900"/>
+          </a:xfrm>
+          <a:prstGeom prst="roundRect">
+            <a:avLst>
+              <a:gd name="adj" fmla="val 50000"/>
+            </a:avLst>
+          </a:prstGeom>
+          <a:solidFill>
+            <a:srgbClr val="FFFFFF">
+              <a:alpha val="70000"/>
+            </a:srgbClr>
+          </a:solidFill>
+          <a:ln w="12700" cap="flat" cmpd="sng" algn="ctr">
+            <a:solidFill>
+              <a:srgbClr val="C2700A">
+                <a:alpha val="65000"/>
+              </a:srgbClr>
+            </a:solidFill>
+            <a:prstDash val="solid"/>
+            <a:miter lim="800000"/>
+            <a:headEnd type="none" w="med" len="med"/>
+            <a:tailEnd type="none" w="med" len="med"/>
+          </a:ln>
+        </p:spPr>
+        <p:style>
+          <a:lnRef idx="2">
+            <a:schemeClr val="accent1">
+              <a:shade val="15000"/>
+            </a:schemeClr>
+          </a:lnRef>
+          <a:fillRef idx="1">
+            <a:schemeClr val="accent1"/>
+          </a:fillRef>
+          <a:effectRef idx="0">
+            <a:schemeClr val="accent1"/>
+          </a:effectRef>
+          <a:fontRef idx="minor">
+            <a:schemeClr val="lt1"/>
+          </a:fontRef>
+        </p:style>
+        <p:txBody>
+          <a:bodyPr wrap="none" lIns="25400" tIns="0" rIns="25400" bIns="0" rtlCol="0" anchor="ctr"/>
+          <a:lstStyle/>
+          <a:p>
+            <a:pPr algn="ctr"/>
+            <a:endParaRPr lang="en-US" sz="950" b="1" dirty="0">
+              <a:solidFill>
+                <a:srgbClr val="7A4306"/>
+              </a:solidFill>
+              <a:latin typeface="Consolas" panose="020B0609020204030204" pitchFamily="49" charset="0"/>
+            </a:endParaRPr>
+          </a:p>
+        </p:txBody>
+      </p:sp>
+      <p:sp>
+        <p:nvSpPr>
+          <p:cNvPr id="197" name="Rounded Rectangle 33 stack 1">
+            <a:extLst>
+              <a:ext uri="{FF2B5EF4-FFF2-40B4-BE49-F238E27FC236}">
+                <a16:creationId xmlns:a16="http://schemas.microsoft.com/office/drawing/2014/main" id="{906199BD-5141-E1E1-2B33-2A9414E55F67}"/>
+              </a:ext>
+            </a:extLst>
+          </p:cNvPr>
+          <p:cNvSpPr/>
+          <p:nvPr/>
+        </p:nvSpPr>
+        <p:spPr>
+          <a:xfrm>
+            <a:off x="7327900" y="2070100"/>
+            <a:ext cx="533400" cy="215900"/>
+          </a:xfrm>
+          <a:prstGeom prst="roundRect">
+            <a:avLst>
+              <a:gd name="adj" fmla="val 50000"/>
+            </a:avLst>
+          </a:prstGeom>
+          <a:solidFill>
+            <a:srgbClr val="FFFFFF">
+              <a:alpha val="70000"/>
+            </a:srgbClr>
+          </a:solidFill>
+          <a:ln w="12700" cap="flat" cmpd="sng" algn="ctr">
+            <a:solidFill>
+              <a:srgbClr val="C2700A">
+                <a:alpha val="65000"/>
+              </a:srgbClr>
+            </a:solidFill>
+            <a:prstDash val="solid"/>
+            <a:miter lim="800000"/>
+            <a:headEnd type="none" w="med" len="med"/>
+            <a:tailEnd type="none" w="med" len="med"/>
+          </a:ln>
+        </p:spPr>
+        <p:style>
+          <a:lnRef idx="2">
+            <a:schemeClr val="accent1">
+              <a:shade val="15000"/>
+            </a:schemeClr>
+          </a:lnRef>
+          <a:fillRef idx="1">
+            <a:schemeClr val="accent1"/>
+          </a:fillRef>
+          <a:effectRef idx="0">
+            <a:schemeClr val="accent1"/>
+          </a:effectRef>
+          <a:fontRef idx="minor">
+            <a:schemeClr val="lt1"/>
+          </a:fontRef>
+        </p:style>
+        <p:txBody>
+          <a:bodyPr wrap="none" lIns="25400" tIns="0" rIns="25400" bIns="0" rtlCol="0" anchor="ctr"/>
+          <a:lstStyle/>
+          <a:p>
+            <a:pPr algn="ctr"/>
+            <a:endParaRPr lang="en-US" sz="950" b="1" dirty="0">
+              <a:solidFill>
+                <a:srgbClr val="7A4306"/>
+              </a:solidFill>
+              <a:latin typeface="Consolas" panose="020B0609020204030204" pitchFamily="49" charset="0"/>
+            </a:endParaRPr>
+          </a:p>
+        </p:txBody>
+      </p:sp>
+      <p:cxnSp>
+        <p:nvCxnSpPr>
+          <p:cNvPr id="198" name="wire verack stack 1">
+            <a:extLst>
+              <a:ext uri="{FF2B5EF4-FFF2-40B4-BE49-F238E27FC236}">
+                <a16:creationId xmlns:a16="http://schemas.microsoft.com/office/drawing/2014/main" id="{1737C3DC-949A-62ED-0FDF-AA18E9500329}"/>
+              </a:ext>
+            </a:extLst>
+          </p:cNvPr>
+          <p:cNvCxnSpPr/>
+          <p:nvPr/>
+        </p:nvCxnSpPr>
+        <p:spPr>
+          <a:xfrm>
+            <a:off x="1562100" y="1828800"/>
+            <a:ext cx="0" cy="1371600"/>
+          </a:xfrm>
+          <a:prstGeom prst="line">
+            <a:avLst/>
+          </a:prstGeom>
+          <a:ln w="22225" cap="flat" cmpd="sng" algn="ctr">
+            <a:solidFill>
+              <a:srgbClr val="C2700A">
+                <a:alpha val="65000"/>
+              </a:srgbClr>
+            </a:solidFill>
+            <a:prstDash val="solid"/>
+            <a:miter lim="800000"/>
+            <a:headEnd type="none" w="med" len="med"/>
+            <a:tailEnd type="triangle" w="med" len="med"/>
+          </a:ln>
+        </p:spPr>
+        <p:style>
+          <a:lnRef idx="2">
+            <a:schemeClr val="accent1"/>
+          </a:lnRef>
+          <a:fillRef idx="0">
+            <a:schemeClr val="accent1"/>
+          </a:fillRef>
+          <a:effectRef idx="1">
+            <a:schemeClr val="accent1"/>
+          </a:effectRef>
+          <a:fontRef idx="minor">
+            <a:schemeClr val="tx1"/>
+          </a:fontRef>
+        </p:style>
+      </p:cxnSp>
+      <p:sp>
+        <p:nvSpPr>
+          <p:cNvPr id="199" name="pill verack stack 1">
+            <a:extLst>
+              <a:ext uri="{FF2B5EF4-FFF2-40B4-BE49-F238E27FC236}">
+                <a16:creationId xmlns:a16="http://schemas.microsoft.com/office/drawing/2014/main" id="{A4E48B1A-1180-8D11-ACFD-D67DE8E4ABE1}"/>
+              </a:ext>
+            </a:extLst>
+          </p:cNvPr>
+          <p:cNvSpPr/>
+          <p:nvPr/>
+        </p:nvSpPr>
+        <p:spPr>
+          <a:xfrm>
+            <a:off x="1259840" y="2070100"/>
+            <a:ext cx="604520" cy="215900"/>
+          </a:xfrm>
+          <a:prstGeom prst="roundRect">
+            <a:avLst>
+              <a:gd name="adj" fmla="val 50000"/>
+            </a:avLst>
+          </a:prstGeom>
+          <a:solidFill>
+            <a:srgbClr val="FFFFFF">
+              <a:alpha val="70000"/>
+            </a:srgbClr>
+          </a:solidFill>
+          <a:ln w="12700" cap="flat" cmpd="sng" algn="ctr">
+            <a:solidFill>
+              <a:srgbClr val="C2700A">
+                <a:alpha val="65000"/>
+              </a:srgbClr>
+            </a:solidFill>
+            <a:prstDash val="solid"/>
+            <a:miter lim="800000"/>
+            <a:headEnd type="none" w="med" len="med"/>
+            <a:tailEnd type="none" w="med" len="med"/>
+          </a:ln>
+        </p:spPr>
+        <p:style>
+          <a:lnRef idx="2">
+            <a:schemeClr val="accent1">
+              <a:shade val="15000"/>
+            </a:schemeClr>
+          </a:lnRef>
+          <a:fillRef idx="1">
+            <a:schemeClr val="accent1"/>
+          </a:fillRef>
+          <a:effectRef idx="0">
+            <a:schemeClr val="accent1"/>
+          </a:effectRef>
+          <a:fontRef idx="minor">
+            <a:schemeClr val="lt1"/>
+          </a:fontRef>
+        </p:style>
+        <p:txBody>
+          <a:bodyPr wrap="none" lIns="25400" tIns="0" rIns="25400" bIns="0" rtlCol="0" anchor="ctr"/>
+          <a:lstStyle/>
+          <a:p>
+            <a:pPr algn="ctr"/>
+            <a:endParaRPr lang="en-US" sz="950" b="1" dirty="0">
+              <a:solidFill>
+                <a:srgbClr val="7A4306"/>
+              </a:solidFill>
+              <a:latin typeface="Consolas" panose="020B0609020204030204" pitchFamily="49" charset="0"/>
+            </a:endParaRPr>
+          </a:p>
+        </p:txBody>
+      </p:sp>
+      <p:cxnSp>
+        <p:nvCxnSpPr>
+          <p:cNvPr id="200" name="wire getheaders VerAck stack 1">
+            <a:extLst>
+              <a:ext uri="{FF2B5EF4-FFF2-40B4-BE49-F238E27FC236}">
+                <a16:creationId xmlns:a16="http://schemas.microsoft.com/office/drawing/2014/main" id="{C8BA5599-64D9-CA84-935F-4A351BCE56FF}"/>
+              </a:ext>
+            </a:extLst>
+          </p:cNvPr>
+          <p:cNvCxnSpPr/>
+          <p:nvPr/>
+        </p:nvCxnSpPr>
+        <p:spPr>
+          <a:xfrm flipV="1">
+            <a:off x="2451100" y="1828800"/>
+            <a:ext cx="0" cy="1371600"/>
+          </a:xfrm>
+          <a:prstGeom prst="line">
+            <a:avLst/>
+          </a:prstGeom>
+          <a:ln w="22225" cap="flat" cmpd="sng" algn="ctr">
+            <a:solidFill>
+              <a:srgbClr val="C2700A">
+                <a:alpha val="65000"/>
+              </a:srgbClr>
+            </a:solidFill>
+            <a:prstDash val="solid"/>
+            <a:miter lim="800000"/>
+            <a:headEnd type="none" w="med" len="med"/>
+            <a:tailEnd type="triangle" w="med" len="med"/>
+          </a:ln>
+        </p:spPr>
+        <p:style>
+          <a:lnRef idx="2">
+            <a:schemeClr val="accent1"/>
+          </a:lnRef>
+          <a:fillRef idx="0">
+            <a:schemeClr val="accent1"/>
+          </a:fillRef>
+          <a:effectRef idx="1">
+            <a:schemeClr val="accent1"/>
+          </a:effectRef>
+          <a:fontRef idx="minor">
+            <a:schemeClr val="tx1"/>
+          </a:fontRef>
+        </p:style>
+      </p:cxnSp>
+      <p:sp>
+        <p:nvSpPr>
+          <p:cNvPr id="201" name="pill getheaders VerAck stack 1">
+            <a:extLst>
+              <a:ext uri="{FF2B5EF4-FFF2-40B4-BE49-F238E27FC236}">
+                <a16:creationId xmlns:a16="http://schemas.microsoft.com/office/drawing/2014/main" id="{73D6D53F-52A3-9C4D-1B98-05D9749A6824}"/>
+              </a:ext>
+            </a:extLst>
+          </p:cNvPr>
+          <p:cNvSpPr/>
+          <p:nvPr/>
+        </p:nvSpPr>
+        <p:spPr>
+          <a:xfrm>
+            <a:off x="2006600" y="2070100"/>
+            <a:ext cx="889000" cy="215900"/>
+          </a:xfrm>
+          <a:prstGeom prst="roundRect">
+            <a:avLst>
+              <a:gd name="adj" fmla="val 50000"/>
+            </a:avLst>
+          </a:prstGeom>
+          <a:solidFill>
+            <a:srgbClr val="FFFFFF">
+              <a:alpha val="70000"/>
+            </a:srgbClr>
+          </a:solidFill>
+          <a:ln w="12700" cap="flat" cmpd="sng" algn="ctr">
+            <a:solidFill>
+              <a:srgbClr val="C2700A">
+                <a:alpha val="65000"/>
+              </a:srgbClr>
+            </a:solidFill>
+            <a:prstDash val="solid"/>
+            <a:miter lim="800000"/>
+            <a:headEnd type="none" w="med" len="med"/>
+            <a:tailEnd type="none" w="med" len="med"/>
+          </a:ln>
+        </p:spPr>
+        <p:style>
+          <a:lnRef idx="2">
+            <a:schemeClr val="accent1">
+              <a:shade val="15000"/>
+            </a:schemeClr>
+          </a:lnRef>
+          <a:fillRef idx="1">
+            <a:schemeClr val="accent1"/>
+          </a:fillRef>
+          <a:effectRef idx="0">
+            <a:schemeClr val="accent1"/>
+          </a:effectRef>
+          <a:fontRef idx="minor">
+            <a:schemeClr val="lt1"/>
+          </a:fontRef>
+        </p:style>
+        <p:txBody>
+          <a:bodyPr wrap="none" lIns="25400" tIns="0" rIns="25400" bIns="0" rtlCol="0" anchor="ctr"/>
+          <a:lstStyle/>
+          <a:p>
+            <a:pPr algn="ctr"/>
+            <a:endParaRPr lang="en-US" sz="950" b="1" dirty="0">
+              <a:solidFill>
+                <a:srgbClr val="7A4306"/>
+              </a:solidFill>
+              <a:latin typeface="Consolas" panose="020B0609020204030204" pitchFamily="49" charset="0"/>
+            </a:endParaRPr>
+          </a:p>
+        </p:txBody>
+      </p:sp>
+      <p:sp>
+        <p:nvSpPr>
+          <p:cNvPr id="202" name="badge 1 verack stack 1">
+            <a:extLst>
+              <a:ext uri="{FF2B5EF4-FFF2-40B4-BE49-F238E27FC236}">
+                <a16:creationId xmlns:a16="http://schemas.microsoft.com/office/drawing/2014/main" id="{071653E3-68C5-B54F-EFC4-F97212423316}"/>
+              </a:ext>
+            </a:extLst>
+          </p:cNvPr>
+          <p:cNvSpPr/>
+          <p:nvPr/>
+        </p:nvSpPr>
+        <p:spPr>
+          <a:xfrm>
+            <a:off x="1479550" y="2368550"/>
+            <a:ext cx="165100" cy="165100"/>
+          </a:xfrm>
+          <a:prstGeom prst="ellipse">
+            <a:avLst/>
+          </a:prstGeom>
+          <a:solidFill>
+            <a:srgbClr val="C2700A">
+              <a:alpha val="70000"/>
+            </a:srgbClr>
+          </a:solidFill>
+          <a:ln w="9525" cap="flat" cmpd="sng" algn="ctr">
+            <a:solidFill>
+              <a:srgbClr val="FFFFFF">
+                <a:alpha val="65000"/>
+              </a:srgbClr>
+            </a:solidFill>
+            <a:prstDash val="solid"/>
+            <a:miter lim="800000"/>
+            <a:headEnd type="none" w="med" len="med"/>
+            <a:tailEnd type="none" w="med" len="med"/>
+          </a:ln>
+        </p:spPr>
+        <p:style>
+          <a:lnRef idx="2">
+            <a:schemeClr val="accent1">
+              <a:shade val="15000"/>
+            </a:schemeClr>
+          </a:lnRef>
+          <a:fillRef idx="1">
+            <a:schemeClr val="accent1"/>
+          </a:fillRef>
+          <a:effectRef idx="0">
+            <a:schemeClr val="accent1"/>
+          </a:effectRef>
+          <a:fontRef idx="minor">
+            <a:schemeClr val="lt1"/>
+          </a:fontRef>
+        </p:style>
+        <p:txBody>
+          <a:bodyPr wrap="none" lIns="0" tIns="0" rIns="0" bIns="0" rtlCol="0" anchor="ctr"/>
+          <a:lstStyle/>
+          <a:p>
+            <a:pPr algn="ctr"/>
+            <a:endParaRPr lang="en-US" sz="800" dirty="0">
+              <a:solidFill>
+                <a:srgbClr val="FFFFFF"/>
+              </a:solidFill>
+              <a:latin typeface="Segoe UI Semibold" panose="020B0702040204020203" pitchFamily="34" charset="0"/>
+            </a:endParaRPr>
+          </a:p>
+        </p:txBody>
+      </p:sp>
+      <p:sp>
+        <p:nvSpPr>
+          <p:cNvPr id="203" name="badge 2 getheaders VerAck stack 1">
+            <a:extLst>
+              <a:ext uri="{FF2B5EF4-FFF2-40B4-BE49-F238E27FC236}">
+                <a16:creationId xmlns:a16="http://schemas.microsoft.com/office/drawing/2014/main" id="{C06768D5-BB62-4F7F-07AA-9E6086998C21}"/>
+              </a:ext>
+            </a:extLst>
+          </p:cNvPr>
+          <p:cNvSpPr/>
+          <p:nvPr/>
+        </p:nvSpPr>
+        <p:spPr>
+          <a:xfrm>
+            <a:off x="2368550" y="2368550"/>
+            <a:ext cx="165100" cy="165100"/>
+          </a:xfrm>
+          <a:prstGeom prst="ellipse">
+            <a:avLst/>
+          </a:prstGeom>
+          <a:solidFill>
+            <a:srgbClr val="C2700A">
+              <a:alpha val="70000"/>
+            </a:srgbClr>
+          </a:solidFill>
+          <a:ln w="9525" cap="flat" cmpd="sng" algn="ctr">
+            <a:solidFill>
+              <a:srgbClr val="FFFFFF">
+                <a:alpha val="65000"/>
+              </a:srgbClr>
+            </a:solidFill>
+            <a:prstDash val="solid"/>
+            <a:miter lim="800000"/>
+            <a:headEnd type="none" w="med" len="med"/>
+            <a:tailEnd type="none" w="med" len="med"/>
+          </a:ln>
+        </p:spPr>
+        <p:style>
+          <a:lnRef idx="2">
+            <a:schemeClr val="accent1">
+              <a:shade val="15000"/>
+            </a:schemeClr>
+          </a:lnRef>
+          <a:fillRef idx="1">
+            <a:schemeClr val="accent1"/>
+          </a:fillRef>
+          <a:effectRef idx="0">
+            <a:schemeClr val="accent1"/>
+          </a:effectRef>
+          <a:fontRef idx="minor">
+            <a:schemeClr val="lt1"/>
+          </a:fontRef>
+        </p:style>
+        <p:txBody>
+          <a:bodyPr wrap="none" lIns="0" tIns="0" rIns="0" bIns="0" rtlCol="0" anchor="ctr"/>
+          <a:lstStyle/>
+          <a:p>
+            <a:pPr algn="ctr"/>
+            <a:endParaRPr lang="en-US" sz="800" dirty="0">
+              <a:solidFill>
+                <a:srgbClr val="FFFFFF"/>
+              </a:solidFill>
+              <a:latin typeface="Segoe UI Semibold" panose="020B0702040204020203" pitchFamily="34" charset="0"/>
+            </a:endParaRPr>
+          </a:p>
+        </p:txBody>
+      </p:sp>
+      <p:sp>
+        <p:nvSpPr>
+          <p:cNvPr id="204" name="badge 3 headers stack 1">
+            <a:extLst>
+              <a:ext uri="{FF2B5EF4-FFF2-40B4-BE49-F238E27FC236}">
+                <a16:creationId xmlns:a16="http://schemas.microsoft.com/office/drawing/2014/main" id="{FDDE3125-6BA1-AFB4-AF5C-08ED25CCDBF3}"/>
+              </a:ext>
+            </a:extLst>
+          </p:cNvPr>
+          <p:cNvSpPr/>
+          <p:nvPr/>
+        </p:nvSpPr>
+        <p:spPr>
+          <a:xfrm>
+            <a:off x="3956050" y="2368550"/>
+            <a:ext cx="165100" cy="165100"/>
+          </a:xfrm>
+          <a:prstGeom prst="ellipse">
+            <a:avLst/>
+          </a:prstGeom>
+          <a:solidFill>
+            <a:srgbClr val="C2700A">
+              <a:alpha val="70000"/>
+            </a:srgbClr>
+          </a:solidFill>
+          <a:ln w="9525" cap="flat" cmpd="sng" algn="ctr">
+            <a:solidFill>
+              <a:srgbClr val="FFFFFF">
+                <a:alpha val="65000"/>
+              </a:srgbClr>
+            </a:solidFill>
+            <a:prstDash val="solid"/>
+            <a:miter lim="800000"/>
+            <a:headEnd type="none" w="med" len="med"/>
+            <a:tailEnd type="none" w="med" len="med"/>
+          </a:ln>
+        </p:spPr>
+        <p:style>
+          <a:lnRef idx="2">
+            <a:schemeClr val="accent1">
+              <a:shade val="15000"/>
+            </a:schemeClr>
+          </a:lnRef>
+          <a:fillRef idx="1">
+            <a:schemeClr val="accent1"/>
+          </a:fillRef>
+          <a:effectRef idx="0">
+            <a:schemeClr val="accent1"/>
+          </a:effectRef>
+          <a:fontRef idx="minor">
+            <a:schemeClr val="lt1"/>
+          </a:fontRef>
+        </p:style>
+        <p:txBody>
+          <a:bodyPr wrap="none" lIns="0" tIns="0" rIns="0" bIns="0" rtlCol="0" anchor="ctr"/>
+          <a:lstStyle/>
+          <a:p>
+            <a:pPr algn="ctr"/>
+            <a:endParaRPr lang="en-US" sz="800" dirty="0">
+              <a:solidFill>
+                <a:srgbClr val="FFFFFF"/>
+              </a:solidFill>
+              <a:latin typeface="Segoe UI Semibold" panose="020B0702040204020203" pitchFamily="34" charset="0"/>
+            </a:endParaRPr>
+          </a:p>
+        </p:txBody>
+      </p:sp>
+      <p:sp>
+        <p:nvSpPr>
+          <p:cNvPr id="205" name="badge 4 getheaders stack 1">
+            <a:extLst>
+              <a:ext uri="{FF2B5EF4-FFF2-40B4-BE49-F238E27FC236}">
+                <a16:creationId xmlns:a16="http://schemas.microsoft.com/office/drawing/2014/main" id="{7F6BE0E4-A92E-1C1A-FA14-5DD7B2EB0600}"/>
+              </a:ext>
+            </a:extLst>
+          </p:cNvPr>
+          <p:cNvSpPr/>
+          <p:nvPr/>
+        </p:nvSpPr>
+        <p:spPr>
+          <a:xfrm>
+            <a:off x="4845050" y="2368550"/>
+            <a:ext cx="165100" cy="165100"/>
+          </a:xfrm>
+          <a:prstGeom prst="ellipse">
+            <a:avLst/>
+          </a:prstGeom>
+          <a:solidFill>
+            <a:srgbClr val="C2700A">
+              <a:alpha val="70000"/>
+            </a:srgbClr>
+          </a:solidFill>
+          <a:ln w="9525" cap="flat" cmpd="sng" algn="ctr">
+            <a:solidFill>
+              <a:srgbClr val="FFFFFF">
+                <a:alpha val="65000"/>
+              </a:srgbClr>
+            </a:solidFill>
+            <a:prstDash val="solid"/>
+            <a:miter lim="800000"/>
+            <a:headEnd type="none" w="med" len="med"/>
+            <a:tailEnd type="none" w="med" len="med"/>
+          </a:ln>
+        </p:spPr>
+        <p:style>
+          <a:lnRef idx="2">
+            <a:schemeClr val="accent1">
+              <a:shade val="15000"/>
+            </a:schemeClr>
+          </a:lnRef>
+          <a:fillRef idx="1">
+            <a:schemeClr val="accent1"/>
+          </a:fillRef>
+          <a:effectRef idx="0">
+            <a:schemeClr val="accent1"/>
+          </a:effectRef>
+          <a:fontRef idx="minor">
+            <a:schemeClr val="lt1"/>
+          </a:fontRef>
+        </p:style>
+        <p:txBody>
+          <a:bodyPr wrap="none" lIns="0" tIns="0" rIns="0" bIns="0" rtlCol="0" anchor="ctr"/>
+          <a:lstStyle/>
+          <a:p>
+            <a:pPr algn="ctr"/>
+            <a:endParaRPr lang="en-US" sz="800" dirty="0">
+              <a:solidFill>
+                <a:srgbClr val="FFFFFF"/>
+              </a:solidFill>
+              <a:latin typeface="Segoe UI Semibold" panose="020B0702040204020203" pitchFamily="34" charset="0"/>
+            </a:endParaRPr>
+          </a:p>
+        </p:txBody>
+      </p:sp>
+      <p:sp>
+        <p:nvSpPr>
+          <p:cNvPr id="206" name="badge 5 getdata stack 1">
+            <a:extLst>
+              <a:ext uri="{FF2B5EF4-FFF2-40B4-BE49-F238E27FC236}">
+                <a16:creationId xmlns:a16="http://schemas.microsoft.com/office/drawing/2014/main" id="{10085600-8722-3D26-BC3B-1353678C0DE1}"/>
+              </a:ext>
+            </a:extLst>
+          </p:cNvPr>
+          <p:cNvSpPr/>
+          <p:nvPr/>
+        </p:nvSpPr>
+        <p:spPr>
+          <a:xfrm>
+            <a:off x="6623050" y="2368550"/>
+            <a:ext cx="165100" cy="165100"/>
+          </a:xfrm>
+          <a:prstGeom prst="ellipse">
+            <a:avLst/>
+          </a:prstGeom>
+          <a:solidFill>
+            <a:srgbClr val="C2700A">
+              <a:alpha val="70000"/>
+            </a:srgbClr>
+          </a:solidFill>
+          <a:ln w="9525" cap="flat" cmpd="sng" algn="ctr">
+            <a:solidFill>
+              <a:srgbClr val="FFFFFF">
+                <a:alpha val="65000"/>
+              </a:srgbClr>
+            </a:solidFill>
+            <a:prstDash val="solid"/>
+            <a:miter lim="800000"/>
+            <a:headEnd type="none" w="med" len="med"/>
+            <a:tailEnd type="none" w="med" len="med"/>
+          </a:ln>
+        </p:spPr>
+        <p:style>
+          <a:lnRef idx="2">
+            <a:schemeClr val="accent1">
+              <a:shade val="15000"/>
+            </a:schemeClr>
+          </a:lnRef>
+          <a:fillRef idx="1">
+            <a:schemeClr val="accent1"/>
+          </a:fillRef>
+          <a:effectRef idx="0">
+            <a:schemeClr val="accent1"/>
+          </a:effectRef>
+          <a:fontRef idx="minor">
+            <a:schemeClr val="lt1"/>
+          </a:fontRef>
+        </p:style>
+        <p:txBody>
+          <a:bodyPr wrap="none" lIns="0" tIns="0" rIns="0" bIns="0" rtlCol="0" anchor="ctr"/>
+          <a:lstStyle/>
+          <a:p>
+            <a:pPr algn="ctr"/>
+            <a:endParaRPr lang="en-US" sz="800" dirty="0">
+              <a:solidFill>
+                <a:srgbClr val="FFFFFF"/>
+              </a:solidFill>
+              <a:latin typeface="Segoe UI Semibold" panose="020B0702040204020203" pitchFamily="34" charset="0"/>
+            </a:endParaRPr>
+          </a:p>
+        </p:txBody>
+      </p:sp>
+      <p:sp>
+        <p:nvSpPr>
+          <p:cNvPr id="207" name="badge 6 block stack 1">
+            <a:extLst>
+              <a:ext uri="{FF2B5EF4-FFF2-40B4-BE49-F238E27FC236}">
+                <a16:creationId xmlns:a16="http://schemas.microsoft.com/office/drawing/2014/main" id="{3F96D569-ED7C-DA63-756B-A56C8438287B}"/>
+              </a:ext>
+            </a:extLst>
+          </p:cNvPr>
+          <p:cNvSpPr/>
+          <p:nvPr/>
+        </p:nvSpPr>
+        <p:spPr>
+          <a:xfrm>
+            <a:off x="7512050" y="2368550"/>
+            <a:ext cx="165100" cy="165100"/>
+          </a:xfrm>
+          <a:prstGeom prst="ellipse">
+            <a:avLst/>
+          </a:prstGeom>
+          <a:solidFill>
+            <a:srgbClr val="C2700A">
+              <a:alpha val="70000"/>
+            </a:srgbClr>
+          </a:solidFill>
+          <a:ln w="9525" cap="flat" cmpd="sng" algn="ctr">
+            <a:solidFill>
+              <a:srgbClr val="FFFFFF">
+                <a:alpha val="65000"/>
+              </a:srgbClr>
+            </a:solidFill>
+            <a:prstDash val="solid"/>
+            <a:miter lim="800000"/>
+            <a:headEnd type="none" w="med" len="med"/>
+            <a:tailEnd type="none" w="med" len="med"/>
+          </a:ln>
+        </p:spPr>
+        <p:style>
+          <a:lnRef idx="2">
+            <a:schemeClr val="accent1">
+              <a:shade val="15000"/>
+            </a:schemeClr>
+          </a:lnRef>
+          <a:fillRef idx="1">
+            <a:schemeClr val="accent1"/>
+          </a:fillRef>
+          <a:effectRef idx="0">
+            <a:schemeClr val="accent1"/>
+          </a:effectRef>
+          <a:fontRef idx="minor">
+            <a:schemeClr val="lt1"/>
+          </a:fontRef>
+        </p:style>
+        <p:txBody>
+          <a:bodyPr wrap="none" lIns="0" tIns="0" rIns="0" bIns="0" rtlCol="0" anchor="ctr"/>
+          <a:lstStyle/>
+          <a:p>
+            <a:pPr algn="ctr"/>
+            <a:endParaRPr lang="en-US" sz="800" dirty="0">
+              <a:solidFill>
+                <a:srgbClr val="FFFFFF"/>
+              </a:solidFill>
+              <a:latin typeface="Segoe UI Semibold" panose="020B0702040204020203" pitchFamily="34" charset="0"/>
+            </a:endParaRPr>
           </a:p>
         </p:txBody>
       </p:sp>
@@ -4483,7 +6817,7 @@
         </p:nvSpPr>
         <p:spPr>
           <a:xfrm>
-            <a:off x="1656642" y="4419600"/>
+            <a:off x="938323" y="4584412"/>
             <a:ext cx="801501" cy="292388"/>
           </a:xfrm>
           <a:prstGeom prst="rect">
@@ -5852,7 +8186,7 @@
         </p:nvSpPr>
         <p:spPr>
           <a:xfrm>
-            <a:off x="6438899" y="5321300"/>
+            <a:off x="6413500" y="5143500"/>
             <a:ext cx="1397000" cy="254000"/>
           </a:xfrm>
           <a:prstGeom prst="rect">
@@ -6043,7 +8377,7 @@
         <p:spPr>
           <a:xfrm>
             <a:off x="7112000" y="3759200"/>
-            <a:ext cx="25399" cy="1562100"/>
+            <a:ext cx="0" cy="1384300"/>
           </a:xfrm>
           <a:prstGeom prst="straightConnector1">
             <a:avLst/>
@@ -6088,8 +8422,8 @@
         </p:nvCxnSpPr>
         <p:spPr>
           <a:xfrm flipV="1">
-            <a:off x="7835899" y="4889500"/>
-            <a:ext cx="1536701" cy="558800"/>
+            <a:off x="7810500" y="4889500"/>
+            <a:ext cx="1562100" cy="381000"/>
           </a:xfrm>
           <a:prstGeom prst="bentConnector3">
             <a:avLst>
@@ -6136,8 +8470,8 @@
         </p:nvCxnSpPr>
         <p:spPr>
           <a:xfrm flipV="1">
-            <a:off x="7835899" y="5219700"/>
-            <a:ext cx="1536701" cy="228600"/>
+            <a:off x="7810500" y="5219700"/>
+            <a:ext cx="1562100" cy="50800"/>
           </a:xfrm>
           <a:prstGeom prst="bentConnector3">
             <a:avLst>
@@ -6266,8 +8600,8 @@
         </p:nvCxnSpPr>
         <p:spPr>
           <a:xfrm>
-            <a:off x="7835899" y="5448300"/>
-            <a:ext cx="1536701" cy="190500"/>
+            <a:off x="7810500" y="5270500"/>
+            <a:ext cx="1562100" cy="368300"/>
           </a:xfrm>
           <a:prstGeom prst="bentConnector3">
             <a:avLst>
@@ -6310,7 +8644,7 @@
         </p:nvSpPr>
         <p:spPr>
           <a:xfrm>
-            <a:off x="4597400" y="5348025"/>
+            <a:off x="4597400" y="5170225"/>
             <a:ext cx="558800" cy="203200"/>
           </a:xfrm>
           <a:prstGeom prst="rect">
@@ -6380,7 +8714,7 @@
         </p:nvSpPr>
         <p:spPr>
           <a:xfrm>
-            <a:off x="787400" y="5348025"/>
+            <a:off x="787400" y="5170225"/>
             <a:ext cx="558800" cy="203200"/>
           </a:xfrm>
           <a:prstGeom prst="rect">
@@ -6444,7 +8778,7 @@
         </p:nvSpPr>
         <p:spPr>
           <a:xfrm>
-            <a:off x="1422400" y="5348025"/>
+            <a:off x="1422400" y="5170225"/>
             <a:ext cx="558800" cy="203200"/>
           </a:xfrm>
           <a:prstGeom prst="rect">
@@ -6510,7 +8844,7 @@
         </p:nvCxnSpPr>
         <p:spPr>
           <a:xfrm>
-            <a:off x="1346200" y="5449625"/>
+            <a:off x="1346200" y="5271825"/>
             <a:ext cx="76200" cy="0"/>
           </a:xfrm>
           <a:prstGeom prst="straightConnector1">
@@ -6551,7 +8885,7 @@
         </p:nvSpPr>
         <p:spPr>
           <a:xfrm>
-            <a:off x="2057400" y="5348025"/>
+            <a:off x="2057400" y="5170225"/>
             <a:ext cx="558800" cy="203200"/>
           </a:xfrm>
           <a:prstGeom prst="rect">
@@ -6617,7 +8951,7 @@
         </p:nvCxnSpPr>
         <p:spPr>
           <a:xfrm>
-            <a:off x="1981200" y="5449625"/>
+            <a:off x="1981200" y="5271825"/>
             <a:ext cx="76200" cy="0"/>
           </a:xfrm>
           <a:prstGeom prst="straightConnector1">
@@ -6658,7 +8992,7 @@
         </p:nvSpPr>
         <p:spPr>
           <a:xfrm>
-            <a:off x="3327400" y="5348025"/>
+            <a:off x="3327400" y="5170225"/>
             <a:ext cx="558800" cy="203200"/>
           </a:xfrm>
           <a:prstGeom prst="rect">
@@ -6724,7 +9058,7 @@
         </p:nvCxnSpPr>
         <p:spPr>
           <a:xfrm>
-            <a:off x="2616200" y="5449625"/>
+            <a:off x="2616200" y="5271825"/>
             <a:ext cx="76200" cy="0"/>
           </a:xfrm>
           <a:prstGeom prst="straightConnector1">
@@ -6765,7 +9099,63 @@
         </p:nvSpPr>
         <p:spPr>
           <a:xfrm>
-            <a:off x="2425700" y="5678225"/>
+            <a:off x="1790700" y="5500425"/>
+            <a:ext cx="1168400" cy="749300"/>
+          </a:xfrm>
+          <a:prstGeom prst="roundRect">
+            <a:avLst>
+              <a:gd name="adj" fmla="val 10169"/>
+            </a:avLst>
+          </a:prstGeom>
+          <a:solidFill>
+            <a:srgbClr val="AF98EA"/>
+          </a:solidFill>
+          <a:ln w="12700">
+            <a:solidFill>
+              <a:srgbClr val="6D28D9"/>
+            </a:solidFill>
+          </a:ln>
+        </p:spPr>
+        <p:style>
+          <a:lnRef idx="2">
+            <a:schemeClr val="accent1">
+              <a:shade val="15000"/>
+            </a:schemeClr>
+          </a:lnRef>
+          <a:fillRef idx="1">
+            <a:schemeClr val="accent1"/>
+          </a:fillRef>
+          <a:effectRef idx="0">
+            <a:schemeClr val="accent1"/>
+          </a:effectRef>
+          <a:fontRef idx="minor">
+            <a:schemeClr val="lt1"/>
+          </a:fontRef>
+        </p:style>
+        <p:txBody>
+          <a:bodyPr rtlCol="0" anchor="ctr"/>
+          <a:lstStyle/>
+          <a:p>
+            <a:pPr algn="ctr"/>
+            <a:endParaRPr lang="de-CH"/>
+          </a:p>
+        </p:txBody>
+      </p:sp>
+      <p:sp>
+        <p:nvSpPr>
+          <p:cNvPr id="89" name="Branch child 2">
+            <a:extLst>
+              <a:ext uri="{FF2B5EF4-FFF2-40B4-BE49-F238E27FC236}">
+                <a16:creationId xmlns:a16="http://schemas.microsoft.com/office/drawing/2014/main" id="{2CAE123B-2F0C-BEB1-F7DC-A53D24657CC2}"/>
+              </a:ext>
+            </a:extLst>
+          </p:cNvPr>
+          <p:cNvSpPr/>
+          <p:nvPr/>
+        </p:nvSpPr>
+        <p:spPr>
+          <a:xfrm>
+            <a:off x="3695700" y="5500425"/>
             <a:ext cx="1168400" cy="558800"/>
           </a:xfrm>
           <a:prstGeom prst="roundRect">
@@ -6809,10 +9199,10 @@
       </p:sp>
       <p:sp>
         <p:nvSpPr>
-          <p:cNvPr id="89" name="Branch child 2">
-            <a:extLst>
-              <a:ext uri="{FF2B5EF4-FFF2-40B4-BE49-F238E27FC236}">
-                <a16:creationId xmlns:a16="http://schemas.microsoft.com/office/drawing/2014/main" id="{2CAE123B-2F0C-BEB1-F7DC-A53D24657CC2}"/>
+          <p:cNvPr id="92" name="Branch grandchild 1.2">
+            <a:extLst>
+              <a:ext uri="{FF2B5EF4-FFF2-40B4-BE49-F238E27FC236}">
+                <a16:creationId xmlns:a16="http://schemas.microsoft.com/office/drawing/2014/main" id="{C2EB0164-371C-D566-AD32-2A01EC6427B6}"/>
               </a:ext>
             </a:extLst>
           </p:cNvPr>
@@ -6821,68 +9211,12 @@
         </p:nvSpPr>
         <p:spPr>
           <a:xfrm>
-            <a:off x="3695700" y="5678225"/>
-            <a:ext cx="1168400" cy="558800"/>
+            <a:off x="2006600" y="5881425"/>
+            <a:ext cx="647700" cy="292100"/>
           </a:xfrm>
           <a:prstGeom prst="roundRect">
             <a:avLst>
-              <a:gd name="adj" fmla="val 13636"/>
-            </a:avLst>
-          </a:prstGeom>
-          <a:solidFill>
-            <a:srgbClr val="AF98EA"/>
-          </a:solidFill>
-          <a:ln w="12700">
-            <a:solidFill>
-              <a:srgbClr val="6D28D9"/>
-            </a:solidFill>
-          </a:ln>
-        </p:spPr>
-        <p:style>
-          <a:lnRef idx="2">
-            <a:schemeClr val="accent1">
-              <a:shade val="15000"/>
-            </a:schemeClr>
-          </a:lnRef>
-          <a:fillRef idx="1">
-            <a:schemeClr val="accent1"/>
-          </a:fillRef>
-          <a:effectRef idx="0">
-            <a:schemeClr val="accent1"/>
-          </a:effectRef>
-          <a:fontRef idx="minor">
-            <a:schemeClr val="lt1"/>
-          </a:fontRef>
-        </p:style>
-        <p:txBody>
-          <a:bodyPr rtlCol="0" anchor="ctr"/>
-          <a:lstStyle/>
-          <a:p>
-            <a:pPr algn="ctr"/>
-            <a:endParaRPr lang="de-CH"/>
-          </a:p>
-        </p:txBody>
-      </p:sp>
-      <p:sp>
-        <p:nvSpPr>
-          <p:cNvPr id="92" name="Branch grandchild 1.2">
-            <a:extLst>
-              <a:ext uri="{FF2B5EF4-FFF2-40B4-BE49-F238E27FC236}">
-                <a16:creationId xmlns:a16="http://schemas.microsoft.com/office/drawing/2014/main" id="{C2EB0164-371C-D566-AD32-2A01EC6427B6}"/>
-              </a:ext>
-            </a:extLst>
-          </p:cNvPr>
-          <p:cNvSpPr/>
-          <p:nvPr/>
-        </p:nvSpPr>
-        <p:spPr>
-          <a:xfrm>
-            <a:off x="2641600" y="5932225"/>
-            <a:ext cx="647700" cy="228600"/>
-          </a:xfrm>
-          <a:prstGeom prst="roundRect">
-            <a:avLst>
-              <a:gd name="adj" fmla="val 22222"/>
+              <a:gd name="adj" fmla="val 17391"/>
             </a:avLst>
           </a:prstGeom>
           <a:solidFill>
@@ -6933,7 +9267,71 @@
         </p:nvSpPr>
         <p:spPr>
           <a:xfrm>
-            <a:off x="2501900" y="5754425"/>
+            <a:off x="1866900" y="5576625"/>
+            <a:ext cx="304800" cy="101600"/>
+          </a:xfrm>
+          <a:prstGeom prst="rect">
+            <a:avLst/>
+          </a:prstGeom>
+          <a:solidFill>
+            <a:srgbClr val="F5F2FD"/>
+          </a:solidFill>
+          <a:ln w="6350">
+            <a:solidFill>
+              <a:srgbClr val="6D28D9"/>
+            </a:solidFill>
+          </a:ln>
+        </p:spPr>
+        <p:style>
+          <a:lnRef idx="2">
+            <a:schemeClr val="accent1">
+              <a:shade val="15000"/>
+            </a:schemeClr>
+          </a:lnRef>
+          <a:fillRef idx="1">
+            <a:schemeClr val="accent1"/>
+          </a:fillRef>
+          <a:effectRef idx="0">
+            <a:schemeClr val="accent1"/>
+          </a:effectRef>
+          <a:fontRef idx="minor">
+            <a:schemeClr val="lt1"/>
+          </a:fontRef>
+        </p:style>
+        <p:txBody>
+          <a:bodyPr wrap="none" lIns="0" tIns="0" rIns="0" bIns="0" rtlCol="0" anchor="ctr">
+            <a:noAutofit/>
+          </a:bodyPr>
+          <a:lstStyle/>
+          <a:p>
+            <a:pPr algn="ctr"/>
+            <a:r>
+              <a:rPr lang="de-CH" sz="600" b="1">
+                <a:solidFill>
+                  <a:srgbClr val="3B1E7A"/>
+                </a:solidFill>
+                <a:latin typeface="Consolas" panose="020B0609020204030204" pitchFamily="49" charset="0"/>
+              </a:rPr>
+              <a:t>2</a:t>
+            </a:r>
+          </a:p>
+        </p:txBody>
+      </p:sp>
+      <p:sp>
+        <p:nvSpPr>
+          <p:cNvPr id="125" name="Branch child 1.header 2">
+            <a:extLst>
+              <a:ext uri="{FF2B5EF4-FFF2-40B4-BE49-F238E27FC236}">
+                <a16:creationId xmlns:a16="http://schemas.microsoft.com/office/drawing/2014/main" id="{ECD21137-BB4D-A1BA-60F8-898DACA39C8B}"/>
+              </a:ext>
+            </a:extLst>
+          </p:cNvPr>
+          <p:cNvSpPr/>
+          <p:nvPr/>
+        </p:nvSpPr>
+        <p:spPr>
+          <a:xfrm>
+            <a:off x="2222500" y="5576625"/>
             <a:ext cx="304800" cy="101600"/>
           </a:xfrm>
           <a:prstGeom prst="rect">
@@ -6985,10 +9383,10 @@
       </p:sp>
       <p:sp>
         <p:nvSpPr>
-          <p:cNvPr id="125" name="Branch child 1.header 2">
-            <a:extLst>
-              <a:ext uri="{FF2B5EF4-FFF2-40B4-BE49-F238E27FC236}">
-                <a16:creationId xmlns:a16="http://schemas.microsoft.com/office/drawing/2014/main" id="{ECD21137-BB4D-A1BA-60F8-898DACA39C8B}"/>
+          <p:cNvPr id="127" name="Branch child 1.header 3">
+            <a:extLst>
+              <a:ext uri="{FF2B5EF4-FFF2-40B4-BE49-F238E27FC236}">
+                <a16:creationId xmlns:a16="http://schemas.microsoft.com/office/drawing/2014/main" id="{F7827AB9-99F9-4565-DB78-8F2F553F0393}"/>
               </a:ext>
             </a:extLst>
           </p:cNvPr>
@@ -6997,7 +9395,7 @@
         </p:nvSpPr>
         <p:spPr>
           <a:xfrm>
-            <a:off x="2857500" y="5754425"/>
+            <a:off x="2578100" y="5576625"/>
             <a:ext cx="304800" cy="101600"/>
           </a:xfrm>
           <a:prstGeom prst="rect">
@@ -7029,7 +9427,10 @@
           </a:fontRef>
         </p:style>
         <p:txBody>
-          <a:bodyPr wrap="none" lIns="0" tIns="0" rIns="0" bIns="0" rtlCol="0" anchor="ctr">
+          <a:bodyPr rot="0" spcFirstLastPara="0" vertOverflow="overflow" horzOverflow="overflow" vert="horz" wrap="none" lIns="0" tIns="0" rIns="0" bIns="0" numCol="1" spcCol="0" rtlCol="0" fromWordArt="0" anchor="ctr" anchorCtr="0" forceAA="0" compatLnSpc="1">
+            <a:prstTxWarp prst="textNoShape">
+              <a:avLst/>
+            </a:prstTxWarp>
             <a:noAutofit/>
           </a:bodyPr>
           <a:lstStyle/>
@@ -7047,70 +9448,6 @@
           </a:p>
         </p:txBody>
       </p:sp>
-      <p:sp>
-        <p:nvSpPr>
-          <p:cNvPr id="127" name="Branch child 1.header 3">
-            <a:extLst>
-              <a:ext uri="{FF2B5EF4-FFF2-40B4-BE49-F238E27FC236}">
-                <a16:creationId xmlns:a16="http://schemas.microsoft.com/office/drawing/2014/main" id="{F7827AB9-99F9-4565-DB78-8F2F553F0393}"/>
-              </a:ext>
-            </a:extLst>
-          </p:cNvPr>
-          <p:cNvSpPr/>
-          <p:nvPr/>
-        </p:nvSpPr>
-        <p:spPr>
-          <a:xfrm>
-            <a:off x="3213100" y="5754425"/>
-            <a:ext cx="304800" cy="101600"/>
-          </a:xfrm>
-          <a:prstGeom prst="rect">
-            <a:avLst/>
-          </a:prstGeom>
-          <a:solidFill>
-            <a:srgbClr val="FF0000"/>
-          </a:solidFill>
-          <a:ln w="6350">
-            <a:solidFill>
-              <a:srgbClr val="6D28D9"/>
-            </a:solidFill>
-          </a:ln>
-        </p:spPr>
-        <p:style>
-          <a:lnRef idx="2">
-            <a:schemeClr val="accent1">
-              <a:shade val="15000"/>
-            </a:schemeClr>
-          </a:lnRef>
-          <a:fillRef idx="1">
-            <a:schemeClr val="accent1"/>
-          </a:fillRef>
-          <a:effectRef idx="0">
-            <a:schemeClr val="accent1"/>
-          </a:effectRef>
-          <a:fontRef idx="minor">
-            <a:schemeClr val="lt1"/>
-          </a:fontRef>
-        </p:style>
-        <p:txBody>
-          <a:bodyPr wrap="none" lIns="0" tIns="0" rIns="0" bIns="0" rtlCol="0" anchor="ctr">
-            <a:noAutofit/>
-          </a:bodyPr>
-          <a:lstStyle/>
-          <a:p>
-            <a:pPr algn="ctr"/>
-            <a:r>
-              <a:rPr lang="de-CH" sz="600" b="1">
-                <a:solidFill>
-                  <a:srgbClr val="FFFFFF"/>
-                </a:solidFill>
-                <a:latin typeface="Consolas" panose="020B0609020204030204" pitchFamily="49" charset="0"/>
-              </a:rPr>
-              <a:t>5</a:t>
-            </a:r>
-          </a:p>
-        </p:txBody>
-      </p:sp>
       <p:cxnSp>
         <p:nvCxnSpPr>
           <p:cNvPr id="126" name="Branch child 1.header link 1">
@@ -7127,7 +9464,7 @@
         </p:nvCxnSpPr>
         <p:spPr>
           <a:xfrm>
-            <a:off x="2806700" y="5805225"/>
+            <a:off x="2171700" y="5627425"/>
             <a:ext cx="50800" cy="0"/>
           </a:xfrm>
           <a:prstGeom prst="straightConnector1">
@@ -7170,7 +9507,7 @@
         </p:nvCxnSpPr>
         <p:spPr>
           <a:xfrm>
-            <a:off x="3162300" y="5805225"/>
+            <a:off x="2527300" y="5627425"/>
             <a:ext cx="50800" cy="0"/>
           </a:xfrm>
           <a:prstGeom prst="straightConnector1">
@@ -7211,7 +9548,71 @@
         </p:nvSpPr>
         <p:spPr>
           <a:xfrm>
-            <a:off x="2717799" y="6008425"/>
+            <a:off x="2082799" y="5957625"/>
+            <a:ext cx="228600" cy="76200"/>
+          </a:xfrm>
+          <a:prstGeom prst="rect">
+            <a:avLst/>
+          </a:prstGeom>
+          <a:solidFill>
+            <a:srgbClr val="F5F2FD"/>
+          </a:solidFill>
+          <a:ln w="6350">
+            <a:solidFill>
+              <a:srgbClr val="6D28D9"/>
+            </a:solidFill>
+          </a:ln>
+        </p:spPr>
+        <p:style>
+          <a:lnRef idx="2">
+            <a:schemeClr val="accent1">
+              <a:shade val="15000"/>
+            </a:schemeClr>
+          </a:lnRef>
+          <a:fillRef idx="1">
+            <a:schemeClr val="accent1"/>
+          </a:fillRef>
+          <a:effectRef idx="0">
+            <a:schemeClr val="accent1"/>
+          </a:effectRef>
+          <a:fontRef idx="minor">
+            <a:schemeClr val="lt1"/>
+          </a:fontRef>
+        </p:style>
+        <p:txBody>
+          <a:bodyPr wrap="none" lIns="0" tIns="0" rIns="0" bIns="0" rtlCol="0" anchor="ctr">
+            <a:noAutofit/>
+          </a:bodyPr>
+          <a:lstStyle/>
+          <a:p>
+            <a:pPr algn="ctr"/>
+            <a:r>
+              <a:rPr lang="de-CH" sz="500" b="1">
+                <a:solidFill>
+                  <a:srgbClr val="3B1E7A"/>
+                </a:solidFill>
+                <a:latin typeface="Consolas" panose="020B0609020204030204" pitchFamily="49" charset="0"/>
+              </a:rPr>
+              <a:t>3</a:t>
+            </a:r>
+          </a:p>
+        </p:txBody>
+      </p:sp>
+      <p:sp>
+        <p:nvSpPr>
+          <p:cNvPr id="133" name="Branch grandchild 1.2.header 2">
+            <a:extLst>
+              <a:ext uri="{FF2B5EF4-FFF2-40B4-BE49-F238E27FC236}">
+                <a16:creationId xmlns:a16="http://schemas.microsoft.com/office/drawing/2014/main" id="{44B94ECC-9180-B254-C628-9D535AB6F930}"/>
+              </a:ext>
+            </a:extLst>
+          </p:cNvPr>
+          <p:cNvSpPr/>
+          <p:nvPr/>
+        </p:nvSpPr>
+        <p:spPr>
+          <a:xfrm>
+            <a:off x="2349499" y="5957625"/>
             <a:ext cx="228600" cy="76200"/>
           </a:xfrm>
           <a:prstGeom prst="rect">
@@ -7261,70 +9662,6 @@
           </a:p>
         </p:txBody>
       </p:sp>
-      <p:sp>
-        <p:nvSpPr>
-          <p:cNvPr id="133" name="Branch grandchild 1.2.header 2">
-            <a:extLst>
-              <a:ext uri="{FF2B5EF4-FFF2-40B4-BE49-F238E27FC236}">
-                <a16:creationId xmlns:a16="http://schemas.microsoft.com/office/drawing/2014/main" id="{44B94ECC-9180-B254-C628-9D535AB6F930}"/>
-              </a:ext>
-            </a:extLst>
-          </p:cNvPr>
-          <p:cNvSpPr/>
-          <p:nvPr/>
-        </p:nvSpPr>
-        <p:spPr>
-          <a:xfrm>
-            <a:off x="2984499" y="6008425"/>
-            <a:ext cx="228600" cy="76200"/>
-          </a:xfrm>
-          <a:prstGeom prst="rect">
-            <a:avLst/>
-          </a:prstGeom>
-          <a:solidFill>
-            <a:srgbClr val="F5F2FD"/>
-          </a:solidFill>
-          <a:ln w="6350">
-            <a:solidFill>
-              <a:srgbClr val="6D28D9"/>
-            </a:solidFill>
-          </a:ln>
-        </p:spPr>
-        <p:style>
-          <a:lnRef idx="2">
-            <a:schemeClr val="accent1">
-              <a:shade val="15000"/>
-            </a:schemeClr>
-          </a:lnRef>
-          <a:fillRef idx="1">
-            <a:schemeClr val="accent1"/>
-          </a:fillRef>
-          <a:effectRef idx="0">
-            <a:schemeClr val="accent1"/>
-          </a:effectRef>
-          <a:fontRef idx="minor">
-            <a:schemeClr val="lt1"/>
-          </a:fontRef>
-        </p:style>
-        <p:txBody>
-          <a:bodyPr wrap="none" lIns="0" tIns="0" rIns="0" bIns="0" rtlCol="0" anchor="ctr">
-            <a:noAutofit/>
-          </a:bodyPr>
-          <a:lstStyle/>
-          <a:p>
-            <a:pPr algn="ctr"/>
-            <a:r>
-              <a:rPr lang="de-CH" sz="500" b="1">
-                <a:solidFill>
-                  <a:srgbClr val="3B1E7A"/>
-                </a:solidFill>
-                <a:latin typeface="Consolas" panose="020B0609020204030204" pitchFamily="49" charset="0"/>
-              </a:rPr>
-              <a:t>5</a:t>
-            </a:r>
-          </a:p>
-        </p:txBody>
-      </p:sp>
       <p:cxnSp>
         <p:nvCxnSpPr>
           <p:cNvPr id="134" name="Branch grandchild 1.2.header link 1">
@@ -7341,7 +9678,7 @@
         </p:nvCxnSpPr>
         <p:spPr>
           <a:xfrm>
-            <a:off x="2946400" y="6046525"/>
+            <a:off x="2311400" y="5995725"/>
             <a:ext cx="38100" cy="0"/>
           </a:xfrm>
           <a:prstGeom prst="straightConnector1">
@@ -7382,7 +9719,7 @@
         </p:nvSpPr>
         <p:spPr>
           <a:xfrm>
-            <a:off x="3771900" y="5754425"/>
+            <a:off x="3771900" y="5576625"/>
             <a:ext cx="304800" cy="101600"/>
           </a:xfrm>
           <a:prstGeom prst="rect">
@@ -7446,7 +9783,7 @@
         </p:nvSpPr>
         <p:spPr>
           <a:xfrm>
-            <a:off x="4127500" y="5754425"/>
+            <a:off x="4127500" y="5576625"/>
             <a:ext cx="304800" cy="101600"/>
           </a:xfrm>
           <a:prstGeom prst="rect">
@@ -7510,7 +9847,7 @@
         </p:nvSpPr>
         <p:spPr>
           <a:xfrm>
-            <a:off x="4483100" y="5754425"/>
+            <a:off x="4483100" y="5576625"/>
             <a:ext cx="304800" cy="101600"/>
           </a:xfrm>
           <a:prstGeom prst="rect">
@@ -7576,7 +9913,7 @@
         </p:nvCxnSpPr>
         <p:spPr>
           <a:xfrm>
-            <a:off x="4076700" y="5805225"/>
+            <a:off x="4076700" y="5627425"/>
             <a:ext cx="50800" cy="0"/>
           </a:xfrm>
           <a:prstGeom prst="straightConnector1">
@@ -7619,7 +9956,7 @@
         </p:nvCxnSpPr>
         <p:spPr>
           <a:xfrm>
-            <a:off x="4432300" y="5805225"/>
+            <a:off x="4432300" y="5627425"/>
             <a:ext cx="50800" cy="0"/>
           </a:xfrm>
           <a:prstGeom prst="straightConnector1">
@@ -7662,7 +9999,7 @@
         </p:nvCxnSpPr>
         <p:spPr>
           <a:xfrm>
-            <a:off x="3886200" y="5449625"/>
+            <a:off x="3886200" y="5271825"/>
             <a:ext cx="76200" cy="0"/>
           </a:xfrm>
           <a:prstGeom prst="straightConnector1">
@@ -7700,14 +10037,13 @@
           </p:cNvPr>
           <p:cNvCxnSpPr>
             <a:cxnSpLocks/>
-            <a:endCxn id="103" idx="0"/>
           </p:cNvCxnSpPr>
           <p:nvPr/>
         </p:nvCxnSpPr>
         <p:spPr>
           <a:xfrm>
             <a:off x="4876800" y="3759200"/>
-            <a:ext cx="0" cy="1588825"/>
+            <a:ext cx="0" cy="1411025"/>
           </a:xfrm>
           <a:prstGeom prst="straightConnector1">
             <a:avLst/>
@@ -7750,50 +10086,7 @@
         </p:nvCxnSpPr>
         <p:spPr>
           <a:xfrm>
-            <a:off x="2654300" y="5449625"/>
-            <a:ext cx="0" cy="304800"/>
-          </a:xfrm>
-          <a:prstGeom prst="straightConnector1">
-            <a:avLst/>
-          </a:prstGeom>
-          <a:ln w="6350">
-            <a:solidFill>
-              <a:srgbClr val="6D28D9"/>
-            </a:solidFill>
-          </a:ln>
-        </p:spPr>
-        <p:style>
-          <a:lnRef idx="2">
-            <a:schemeClr val="accent1"/>
-          </a:lnRef>
-          <a:fillRef idx="0">
-            <a:schemeClr val="accent1"/>
-          </a:fillRef>
-          <a:effectRef idx="1">
-            <a:schemeClr val="accent1"/>
-          </a:effectRef>
-          <a:fontRef idx="minor">
-            <a:schemeClr val="tx1"/>
-          </a:fontRef>
-        </p:style>
-      </p:cxnSp>
-      <p:cxnSp>
-        <p:nvCxnSpPr>
-          <p:cNvPr id="164" name="fork root -&gt; child 2">
-            <a:extLst>
-              <a:ext uri="{FF2B5EF4-FFF2-40B4-BE49-F238E27FC236}">
-                <a16:creationId xmlns:a16="http://schemas.microsoft.com/office/drawing/2014/main" id="{7AD9CD69-EDD3-2D2B-7FB1-DF9AE3E69908}"/>
-              </a:ext>
-            </a:extLst>
-          </p:cNvPr>
-          <p:cNvCxnSpPr>
-            <a:cxnSpLocks/>
-          </p:cNvCxnSpPr>
-          <p:nvPr/>
-        </p:nvCxnSpPr>
-        <p:spPr>
-          <a:xfrm>
-            <a:off x="3924300" y="5449625"/>
+            <a:off x="2019300" y="5271825"/>
             <a:ext cx="0" cy="304800"/>
           </a:xfrm>
           <a:prstGeom prst="straightConnector1">
@@ -7836,8 +10129,8 @@
         </p:nvCxnSpPr>
         <p:spPr>
           <a:xfrm>
-            <a:off x="2832100" y="5805225"/>
-            <a:ext cx="0" cy="203200"/>
+            <a:off x="2197100" y="5627425"/>
+            <a:ext cx="0" cy="330200"/>
           </a:xfrm>
           <a:prstGeom prst="straightConnector1">
             <a:avLst/>
@@ -7877,7 +10170,7 @@
         </p:nvSpPr>
         <p:spPr>
           <a:xfrm>
-            <a:off x="3962400" y="5348025"/>
+            <a:off x="3962400" y="5170225"/>
             <a:ext cx="558800" cy="203200"/>
           </a:xfrm>
           <a:prstGeom prst="rect">
@@ -7943,7 +10236,7 @@
         </p:nvCxnSpPr>
         <p:spPr>
           <a:xfrm>
-            <a:off x="4521200" y="5449625"/>
+            <a:off x="4521200" y="5271825"/>
             <a:ext cx="76200" cy="0"/>
           </a:xfrm>
           <a:prstGeom prst="straightConnector1">
@@ -7984,7 +10277,7 @@
         </p:nvSpPr>
         <p:spPr>
           <a:xfrm>
-            <a:off x="1257300" y="4992425"/>
+            <a:off x="2527300" y="4814625"/>
             <a:ext cx="889000" cy="127000"/>
           </a:xfrm>
           <a:prstGeom prst="rect">
@@ -8048,7 +10341,7 @@
         </p:nvCxnSpPr>
         <p:spPr>
           <a:xfrm>
-            <a:off x="1701800" y="5119425"/>
+            <a:off x="2971800" y="4941625"/>
             <a:ext cx="0" cy="228600"/>
           </a:xfrm>
           <a:prstGeom prst="straightConnector1">
@@ -8091,7 +10384,7 @@
         </p:nvSpPr>
         <p:spPr>
           <a:xfrm>
-            <a:off x="2692400" y="5348025"/>
+            <a:off x="2692400" y="5170225"/>
             <a:ext cx="558800" cy="203200"/>
           </a:xfrm>
           <a:prstGeom prst="rect">
@@ -8157,13 +10450,240 @@
         </p:nvCxnSpPr>
         <p:spPr>
           <a:xfrm>
-            <a:off x="3251200" y="5449625"/>
+            <a:off x="3251200" y="5271825"/>
             <a:ext cx="76200" cy="0"/>
           </a:xfrm>
           <a:prstGeom prst="straightConnector1">
             <a:avLst/>
           </a:prstGeom>
           <a:ln w="9525">
+            <a:solidFill>
+              <a:srgbClr val="6D28D9"/>
+            </a:solidFill>
+          </a:ln>
+        </p:spPr>
+        <p:style>
+          <a:lnRef idx="2">
+            <a:schemeClr val="accent1"/>
+          </a:lnRef>
+          <a:fillRef idx="0">
+            <a:schemeClr val="accent1"/>
+          </a:fillRef>
+          <a:effectRef idx="1">
+            <a:schemeClr val="accent1"/>
+          </a:effectRef>
+          <a:fontRef idx="minor">
+            <a:schemeClr val="tx1"/>
+          </a:fontRef>
+        </p:style>
+      </p:cxnSp>
+      <p:sp>
+        <p:nvSpPr>
+          <p:cNvPr id="184" name="Branch grandchild 1.2.Blocks">
+            <a:extLst>
+              <a:ext uri="{FF2B5EF4-FFF2-40B4-BE49-F238E27FC236}">
+                <a16:creationId xmlns:a16="http://schemas.microsoft.com/office/drawing/2014/main" id="{D2A8E2A1-CD19-69C8-578B-B31383E87F28}"/>
+              </a:ext>
+            </a:extLst>
+          </p:cNvPr>
+          <p:cNvSpPr/>
+          <p:nvPr/>
+        </p:nvSpPr>
+        <p:spPr>
+          <a:xfrm>
+            <a:off x="2273300" y="6057900"/>
+            <a:ext cx="304800" cy="76200"/>
+          </a:xfrm>
+          <a:prstGeom prst="rect">
+            <a:avLst/>
+          </a:prstGeom>
+          <a:solidFill>
+            <a:srgbClr val="F5F2FD"/>
+          </a:solidFill>
+          <a:ln w="6350">
+            <a:solidFill>
+              <a:srgbClr val="6D28D9"/>
+            </a:solidFill>
+          </a:ln>
+        </p:spPr>
+        <p:style>
+          <a:lnRef idx="2">
+            <a:schemeClr val="accent1">
+              <a:shade val="15000"/>
+            </a:schemeClr>
+          </a:lnRef>
+          <a:fillRef idx="1">
+            <a:schemeClr val="accent1"/>
+          </a:fillRef>
+          <a:effectRef idx="0">
+            <a:schemeClr val="accent1"/>
+          </a:effectRef>
+          <a:fontRef idx="minor">
+            <a:schemeClr val="lt1"/>
+          </a:fontRef>
+        </p:style>
+        <p:txBody>
+          <a:bodyPr wrap="none" lIns="0" tIns="0" rIns="0" bIns="0" rtlCol="0" anchor="ctr"/>
+          <a:lstStyle/>
+          <a:p>
+            <a:pPr algn="ctr"/>
+            <a:r>
+              <a:rPr lang="de-CH" sz="500" b="1">
+                <a:solidFill>
+                  <a:srgbClr val="3B1E7A"/>
+                </a:solidFill>
+                <a:latin typeface="Consolas" panose="020B0609020204030204" pitchFamily="49" charset="0"/>
+              </a:rPr>
+              <a:t>Blocks</a:t>
+            </a:r>
+          </a:p>
+        </p:txBody>
+      </p:sp>
+      <p:sp>
+        <p:nvSpPr>
+          <p:cNvPr id="185" name="Branch child 1.Blocks">
+            <a:extLst>
+              <a:ext uri="{FF2B5EF4-FFF2-40B4-BE49-F238E27FC236}">
+                <a16:creationId xmlns:a16="http://schemas.microsoft.com/office/drawing/2014/main" id="{F281F3E1-BBA7-34AF-626B-840337B334A8}"/>
+              </a:ext>
+            </a:extLst>
+          </p:cNvPr>
+          <p:cNvSpPr/>
+          <p:nvPr/>
+        </p:nvSpPr>
+        <p:spPr>
+          <a:xfrm>
+            <a:off x="2501900" y="5727700"/>
+            <a:ext cx="381000" cy="101600"/>
+          </a:xfrm>
+          <a:prstGeom prst="rect">
+            <a:avLst/>
+          </a:prstGeom>
+          <a:solidFill>
+            <a:srgbClr val="F5F2FD"/>
+          </a:solidFill>
+          <a:ln w="6350">
+            <a:solidFill>
+              <a:srgbClr val="6D28D9"/>
+            </a:solidFill>
+          </a:ln>
+        </p:spPr>
+        <p:style>
+          <a:lnRef idx="2">
+            <a:schemeClr val="accent1">
+              <a:shade val="15000"/>
+            </a:schemeClr>
+          </a:lnRef>
+          <a:fillRef idx="1">
+            <a:schemeClr val="accent1"/>
+          </a:fillRef>
+          <a:effectRef idx="0">
+            <a:schemeClr val="accent1"/>
+          </a:effectRef>
+          <a:fontRef idx="minor">
+            <a:schemeClr val="lt1"/>
+          </a:fontRef>
+        </p:style>
+        <p:txBody>
+          <a:bodyPr wrap="none" lIns="0" tIns="0" rIns="0" bIns="0" rtlCol="0" anchor="ctr"/>
+          <a:lstStyle/>
+          <a:p>
+            <a:pPr algn="ctr"/>
+            <a:r>
+              <a:rPr lang="de-CH" sz="600" b="1">
+                <a:solidFill>
+                  <a:srgbClr val="3B1E7A"/>
+                </a:solidFill>
+                <a:latin typeface="Consolas" panose="020B0609020204030204" pitchFamily="49" charset="0"/>
+              </a:rPr>
+              <a:t>Blocks</a:t>
+            </a:r>
+          </a:p>
+        </p:txBody>
+      </p:sp>
+      <p:sp>
+        <p:nvSpPr>
+          <p:cNvPr id="186" name="Branch child 2.Blocks">
+            <a:extLst>
+              <a:ext uri="{FF2B5EF4-FFF2-40B4-BE49-F238E27FC236}">
+                <a16:creationId xmlns:a16="http://schemas.microsoft.com/office/drawing/2014/main" id="{BD443BFB-DFA2-7C45-66AA-2774C85E0B8F}"/>
+              </a:ext>
+            </a:extLst>
+          </p:cNvPr>
+          <p:cNvSpPr/>
+          <p:nvPr/>
+        </p:nvSpPr>
+        <p:spPr>
+          <a:xfrm>
+            <a:off x="4406900" y="5727700"/>
+            <a:ext cx="381000" cy="101600"/>
+          </a:xfrm>
+          <a:prstGeom prst="rect">
+            <a:avLst/>
+          </a:prstGeom>
+          <a:solidFill>
+            <a:srgbClr val="F5F2FD"/>
+          </a:solidFill>
+          <a:ln w="6350">
+            <a:solidFill>
+              <a:srgbClr val="6D28D9"/>
+            </a:solidFill>
+          </a:ln>
+        </p:spPr>
+        <p:style>
+          <a:lnRef idx="2">
+            <a:schemeClr val="accent1">
+              <a:shade val="15000"/>
+            </a:schemeClr>
+          </a:lnRef>
+          <a:fillRef idx="1">
+            <a:schemeClr val="accent1"/>
+          </a:fillRef>
+          <a:effectRef idx="0">
+            <a:schemeClr val="accent1"/>
+          </a:effectRef>
+          <a:fontRef idx="minor">
+            <a:schemeClr val="lt1"/>
+          </a:fontRef>
+        </p:style>
+        <p:txBody>
+          <a:bodyPr wrap="none" lIns="0" tIns="0" rIns="0" bIns="0" rtlCol="0" anchor="ctr"/>
+          <a:lstStyle/>
+          <a:p>
+            <a:pPr algn="ctr"/>
+            <a:r>
+              <a:rPr lang="de-CH" sz="600" b="1">
+                <a:solidFill>
+                  <a:srgbClr val="3B1E7A"/>
+                </a:solidFill>
+                <a:latin typeface="Consolas" panose="020B0609020204030204" pitchFamily="49" charset="0"/>
+              </a:rPr>
+              <a:t>Blocks</a:t>
+            </a:r>
+          </a:p>
+        </p:txBody>
+      </p:sp>
+      <p:cxnSp>
+        <p:nvCxnSpPr>
+          <p:cNvPr id="188" name="fork root -&gt; child 2">
+            <a:extLst>
+              <a:ext uri="{FF2B5EF4-FFF2-40B4-BE49-F238E27FC236}">
+                <a16:creationId xmlns:a16="http://schemas.microsoft.com/office/drawing/2014/main" id="{DFE71D38-1472-3DEB-2575-1833D7267C4E}"/>
+              </a:ext>
+            </a:extLst>
+          </p:cNvPr>
+          <p:cNvCxnSpPr/>
+          <p:nvPr/>
+        </p:nvCxnSpPr>
+        <p:spPr>
+          <a:xfrm>
+            <a:off x="3924300" y="5271825"/>
+            <a:ext cx="0" cy="304800"/>
+          </a:xfrm>
+          <a:prstGeom prst="line">
+            <a:avLst/>
+          </a:prstGeom>
+          <a:ln w="6350">
             <a:solidFill>
               <a:srgbClr val="6D28D9"/>
             </a:solidFill>
